--- a/01 Elementi Razvoja Softvera/02 Prezentacije/PPTX/08 Hooks, guardrails, евалуације и завршни QA.pptx
+++ b/01 Elementi Razvoja Softvera/02 Prezentacije/PPTX/08 Hooks, guardrails, евалуације и завршни QA.pptx
@@ -1450,7 +1450,7 @@
 </file>
 
 <file path=ppt/notesSlides/notesSlide2.xml><?xml version="1.0" encoding="utf-8"?>
-<p:notes xmlns:a="http://schemas.openxmlformats.org/drawingml/2006/main" xmlns:r="http://schemas.openxmlformats.org/officeDocument/2006/relationships" xmlns:p="http://schemas.openxmlformats.org/presentationml/2006/main">
+<p:notes xmlns:p="http://schemas.openxmlformats.org/presentationml/2006/main">
   <p:cSld>
     <p:spTree>
       <p:nvGrpSpPr>
@@ -1459,21 +1459,16 @@
         <p:nvPr/>
       </p:nvGrpSpPr>
       <p:grpSpPr>
-        <a:xfrm>
-          <a:off x="0" y="0"/>
-          <a:ext cx="0" cy="0"/>
-          <a:chOff x="0" y="0"/>
-          <a:chExt cx="0" cy="0"/>
-        </a:xfrm>
+        <a:xfrm xmlns:a="http://schemas.openxmlformats.org/drawingml/2006/main"/>
       </p:grpSpPr>
       <p:sp>
         <p:nvSpPr>
           <p:cNvPr id="2" name="Slide Image Placeholder 1"/>
           <p:cNvSpPr>
-            <a:spLocks noGrp="1" noRot="1" noChangeAspect="1"/>
+            <a:spLocks xmlns:a="http://schemas.openxmlformats.org/drawingml/2006/main" noGrp="1"/>
           </p:cNvSpPr>
           <p:nvPr>
-            <p:ph type="sldImg"/>
+            <p:ph type="sldImg" idx="0"/>
           </p:nvPr>
         </p:nvSpPr>
         <p:spPr/>
@@ -1482,7 +1477,7 @@
         <p:nvSpPr>
           <p:cNvPr id="3" name="Notes Placeholder 2"/>
           <p:cNvSpPr>
-            <a:spLocks noGrp="1"/>
+            <a:spLocks xmlns:a="http://schemas.openxmlformats.org/drawingml/2006/main" noGrp="1"/>
           </p:cNvSpPr>
           <p:nvPr>
             <p:ph type="body" idx="1"/>
@@ -1490,14 +1485,13 @@
         </p:nvSpPr>
         <p:spPr/>
         <p:txBody>
-          <a:bodyPr/>
-          <a:lstStyle/>
-          <a:p>
-            <a:r>
-              <a:rPr lang="en-US" dirty="0"/>
-              <a:t>После увода о томе зашто обавезна правила претварамо у код, вежба има четири дела. Прво градимо политике као мале класе иза заједничког интерфејса. Затим их повезујемо са Kova преко hook-а и тестирамо као обичан код. Трећи део уводи евалуационе сценарије и завршни QA преглед, а последњи задатак на вежби и контролну тачку P4.</a:t>
-            </a:r>
-            <a:endParaRPr lang="en-US" dirty="0"/>
+          <a:bodyPr xmlns:a="http://schemas.openxmlformats.org/drawingml/2006/main"/>
+          <a:lstStyle xmlns:a="http://schemas.openxmlformats.org/drawingml/2006/main"/>
+          <a:p xmlns:a="http://schemas.openxmlformats.org/drawingml/2006/main">
+            <a:r>
+              <a:t>После увода о томе зашто обавезна правила претварамо у код, вежба има четири дела. Прво градимо политике као мале класе иза заједничког интерфејса. Затим их повезујемо са Kova преко hook-а и тестирамо као обичан код. Трећи део уводи евалуационе сценарије и завршни QA преглед, а последњи задатак на вежби и контролну тачку КТ2.</a:t>
+            </a:r>
+            <a:endParaRPr/>
           </a:p>
         </p:txBody>
       </p:sp>
@@ -1505,34 +1499,23 @@
         <p:nvSpPr>
           <p:cNvPr id="4" name="Slide Number Placeholder 3"/>
           <p:cNvSpPr>
-            <a:spLocks noGrp="1"/>
+            <a:spLocks xmlns:a="http://schemas.openxmlformats.org/drawingml/2006/main" noGrp="1"/>
           </p:cNvSpPr>
           <p:nvPr>
-            <p:ph type="sldNum" sz="quarter" idx="10"/>
+            <p:ph type="sldNum" idx="5"/>
           </p:nvPr>
         </p:nvSpPr>
         <p:spPr/>
         <p:txBody>
-          <a:bodyPr/>
-          <a:lstStyle/>
-          <a:p>
-            <a:fld id="{F7021451-1387-4CA6-816F-3879F97B5CBC}" type="slidenum">
-              <a:rPr lang="en-US"/>
-              <a:t>2</a:t>
-            </a:fld>
-            <a:endParaRPr lang="en-US"/>
-          </a:p>
+          <a:bodyPr xmlns:a="http://schemas.openxmlformats.org/drawingml/2006/main"/>
+          <a:lstStyle xmlns:a="http://schemas.openxmlformats.org/drawingml/2006/main"/>
+          <a:p xmlns:a="http://schemas.openxmlformats.org/drawingml/2006/main"/>
         </p:txBody>
       </p:sp>
     </p:spTree>
-    <p:extLst>
-      <p:ext uri="{BB962C8B-B14F-4D97-AF65-F5344CB8AC3E}">
-        <p14:creationId xmlns:p14="http://schemas.microsoft.com/office/powerpoint/2010/main" val="1024086991"/>
-      </p:ext>
-    </p:extLst>
   </p:cSld>
   <p:clrMapOvr>
-    <a:masterClrMapping/>
+    <a:masterClrMapping xmlns:a="http://schemas.openxmlformats.org/drawingml/2006/main"/>
   </p:clrMapOvr>
 </p:notes>
 </file>
@@ -1802,7 +1785,7 @@
 </file>
 
 <file path=ppt/notesSlides/notesSlide23.xml><?xml version="1.0" encoding="utf-8"?>
-<p:notes xmlns:a="http://schemas.openxmlformats.org/drawingml/2006/main" xmlns:r="http://schemas.openxmlformats.org/officeDocument/2006/relationships" xmlns:p="http://schemas.openxmlformats.org/presentationml/2006/main">
+<p:notes xmlns:p="http://schemas.openxmlformats.org/presentationml/2006/main">
   <p:cSld>
     <p:spTree>
       <p:nvGrpSpPr>
@@ -1811,21 +1794,16 @@
         <p:nvPr/>
       </p:nvGrpSpPr>
       <p:grpSpPr>
-        <a:xfrm>
-          <a:off x="0" y="0"/>
-          <a:ext cx="0" cy="0"/>
-          <a:chOff x="0" y="0"/>
-          <a:chExt cx="0" cy="0"/>
-        </a:xfrm>
+        <a:xfrm xmlns:a="http://schemas.openxmlformats.org/drawingml/2006/main"/>
       </p:grpSpPr>
       <p:sp>
         <p:nvSpPr>
           <p:cNvPr id="2" name="Slide Image Placeholder 1"/>
           <p:cNvSpPr>
-            <a:spLocks noGrp="1" noRot="1" noChangeAspect="1"/>
+            <a:spLocks xmlns:a="http://schemas.openxmlformats.org/drawingml/2006/main" noGrp="1"/>
           </p:cNvSpPr>
           <p:nvPr>
-            <p:ph type="sldImg"/>
+            <p:ph type="sldImg" idx="0"/>
           </p:nvPr>
         </p:nvSpPr>
         <p:spPr/>
@@ -1834,7 +1812,7 @@
         <p:nvSpPr>
           <p:cNvPr id="3" name="Notes Placeholder 2"/>
           <p:cNvSpPr>
-            <a:spLocks noGrp="1"/>
+            <a:spLocks xmlns:a="http://schemas.openxmlformats.org/drawingml/2006/main" noGrp="1"/>
           </p:cNvSpPr>
           <p:nvPr>
             <p:ph type="body" idx="1"/>
@@ -1842,14 +1820,13 @@
         </p:nvSpPr>
         <p:spPr/>
         <p:txBody>
-          <a:bodyPr/>
-          <a:lstStyle/>
-          <a:p>
-            <a:r>
-              <a:rPr lang="en-US" dirty="0"/>
-              <a:t>Последњи део повезује вежбу са пројектом. Пролазимо кроз задатак на вежби, резимирамо целу причу о AI радном току и видимо шта се очекује на контролној тачки P4 и завршној одбрани.</a:t>
-            </a:r>
-            <a:endParaRPr lang="en-US" dirty="0"/>
+          <a:bodyPr xmlns:a="http://schemas.openxmlformats.org/drawingml/2006/main"/>
+          <a:lstStyle xmlns:a="http://schemas.openxmlformats.org/drawingml/2006/main"/>
+          <a:p xmlns:a="http://schemas.openxmlformats.org/drawingml/2006/main">
+            <a:r>
+              <a:t>Последњи део повезује вежбу са пројектом. Пролазимо кроз задатак на вежби, резимирамо целу причу о AI радном току и видимо шта се очекује на контролној тачки КТ2 и завршној одбрани.</a:t>
+            </a:r>
+            <a:endParaRPr/>
           </a:p>
         </p:txBody>
       </p:sp>
@@ -1857,40 +1834,29 @@
         <p:nvSpPr>
           <p:cNvPr id="4" name="Slide Number Placeholder 3"/>
           <p:cNvSpPr>
-            <a:spLocks noGrp="1"/>
+            <a:spLocks xmlns:a="http://schemas.openxmlformats.org/drawingml/2006/main" noGrp="1"/>
           </p:cNvSpPr>
           <p:nvPr>
-            <p:ph type="sldNum" sz="quarter" idx="10"/>
+            <p:ph type="sldNum" idx="5"/>
           </p:nvPr>
         </p:nvSpPr>
         <p:spPr/>
         <p:txBody>
-          <a:bodyPr/>
-          <a:lstStyle/>
-          <a:p>
-            <a:fld id="{F7021451-1387-4CA6-816F-3879F97B5CBC}" type="slidenum">
-              <a:rPr lang="en-US"/>
-              <a:t>23</a:t>
-            </a:fld>
-            <a:endParaRPr lang="en-US"/>
-          </a:p>
+          <a:bodyPr xmlns:a="http://schemas.openxmlformats.org/drawingml/2006/main"/>
+          <a:lstStyle xmlns:a="http://schemas.openxmlformats.org/drawingml/2006/main"/>
+          <a:p xmlns:a="http://schemas.openxmlformats.org/drawingml/2006/main"/>
         </p:txBody>
       </p:sp>
     </p:spTree>
-    <p:extLst>
-      <p:ext uri="{BB962C8B-B14F-4D97-AF65-F5344CB8AC3E}">
-        <p14:creationId xmlns:p14="http://schemas.microsoft.com/office/powerpoint/2010/main" val="1024086991"/>
-      </p:ext>
-    </p:extLst>
   </p:cSld>
   <p:clrMapOvr>
-    <a:masterClrMapping/>
+    <a:masterClrMapping xmlns:a="http://schemas.openxmlformats.org/drawingml/2006/main"/>
   </p:clrMapOvr>
 </p:notes>
 </file>
 
 <file path=ppt/notesSlides/notesSlide24.xml><?xml version="1.0" encoding="utf-8"?>
-<p:notes xmlns:a="http://schemas.openxmlformats.org/drawingml/2006/main" xmlns:r="http://schemas.openxmlformats.org/officeDocument/2006/relationships" xmlns:p="http://schemas.openxmlformats.org/presentationml/2006/main">
+<p:notes xmlns:p="http://schemas.openxmlformats.org/presentationml/2006/main">
   <p:cSld>
     <p:spTree>
       <p:nvGrpSpPr>
@@ -1899,21 +1865,16 @@
         <p:nvPr/>
       </p:nvGrpSpPr>
       <p:grpSpPr>
-        <a:xfrm>
-          <a:off x="0" y="0"/>
-          <a:ext cx="0" cy="0"/>
-          <a:chOff x="0" y="0"/>
-          <a:chExt cx="0" cy="0"/>
-        </a:xfrm>
+        <a:xfrm xmlns:a="http://schemas.openxmlformats.org/drawingml/2006/main"/>
       </p:grpSpPr>
       <p:sp>
         <p:nvSpPr>
           <p:cNvPr id="2" name="Slide Image Placeholder 1"/>
           <p:cNvSpPr>
-            <a:spLocks noGrp="1" noRot="1" noChangeAspect="1"/>
+            <a:spLocks xmlns:a="http://schemas.openxmlformats.org/drawingml/2006/main" noGrp="1"/>
           </p:cNvSpPr>
           <p:nvPr>
-            <p:ph type="sldImg"/>
+            <p:ph type="sldImg" idx="0"/>
           </p:nvPr>
         </p:nvSpPr>
         <p:spPr/>
@@ -1922,7 +1883,7 @@
         <p:nvSpPr>
           <p:cNvPr id="3" name="Notes Placeholder 2"/>
           <p:cNvSpPr>
-            <a:spLocks noGrp="1"/>
+            <a:spLocks xmlns:a="http://schemas.openxmlformats.org/drawingml/2006/main" noGrp="1"/>
           </p:cNvSpPr>
           <p:nvPr>
             <p:ph type="body" idx="1"/>
@@ -1930,14 +1891,13 @@
         </p:nvSpPr>
         <p:spPr/>
         <p:txBody>
-          <a:bodyPr/>
-          <a:lstStyle/>
-          <a:p>
-            <a:r>
-              <a:rPr lang="en-US" dirty="0"/>
+          <a:bodyPr xmlns:a="http://schemas.openxmlformats.org/drawingml/2006/main"/>
+          <a:lstStyle xmlns:a="http://schemas.openxmlformats.org/drawingml/2006/main"/>
+          <a:p xmlns:a="http://schemas.openxmlformats.org/drawingml/2006/main">
+            <a:r>
               <a:t>На вежби прво покрећемо guardrail тестове и проверавамо да пролазе. Затим ручно проверавамо да је приступ .env фајлу блокиран, као и да су деструктивне команде блокиране. Након тога објашњавамо разлику између hook-а, који је адаптер, и политике, која је правило. На крају свако осмишљава један eval сценарио за агентски ток, са пољима must и mustNot.</a:t>
             </a:r>
-            <a:endParaRPr lang="en-US" dirty="0"/>
+            <a:endParaRPr/>
           </a:p>
         </p:txBody>
       </p:sp>
@@ -1945,34 +1905,23 @@
         <p:nvSpPr>
           <p:cNvPr id="4" name="Slide Number Placeholder 3"/>
           <p:cNvSpPr>
-            <a:spLocks noGrp="1"/>
+            <a:spLocks xmlns:a="http://schemas.openxmlformats.org/drawingml/2006/main" noGrp="1"/>
           </p:cNvSpPr>
           <p:nvPr>
-            <p:ph type="sldNum" sz="quarter" idx="10"/>
+            <p:ph type="sldNum" idx="5"/>
           </p:nvPr>
         </p:nvSpPr>
         <p:spPr/>
         <p:txBody>
-          <a:bodyPr/>
-          <a:lstStyle/>
-          <a:p>
-            <a:fld id="{F7021451-1387-4CA6-816F-3879F97B5CBC}" type="slidenum">
-              <a:rPr lang="en-US"/>
-              <a:t>24</a:t>
-            </a:fld>
-            <a:endParaRPr lang="en-US"/>
-          </a:p>
+          <a:bodyPr xmlns:a="http://schemas.openxmlformats.org/drawingml/2006/main"/>
+          <a:lstStyle xmlns:a="http://schemas.openxmlformats.org/drawingml/2006/main"/>
+          <a:p xmlns:a="http://schemas.openxmlformats.org/drawingml/2006/main"/>
         </p:txBody>
       </p:sp>
     </p:spTree>
-    <p:extLst>
-      <p:ext uri="{BB962C8B-B14F-4D97-AF65-F5344CB8AC3E}">
-        <p14:creationId xmlns:p14="http://schemas.microsoft.com/office/powerpoint/2010/main" val="1024086991"/>
-      </p:ext>
-    </p:extLst>
   </p:cSld>
   <p:clrMapOvr>
-    <a:masterClrMapping/>
+    <a:masterClrMapping xmlns:a="http://schemas.openxmlformats.org/drawingml/2006/main"/>
   </p:clrMapOvr>
 </p:notes>
 </file>
@@ -2066,7 +2015,7 @@
 </file>
 
 <file path=ppt/notesSlides/notesSlide26.xml><?xml version="1.0" encoding="utf-8"?>
-<p:notes xmlns:a="http://schemas.openxmlformats.org/drawingml/2006/main" xmlns:r="http://schemas.openxmlformats.org/officeDocument/2006/relationships" xmlns:p="http://schemas.openxmlformats.org/presentationml/2006/main">
+<p:notes xmlns:p="http://schemas.openxmlformats.org/presentationml/2006/main">
   <p:cSld>
     <p:spTree>
       <p:nvGrpSpPr>
@@ -2075,21 +2024,16 @@
         <p:nvPr/>
       </p:nvGrpSpPr>
       <p:grpSpPr>
-        <a:xfrm>
-          <a:off x="0" y="0"/>
-          <a:ext cx="0" cy="0"/>
-          <a:chOff x="0" y="0"/>
-          <a:chExt cx="0" cy="0"/>
-        </a:xfrm>
+        <a:xfrm xmlns:a="http://schemas.openxmlformats.org/drawingml/2006/main"/>
       </p:grpSpPr>
       <p:sp>
         <p:nvSpPr>
           <p:cNvPr id="2" name="Slide Image Placeholder 1"/>
           <p:cNvSpPr>
-            <a:spLocks noGrp="1" noRot="1" noChangeAspect="1"/>
+            <a:spLocks xmlns:a="http://schemas.openxmlformats.org/drawingml/2006/main" noGrp="1"/>
           </p:cNvSpPr>
           <p:nvPr>
-            <p:ph type="sldImg"/>
+            <p:ph type="sldImg" idx="0"/>
           </p:nvPr>
         </p:nvSpPr>
         <p:spPr/>
@@ -2098,7 +2042,7 @@
         <p:nvSpPr>
           <p:cNvPr id="3" name="Notes Placeholder 2"/>
           <p:cNvSpPr>
-            <a:spLocks noGrp="1"/>
+            <a:spLocks xmlns:a="http://schemas.openxmlformats.org/drawingml/2006/main" noGrp="1"/>
           </p:cNvSpPr>
           <p:nvPr>
             <p:ph type="body" idx="1"/>
@@ -2106,14 +2050,13 @@
         </p:nvSpPr>
         <p:spPr/>
         <p:txBody>
-          <a:bodyPr/>
-          <a:lstStyle/>
-          <a:p>
-            <a:r>
-              <a:rPr lang="en-US" dirty="0"/>
-              <a:t>Контролна тачка P4 повезује све што смо радили током семестра. Очекују се AGENTS.md и AI_USAGE.md са пројектним правилима и записима одлука, најмање две поновљиве процедуре са јасним улазима, излазима и ограничењима и најмање три евалуациона сценарија, од којих бар један негативан. На одбрани сваки члан тима објашњава свој део сопственим речима, без генерисаног одговора. Термин је недеља од 14. децембра, после осме вежбе.</a:t>
-            </a:r>
-            <a:endParaRPr lang="en-US" dirty="0"/>
+          <a:bodyPr xmlns:a="http://schemas.openxmlformats.org/drawingml/2006/main"/>
+          <a:lstStyle xmlns:a="http://schemas.openxmlformats.org/drawingml/2006/main"/>
+          <a:p xmlns:a="http://schemas.openxmlformats.org/drawingml/2006/main">
+            <a:r>
+              <a:t>Контролна тачка КТ2 повезује све што смо радили током семестра. Очекују се AGENTS.md и AI_USAGE.md са пројектним правилима и записима одлука, најмање две поновљиве процедуре са јасним улазима, излазима и ограничењима и најмање три евалуациона сценарија, од којих бар један негативан. На одбрани сваки члан тима објашњава свој део сопственим речима, без генерисаног одговора. КТ2 се одржава у термину осме вежбе и носи највише 10 поена. Контролне тачке и термини одбране пројекта су одвојене обавезе.</a:t>
+            </a:r>
+            <a:endParaRPr/>
           </a:p>
         </p:txBody>
       </p:sp>
@@ -2121,34 +2064,23 @@
         <p:nvSpPr>
           <p:cNvPr id="4" name="Slide Number Placeholder 3"/>
           <p:cNvSpPr>
-            <a:spLocks noGrp="1"/>
+            <a:spLocks xmlns:a="http://schemas.openxmlformats.org/drawingml/2006/main" noGrp="1"/>
           </p:cNvSpPr>
           <p:nvPr>
-            <p:ph type="sldNum" sz="quarter" idx="10"/>
+            <p:ph type="sldNum" idx="5"/>
           </p:nvPr>
         </p:nvSpPr>
         <p:spPr/>
         <p:txBody>
-          <a:bodyPr/>
-          <a:lstStyle/>
-          <a:p>
-            <a:fld id="{F7021451-1387-4CA6-816F-3879F97B5CBC}" type="slidenum">
-              <a:rPr lang="en-US"/>
-              <a:t>26</a:t>
-            </a:fld>
-            <a:endParaRPr lang="en-US"/>
-          </a:p>
+          <a:bodyPr xmlns:a="http://schemas.openxmlformats.org/drawingml/2006/main"/>
+          <a:lstStyle xmlns:a="http://schemas.openxmlformats.org/drawingml/2006/main"/>
+          <a:p xmlns:a="http://schemas.openxmlformats.org/drawingml/2006/main"/>
         </p:txBody>
       </p:sp>
     </p:spTree>
-    <p:extLst>
-      <p:ext uri="{BB962C8B-B14F-4D97-AF65-F5344CB8AC3E}">
-        <p14:creationId xmlns:p14="http://schemas.microsoft.com/office/powerpoint/2010/main" val="1024086991"/>
-      </p:ext>
-    </p:extLst>
   </p:cSld>
   <p:clrMapOvr>
-    <a:masterClrMapping/>
+    <a:masterClrMapping xmlns:a="http://schemas.openxmlformats.org/drawingml/2006/main"/>
   </p:clrMapOvr>
 </p:notes>
 </file>
@@ -17180,11 +17112,11 @@
 </file>
 
 <file path=ppt/slides/slide2.xml><?xml version="1.0" encoding="utf-8"?>
-<p:sld xmlns:a="http://schemas.openxmlformats.org/drawingml/2006/main" xmlns:r="http://schemas.openxmlformats.org/officeDocument/2006/relationships" xmlns:p="http://schemas.openxmlformats.org/presentationml/2006/main">
-  <p:cSld name="Slide 2">
+<p:sld xmlns:p="http://schemas.openxmlformats.org/presentationml/2006/main">
+  <p:cSld>
     <p:bg>
       <p:bgPr>
-        <a:solidFill>
+        <a:solidFill xmlns:a="http://schemas.openxmlformats.org/drawingml/2006/main">
           <a:srgbClr val="F6F7F5"/>
         </a:solidFill>
       </p:bgPr>
@@ -17196,145 +17128,169 @@
         <p:nvPr/>
       </p:nvGrpSpPr>
       <p:grpSpPr>
-        <a:xfrm>
-          <a:off x="0" y="0"/>
-          <a:ext cx="0" cy="0"/>
-          <a:chOff x="0" y="0"/>
-          <a:chExt cx="0" cy="0"/>
-        </a:xfrm>
+        <a:xfrm xmlns:a="http://schemas.openxmlformats.org/drawingml/2006/main"/>
       </p:grpSpPr>
       <p:sp>
         <p:nvSpPr>
-          <p:cNvPr id="2" name="Shape 0"/>
-          <p:cNvSpPr/>
-          <p:nvPr/>
-        </p:nvSpPr>
-        <p:spPr>
-          <a:xfrm>
+          <p:cNvPr id="2" name="Shape 0">
+            <a:extLst xmlns:a="http://schemas.openxmlformats.org/drawingml/2006/main">
+              <a:ext uri="{FF2B5EF4-FFF2-40B4-BE49-F238E27FC236}">
+                <a16:creationId xmlns:a16="http://schemas.microsoft.com/office/drawing/2014/main" id="{D6248FE5-E144-4FAB-8374-70ADA09511BC}"/>
+              </a:ext>
+            </a:extLst>
+          </p:cNvPr>
+          <p:cNvSpPr>
+            <a:spLocks xmlns:a="http://schemas.openxmlformats.org/drawingml/2006/main" noGrp="1"/>
+          </p:cNvSpPr>
+          <p:nvPr/>
+        </p:nvSpPr>
+        <p:spPr>
+          <a:xfrm xmlns:a="http://schemas.openxmlformats.org/drawingml/2006/main">
             <a:off x="812800" y="457200"/>
             <a:ext cx="457200" cy="38100"/>
           </a:xfrm>
-          <a:prstGeom prst="roundRect">
+          <a:prstGeom xmlns:a="http://schemas.openxmlformats.org/drawingml/2006/main" prst="roundRect">
             <a:avLst>
               <a:gd name="adj" fmla="val 50000"/>
             </a:avLst>
           </a:prstGeom>
-          <a:solidFill>
+          <a:solidFill xmlns:a="http://schemas.openxmlformats.org/drawingml/2006/main">
             <a:srgbClr val="7D5E00"/>
           </a:solidFill>
-          <a:ln/>
-        </p:spPr>
-      </p:sp>
-      <p:sp>
-        <p:nvSpPr>
-          <p:cNvPr id="3" name="Text 1"/>
-          <p:cNvSpPr/>
-          <p:nvPr/>
-        </p:nvSpPr>
-        <p:spPr>
-          <a:xfrm>
+        </p:spPr>
+      </p:sp>
+      <p:sp>
+        <p:nvSpPr>
+          <p:cNvPr id="3" name="Text 1">
+            <a:extLst xmlns:a="http://schemas.openxmlformats.org/drawingml/2006/main">
+              <a:ext uri="{FF2B5EF4-FFF2-40B4-BE49-F238E27FC236}">
+                <a16:creationId xmlns:a16="http://schemas.microsoft.com/office/drawing/2014/main" id="{5D5E8A25-0EE9-418F-A98F-8C8816BB3F9F}"/>
+              </a:ext>
+            </a:extLst>
+          </p:cNvPr>
+          <p:cNvSpPr>
+            <a:spLocks xmlns:a="http://schemas.openxmlformats.org/drawingml/2006/main" noGrp="1"/>
+          </p:cNvSpPr>
+          <p:nvPr/>
+        </p:nvSpPr>
+        <p:spPr>
+          <a:xfrm xmlns:a="http://schemas.openxmlformats.org/drawingml/2006/main">
             <a:off x="812800" y="711200"/>
             <a:ext cx="10883392" cy="238720"/>
           </a:xfrm>
-          <a:prstGeom prst="rect">
-            <a:avLst/>
-          </a:prstGeom>
-          <a:noFill/>
-          <a:ln/>
-        </p:spPr>
-        <p:txBody>
-          <a:bodyPr wrap="square" lIns="0" tIns="0" rIns="0" bIns="0" rtlCol="0" anchor="t">
-            <a:normAutofit/>
-          </a:bodyPr>
-          <a:lstStyle/>
-          <a:p>
-            <a:pPr algn="l" indent="0" marL="0">
+          <a:prstGeom xmlns:a="http://schemas.openxmlformats.org/drawingml/2006/main" prst="rect">
+            <a:avLst/>
+          </a:prstGeom>
+          <a:noFill xmlns:a="http://schemas.openxmlformats.org/drawingml/2006/main"/>
+        </p:spPr>
+        <p:txBody>
+          <a:bodyPr xmlns:a="http://schemas.openxmlformats.org/drawingml/2006/main" wrap="square" lIns="0" tIns="0" rIns="0" bIns="0" anchor="t">
+            <a:normAutofit/>
+          </a:bodyPr>
+          <a:lstStyle xmlns:a="http://schemas.openxmlformats.org/drawingml/2006/main"/>
+          <a:p xmlns:a="http://schemas.openxmlformats.org/drawingml/2006/main">
+            <a:pPr marL="0" indent="0" algn="l">
               <a:lnSpc>
                 <a:spcPts val="1680"/>
               </a:lnSpc>
               <a:buNone/>
             </a:pPr>
             <a:r>
-              <a:rPr lang="en-US" sz="1200" spc="100" kern="0" dirty="0">
+              <a:rPr sz="1200" spc="100">
                 <a:solidFill>
                   <a:srgbClr val="7D5E00"/>
                 </a:solidFill>
-                <a:latin typeface="IBM Plex Mono" pitchFamily="49" charset="0"/>
-                <a:ea typeface="IBM Plex Mono" pitchFamily="49" charset="-122"/>
-                <a:cs typeface="IBM Plex Mono" pitchFamily="49" charset="-120"/>
+                <a:latin typeface="IBM Plex Mono"/>
+                <a:ea typeface="IBM Plex Mono"/>
+                <a:cs typeface="IBM Plex Mono"/>
               </a:rPr>
               <a:t>ПРЕГЛЕД</a:t>
             </a:r>
-            <a:endParaRPr lang="en-US" sz="1200" dirty="0"/>
-          </a:p>
-        </p:txBody>
-      </p:sp>
-      <p:sp>
-        <p:nvSpPr>
-          <p:cNvPr id="4" name="Text 2"/>
-          <p:cNvSpPr/>
+            <a:endParaRPr sz="1200"/>
+          </a:p>
+        </p:txBody>
+      </p:sp>
+      <p:sp>
+        <p:nvSpPr>
+          <p:cNvPr id="4" name="Text 2">
+            <a:extLst xmlns:a="http://schemas.openxmlformats.org/drawingml/2006/main">
+              <a:ext uri="{FF2B5EF4-FFF2-40B4-BE49-F238E27FC236}">
+                <a16:creationId xmlns:a16="http://schemas.microsoft.com/office/drawing/2014/main" id="{AED59124-663C-48FC-B301-321E62CC27B5}"/>
+              </a:ext>
+            </a:extLst>
+          </p:cNvPr>
+          <p:cNvSpPr>
+            <a:spLocks xmlns:a="http://schemas.openxmlformats.org/drawingml/2006/main" noGrp="1"/>
+          </p:cNvSpPr>
           <p:nvPr>
-            <p:ph type="title"/>
+            <p:ph type="title" idx="0"/>
           </p:nvPr>
         </p:nvSpPr>
         <p:spPr>
-          <a:xfrm>
+          <a:xfrm xmlns:a="http://schemas.openxmlformats.org/drawingml/2006/main">
             <a:off x="812800" y="1000720"/>
             <a:ext cx="10883392" cy="444500"/>
           </a:xfrm>
-          <a:prstGeom prst="rect">
-            <a:avLst/>
-          </a:prstGeom>
-          <a:noFill/>
-          <a:ln/>
-        </p:spPr>
-        <p:txBody>
-          <a:bodyPr wrap="square" lIns="0" tIns="0" rIns="0" bIns="0" rtlCol="0" anchor="t">
-            <a:normAutofit/>
-          </a:bodyPr>
-          <a:lstStyle/>
-          <a:p>
-            <a:pPr algn="l" indent="0" marL="0">
+          <a:prstGeom xmlns:a="http://schemas.openxmlformats.org/drawingml/2006/main" prst="rect">
+            <a:avLst/>
+          </a:prstGeom>
+          <a:noFill xmlns:a="http://schemas.openxmlformats.org/drawingml/2006/main"/>
+        </p:spPr>
+        <p:txBody>
+          <a:bodyPr xmlns:a="http://schemas.openxmlformats.org/drawingml/2006/main" wrap="square" lIns="0" tIns="0" rIns="0" bIns="0" anchor="t">
+            <a:normAutofit/>
+          </a:bodyPr>
+          <a:lstStyle xmlns:a="http://schemas.openxmlformats.org/drawingml/2006/main"/>
+          <a:p xmlns:a="http://schemas.openxmlformats.org/drawingml/2006/main">
+            <a:pPr marL="0" indent="0" algn="l">
               <a:lnSpc>
                 <a:spcPts val="3300"/>
               </a:lnSpc>
               <a:buNone/>
             </a:pPr>
             <a:r>
-              <a:rPr lang="en-US" sz="3000" b="1" i="0" spc="-50" kern="0" dirty="0">
+              <a:rPr sz="3000" b="1" i="0" spc="-50">
                 <a:solidFill>
                   <a:srgbClr val="13202D"/>
                 </a:solidFill>
-                <a:latin typeface="IBM Plex Sans" pitchFamily="34" charset="0"/>
-                <a:ea typeface="IBM Plex Sans" pitchFamily="34" charset="-122"/>
-                <a:cs typeface="IBM Plex Sans" pitchFamily="34" charset="-120"/>
+                <a:latin typeface="IBM Plex Sans"/>
+                <a:ea typeface="IBM Plex Sans"/>
+                <a:cs typeface="IBM Plex Sans"/>
               </a:rPr>
               <a:t>Садржај презентације</a:t>
             </a:r>
-            <a:endParaRPr lang="en-US" sz="3000" dirty="0"/>
-          </a:p>
-        </p:txBody>
-      </p:sp>
-      <p:sp>
-        <p:nvSpPr>
-          <p:cNvPr id="5" name="Shape 3"/>
-          <p:cNvSpPr/>
-          <p:nvPr/>
-        </p:nvSpPr>
-        <p:spPr>
-          <a:xfrm>
+            <a:endParaRPr sz="3000"/>
+          </a:p>
+        </p:txBody>
+      </p:sp>
+      <p:sp>
+        <p:nvSpPr>
+          <p:cNvPr id="5" name="Shape 3">
+            <a:extLst xmlns:a="http://schemas.openxmlformats.org/drawingml/2006/main">
+              <a:ext uri="{FF2B5EF4-FFF2-40B4-BE49-F238E27FC236}">
+                <a16:creationId xmlns:a16="http://schemas.microsoft.com/office/drawing/2014/main" id="{02F03064-BAE5-4142-B198-184E2F260D7E}"/>
+              </a:ext>
+            </a:extLst>
+          </p:cNvPr>
+          <p:cNvSpPr>
+            <a:spLocks xmlns:a="http://schemas.openxmlformats.org/drawingml/2006/main" noGrp="1"/>
+          </p:cNvSpPr>
+          <p:nvPr/>
+        </p:nvSpPr>
+        <p:spPr>
+          <a:xfrm xmlns:a="http://schemas.openxmlformats.org/drawingml/2006/main">
             <a:off x="815975" y="1676995"/>
             <a:ext cx="2540000" cy="2241352"/>
           </a:xfrm>
-          <a:prstGeom prst="roundRect">
+          <a:prstGeom xmlns:a="http://schemas.openxmlformats.org/drawingml/2006/main" prst="roundRect">
             <a:avLst>
               <a:gd name="adj" fmla="val 4391"/>
             </a:avLst>
           </a:prstGeom>
-          <a:solidFill>
+          <a:solidFill xmlns:a="http://schemas.openxmlformats.org/drawingml/2006/main">
             <a:srgbClr val="FCFCFB"/>
           </a:solidFill>
-          <a:ln w="6350">
+          <a:ln xmlns:a="http://schemas.openxmlformats.org/drawingml/2006/main" w="6350">
             <a:solidFill>
               <a:srgbClr val="D3DAE1"/>
             </a:solidFill>
@@ -17344,222 +17300,265 @@
       </p:sp>
       <p:sp>
         <p:nvSpPr>
-          <p:cNvPr id="6" name="Shape 4"/>
-          <p:cNvSpPr/>
-          <p:nvPr/>
-        </p:nvSpPr>
-        <p:spPr>
-          <a:xfrm>
+          <p:cNvPr id="6" name="Shape 4">
+            <a:extLst xmlns:a="http://schemas.openxmlformats.org/drawingml/2006/main">
+              <a:ext uri="{FF2B5EF4-FFF2-40B4-BE49-F238E27FC236}">
+                <a16:creationId xmlns:a16="http://schemas.microsoft.com/office/drawing/2014/main" id="{03AB5D80-A1B5-48A1-90FE-44508B00BB32}"/>
+              </a:ext>
+            </a:extLst>
+          </p:cNvPr>
+          <p:cNvSpPr>
+            <a:spLocks xmlns:a="http://schemas.openxmlformats.org/drawingml/2006/main" noGrp="1"/>
+          </p:cNvSpPr>
+          <p:nvPr/>
+        </p:nvSpPr>
+        <p:spPr>
+          <a:xfrm xmlns:a="http://schemas.openxmlformats.org/drawingml/2006/main">
             <a:off x="996950" y="1857970"/>
             <a:ext cx="355600" cy="38100"/>
           </a:xfrm>
-          <a:prstGeom prst="roundRect">
+          <a:prstGeom xmlns:a="http://schemas.openxmlformats.org/drawingml/2006/main" prst="roundRect">
             <a:avLst>
               <a:gd name="adj" fmla="val 50000"/>
             </a:avLst>
           </a:prstGeom>
-          <a:solidFill>
+          <a:solidFill xmlns:a="http://schemas.openxmlformats.org/drawingml/2006/main">
             <a:srgbClr val="7D5E00"/>
           </a:solidFill>
-          <a:ln/>
-        </p:spPr>
-      </p:sp>
-      <p:sp>
-        <p:nvSpPr>
-          <p:cNvPr id="7" name="Text 5"/>
-          <p:cNvSpPr/>
-          <p:nvPr/>
-        </p:nvSpPr>
-        <p:spPr>
-          <a:xfrm>
+        </p:spPr>
+      </p:sp>
+      <p:sp>
+        <p:nvSpPr>
+          <p:cNvPr id="7" name="Text 5">
+            <a:extLst xmlns:a="http://schemas.openxmlformats.org/drawingml/2006/main">
+              <a:ext uri="{FF2B5EF4-FFF2-40B4-BE49-F238E27FC236}">
+                <a16:creationId xmlns:a16="http://schemas.microsoft.com/office/drawing/2014/main" id="{7198EF2C-6443-4DC1-8565-C37DAE4A84F3}"/>
+              </a:ext>
+            </a:extLst>
+          </p:cNvPr>
+          <p:cNvSpPr>
+            <a:spLocks xmlns:a="http://schemas.openxmlformats.org/drawingml/2006/main" noGrp="1"/>
+          </p:cNvSpPr>
+          <p:nvPr/>
+        </p:nvSpPr>
+        <p:spPr>
+          <a:xfrm xmlns:a="http://schemas.openxmlformats.org/drawingml/2006/main">
             <a:off x="996950" y="1984970"/>
             <a:ext cx="2243392" cy="444500"/>
           </a:xfrm>
-          <a:prstGeom prst="rect">
-            <a:avLst/>
-          </a:prstGeom>
-          <a:noFill/>
-          <a:ln/>
-        </p:spPr>
-        <p:txBody>
-          <a:bodyPr wrap="square" lIns="0" tIns="0" rIns="0" bIns="0" rtlCol="0" anchor="t">
-            <a:normAutofit/>
-          </a:bodyPr>
-          <a:lstStyle/>
-          <a:p>
-            <a:pPr algn="l" indent="0" marL="0">
+          <a:prstGeom xmlns:a="http://schemas.openxmlformats.org/drawingml/2006/main" prst="rect">
+            <a:avLst/>
+          </a:prstGeom>
+          <a:noFill xmlns:a="http://schemas.openxmlformats.org/drawingml/2006/main"/>
+        </p:spPr>
+        <p:txBody>
+          <a:bodyPr xmlns:a="http://schemas.openxmlformats.org/drawingml/2006/main" wrap="square" lIns="0" tIns="0" rIns="0" bIns="0" anchor="t">
+            <a:normAutofit/>
+          </a:bodyPr>
+          <a:lstStyle xmlns:a="http://schemas.openxmlformats.org/drawingml/2006/main"/>
+          <a:p xmlns:a="http://schemas.openxmlformats.org/drawingml/2006/main">
+            <a:pPr marL="0" indent="0" algn="l">
               <a:lnSpc>
                 <a:spcPts val="3300"/>
               </a:lnSpc>
               <a:buNone/>
             </a:pPr>
             <a:r>
-              <a:rPr lang="en-US" sz="3000" dirty="0">
+              <a:rPr sz="3000">
                 <a:solidFill>
                   <a:srgbClr val="7D5E00"/>
                 </a:solidFill>
-                <a:latin typeface="IBM Plex Mono" pitchFamily="49" charset="0"/>
-                <a:ea typeface="IBM Plex Mono" pitchFamily="49" charset="-122"/>
-                <a:cs typeface="IBM Plex Mono" pitchFamily="49" charset="-120"/>
+                <a:latin typeface="IBM Plex Mono"/>
+                <a:ea typeface="IBM Plex Mono"/>
+                <a:cs typeface="IBM Plex Mono"/>
               </a:rPr>
               <a:t>01</a:t>
             </a:r>
-            <a:endParaRPr lang="en-US" sz="3000" dirty="0"/>
-          </a:p>
-        </p:txBody>
-      </p:sp>
-      <p:sp>
-        <p:nvSpPr>
-          <p:cNvPr id="8" name="Text 6"/>
-          <p:cNvSpPr/>
-          <p:nvPr/>
-        </p:nvSpPr>
-        <p:spPr>
-          <a:xfrm>
+            <a:endParaRPr sz="3000"/>
+          </a:p>
+        </p:txBody>
+      </p:sp>
+      <p:sp>
+        <p:nvSpPr>
+          <p:cNvPr id="8" name="Text 6">
+            <a:extLst xmlns:a="http://schemas.openxmlformats.org/drawingml/2006/main">
+              <a:ext uri="{FF2B5EF4-FFF2-40B4-BE49-F238E27FC236}">
+                <a16:creationId xmlns:a16="http://schemas.microsoft.com/office/drawing/2014/main" id="{0149FB8A-F0F9-485F-A92D-2438DB1AAF1A}"/>
+              </a:ext>
+            </a:extLst>
+          </p:cNvPr>
+          <p:cNvSpPr>
+            <a:spLocks xmlns:a="http://schemas.openxmlformats.org/drawingml/2006/main" noGrp="1"/>
+          </p:cNvSpPr>
+          <p:nvPr/>
+        </p:nvSpPr>
+        <p:spPr>
+          <a:xfrm xmlns:a="http://schemas.openxmlformats.org/drawingml/2006/main">
             <a:off x="996950" y="2492970"/>
             <a:ext cx="2243392" cy="238720"/>
           </a:xfrm>
-          <a:prstGeom prst="rect">
-            <a:avLst/>
-          </a:prstGeom>
-          <a:noFill/>
-          <a:ln/>
-        </p:spPr>
-        <p:txBody>
-          <a:bodyPr wrap="square" lIns="0" tIns="0" rIns="0" bIns="0" rtlCol="0" anchor="t">
-            <a:normAutofit/>
-          </a:bodyPr>
-          <a:lstStyle/>
-          <a:p>
-            <a:pPr algn="l" indent="0" marL="0">
+          <a:prstGeom xmlns:a="http://schemas.openxmlformats.org/drawingml/2006/main" prst="rect">
+            <a:avLst/>
+          </a:prstGeom>
+          <a:noFill xmlns:a="http://schemas.openxmlformats.org/drawingml/2006/main"/>
+        </p:spPr>
+        <p:txBody>
+          <a:bodyPr xmlns:a="http://schemas.openxmlformats.org/drawingml/2006/main" wrap="square" lIns="0" tIns="0" rIns="0" bIns="0" anchor="t">
+            <a:normAutofit/>
+          </a:bodyPr>
+          <a:lstStyle xmlns:a="http://schemas.openxmlformats.org/drawingml/2006/main"/>
+          <a:p xmlns:a="http://schemas.openxmlformats.org/drawingml/2006/main">
+            <a:pPr marL="0" indent="0" algn="l">
               <a:lnSpc>
                 <a:spcPts val="1680"/>
               </a:lnSpc>
               <a:buNone/>
             </a:pPr>
             <a:r>
-              <a:rPr lang="en-US" sz="1400" b="1" dirty="0">
+              <a:rPr sz="1400" b="1">
                 <a:solidFill>
                   <a:srgbClr val="13202D"/>
                 </a:solidFill>
-                <a:latin typeface="IBM Plex Sans" pitchFamily="34" charset="0"/>
-                <a:ea typeface="IBM Plex Sans" pitchFamily="34" charset="-122"/>
-                <a:cs typeface="IBM Plex Sans" pitchFamily="34" charset="-120"/>
+                <a:latin typeface="IBM Plex Sans"/>
+                <a:ea typeface="IBM Plex Sans"/>
+                <a:cs typeface="IBM Plex Sans"/>
               </a:rPr>
               <a:t>Политике као код</a:t>
             </a:r>
-            <a:endParaRPr lang="en-US" sz="1400" dirty="0"/>
-          </a:p>
-        </p:txBody>
-      </p:sp>
-      <p:sp>
-        <p:nvSpPr>
-          <p:cNvPr id="9" name="Text 7"/>
-          <p:cNvSpPr/>
-          <p:nvPr/>
-        </p:nvSpPr>
-        <p:spPr>
-          <a:xfrm>
+            <a:endParaRPr sz="1400"/>
+          </a:p>
+        </p:txBody>
+      </p:sp>
+      <p:sp>
+        <p:nvSpPr>
+          <p:cNvPr id="9" name="Text 7">
+            <a:extLst xmlns:a="http://schemas.openxmlformats.org/drawingml/2006/main">
+              <a:ext uri="{FF2B5EF4-FFF2-40B4-BE49-F238E27FC236}">
+                <a16:creationId xmlns:a16="http://schemas.microsoft.com/office/drawing/2014/main" id="{D86F3BB3-A27F-4A04-B2ED-1717AADA243A}"/>
+              </a:ext>
+            </a:extLst>
+          </p:cNvPr>
+          <p:cNvSpPr>
+            <a:spLocks xmlns:a="http://schemas.openxmlformats.org/drawingml/2006/main" noGrp="1"/>
+          </p:cNvSpPr>
+          <p:nvPr/>
+        </p:nvSpPr>
+        <p:spPr>
+          <a:xfrm xmlns:a="http://schemas.openxmlformats.org/drawingml/2006/main">
             <a:off x="996950" y="2795191"/>
             <a:ext cx="2243392" cy="665361"/>
           </a:xfrm>
-          <a:prstGeom prst="rect">
-            <a:avLst/>
-          </a:prstGeom>
-          <a:noFill/>
-          <a:ln/>
-        </p:spPr>
-        <p:txBody>
-          <a:bodyPr wrap="square" lIns="0" tIns="0" rIns="0" bIns="0" rtlCol="0" anchor="t">
-            <a:normAutofit/>
-          </a:bodyPr>
-          <a:lstStyle/>
-          <a:p>
-            <a:pPr algn="l" indent="0" marL="0">
+          <a:prstGeom xmlns:a="http://schemas.openxmlformats.org/drawingml/2006/main" prst="rect">
+            <a:avLst/>
+          </a:prstGeom>
+          <a:noFill xmlns:a="http://schemas.openxmlformats.org/drawingml/2006/main"/>
+        </p:spPr>
+        <p:txBody>
+          <a:bodyPr xmlns:a="http://schemas.openxmlformats.org/drawingml/2006/main" wrap="square" lIns="0" tIns="0" rIns="0" bIns="0" anchor="t">
+            <a:normAutofit/>
+          </a:bodyPr>
+          <a:lstStyle xmlns:a="http://schemas.openxmlformats.org/drawingml/2006/main"/>
+          <a:p xmlns:a="http://schemas.openxmlformats.org/drawingml/2006/main">
+            <a:pPr marL="0" indent="0" algn="l">
               <a:lnSpc>
                 <a:spcPts val="1680"/>
               </a:lnSpc>
               <a:buNone/>
             </a:pPr>
             <a:r>
-              <a:rPr lang="en-US" sz="1200" dirty="0">
+              <a:rPr sz="1200">
                 <a:solidFill>
                   <a:srgbClr val="44505D"/>
                 </a:solidFill>
-                <a:latin typeface="IBM Plex Sans" pitchFamily="34" charset="0"/>
-                <a:ea typeface="IBM Plex Sans" pitchFamily="34" charset="-122"/>
-                <a:cs typeface="IBM Plex Sans" pitchFamily="34" charset="-120"/>
+                <a:latin typeface="IBM Plex Sans"/>
+                <a:ea typeface="IBM Plex Sans"/>
+                <a:cs typeface="IBM Plex Sans"/>
               </a:rPr>
               <a:t>Интерфејс, evaluator и детерминистичке guardrail политике.</a:t>
             </a:r>
-            <a:endParaRPr lang="en-US" sz="1200" dirty="0"/>
-          </a:p>
-        </p:txBody>
-      </p:sp>
-      <p:sp>
-        <p:nvSpPr>
-          <p:cNvPr id="10" name="Text 8"/>
-          <p:cNvSpPr/>
-          <p:nvPr/>
-        </p:nvSpPr>
-        <p:spPr>
-          <a:xfrm>
+            <a:endParaRPr sz="1200"/>
+          </a:p>
+        </p:txBody>
+      </p:sp>
+      <p:sp>
+        <p:nvSpPr>
+          <p:cNvPr id="10" name="Text 8">
+            <a:extLst xmlns:a="http://schemas.openxmlformats.org/drawingml/2006/main">
+              <a:ext uri="{FF2B5EF4-FFF2-40B4-BE49-F238E27FC236}">
+                <a16:creationId xmlns:a16="http://schemas.microsoft.com/office/drawing/2014/main" id="{8F9EC14F-8F4D-49EB-B3D9-FFA546233F50}"/>
+              </a:ext>
+            </a:extLst>
+          </p:cNvPr>
+          <p:cNvSpPr>
+            <a:spLocks xmlns:a="http://schemas.openxmlformats.org/drawingml/2006/main" noGrp="1"/>
+          </p:cNvSpPr>
+          <p:nvPr/>
+        </p:nvSpPr>
+        <p:spPr>
+          <a:xfrm xmlns:a="http://schemas.openxmlformats.org/drawingml/2006/main">
             <a:off x="996950" y="3524052"/>
             <a:ext cx="2243392" cy="238720"/>
           </a:xfrm>
-          <a:prstGeom prst="rect">
-            <a:avLst/>
-          </a:prstGeom>
-          <a:noFill/>
-          <a:ln/>
-        </p:spPr>
-        <p:txBody>
-          <a:bodyPr wrap="square" lIns="0" tIns="0" rIns="0" bIns="0" rtlCol="0" anchor="t">
-            <a:normAutofit/>
-          </a:bodyPr>
-          <a:lstStyle/>
-          <a:p>
-            <a:pPr algn="l" indent="0" marL="0">
+          <a:prstGeom xmlns:a="http://schemas.openxmlformats.org/drawingml/2006/main" prst="rect">
+            <a:avLst/>
+          </a:prstGeom>
+          <a:noFill xmlns:a="http://schemas.openxmlformats.org/drawingml/2006/main"/>
+        </p:spPr>
+        <p:txBody>
+          <a:bodyPr xmlns:a="http://schemas.openxmlformats.org/drawingml/2006/main" wrap="square" lIns="0" tIns="0" rIns="0" bIns="0" anchor="t">
+            <a:normAutofit/>
+          </a:bodyPr>
+          <a:lstStyle xmlns:a="http://schemas.openxmlformats.org/drawingml/2006/main"/>
+          <a:p xmlns:a="http://schemas.openxmlformats.org/drawingml/2006/main">
+            <a:pPr marL="0" indent="0" algn="l">
               <a:lnSpc>
                 <a:spcPts val="1680"/>
               </a:lnSpc>
               <a:buNone/>
             </a:pPr>
             <a:r>
-              <a:rPr lang="en-US" sz="1200" dirty="0">
+              <a:rPr sz="1200">
                 <a:solidFill>
                   <a:srgbClr val="5E6975"/>
                 </a:solidFill>
-                <a:latin typeface="IBM Plex Mono" pitchFamily="49" charset="0"/>
-                <a:ea typeface="IBM Plex Mono" pitchFamily="49" charset="-122"/>
-                <a:cs typeface="IBM Plex Mono" pitchFamily="49" charset="-120"/>
+                <a:latin typeface="IBM Plex Mono"/>
+                <a:ea typeface="IBM Plex Mono"/>
+                <a:cs typeface="IBM Plex Mono"/>
               </a:rPr>
               <a:t>05–10</a:t>
             </a:r>
-            <a:endParaRPr lang="en-US" sz="1200" dirty="0"/>
-          </a:p>
-        </p:txBody>
-      </p:sp>
-      <p:sp>
-        <p:nvSpPr>
-          <p:cNvPr id="11" name="Shape 9"/>
-          <p:cNvSpPr/>
-          <p:nvPr/>
-        </p:nvSpPr>
-        <p:spPr>
-          <a:xfrm>
+            <a:endParaRPr sz="1200"/>
+          </a:p>
+        </p:txBody>
+      </p:sp>
+      <p:sp>
+        <p:nvSpPr>
+          <p:cNvPr id="11" name="Shape 9">
+            <a:extLst xmlns:a="http://schemas.openxmlformats.org/drawingml/2006/main">
+              <a:ext uri="{FF2B5EF4-FFF2-40B4-BE49-F238E27FC236}">
+                <a16:creationId xmlns:a16="http://schemas.microsoft.com/office/drawing/2014/main" id="{A0670814-8A7F-41DD-8AB7-4741A2A7F31B}"/>
+              </a:ext>
+            </a:extLst>
+          </p:cNvPr>
+          <p:cNvSpPr>
+            <a:spLocks xmlns:a="http://schemas.openxmlformats.org/drawingml/2006/main" noGrp="1"/>
+          </p:cNvSpPr>
+          <p:nvPr/>
+        </p:nvSpPr>
+        <p:spPr>
+          <a:xfrm xmlns:a="http://schemas.openxmlformats.org/drawingml/2006/main">
             <a:off x="3489325" y="1676995"/>
             <a:ext cx="2540000" cy="2241352"/>
           </a:xfrm>
-          <a:prstGeom prst="roundRect">
+          <a:prstGeom xmlns:a="http://schemas.openxmlformats.org/drawingml/2006/main" prst="roundRect">
             <a:avLst>
               <a:gd name="adj" fmla="val 4391"/>
             </a:avLst>
           </a:prstGeom>
-          <a:solidFill>
+          <a:solidFill xmlns:a="http://schemas.openxmlformats.org/drawingml/2006/main">
             <a:srgbClr val="FCFCFB"/>
           </a:solidFill>
-          <a:ln w="6350">
+          <a:ln xmlns:a="http://schemas.openxmlformats.org/drawingml/2006/main" w="6350">
             <a:solidFill>
               <a:srgbClr val="D3DAE1"/>
             </a:solidFill>
@@ -17569,222 +17568,265 @@
       </p:sp>
       <p:sp>
         <p:nvSpPr>
-          <p:cNvPr id="12" name="Shape 10"/>
-          <p:cNvSpPr/>
-          <p:nvPr/>
-        </p:nvSpPr>
-        <p:spPr>
-          <a:xfrm>
+          <p:cNvPr id="12" name="Shape 10">
+            <a:extLst xmlns:a="http://schemas.openxmlformats.org/drawingml/2006/main">
+              <a:ext uri="{FF2B5EF4-FFF2-40B4-BE49-F238E27FC236}">
+                <a16:creationId xmlns:a16="http://schemas.microsoft.com/office/drawing/2014/main" id="{1D3FC9A9-62B9-4646-B4D0-5FB00D613B00}"/>
+              </a:ext>
+            </a:extLst>
+          </p:cNvPr>
+          <p:cNvSpPr>
+            <a:spLocks xmlns:a="http://schemas.openxmlformats.org/drawingml/2006/main" noGrp="1"/>
+          </p:cNvSpPr>
+          <p:nvPr/>
+        </p:nvSpPr>
+        <p:spPr>
+          <a:xfrm xmlns:a="http://schemas.openxmlformats.org/drawingml/2006/main">
             <a:off x="3670300" y="1857970"/>
             <a:ext cx="355600" cy="38100"/>
           </a:xfrm>
-          <a:prstGeom prst="roundRect">
+          <a:prstGeom xmlns:a="http://schemas.openxmlformats.org/drawingml/2006/main" prst="roundRect">
             <a:avLst>
               <a:gd name="adj" fmla="val 50000"/>
             </a:avLst>
           </a:prstGeom>
-          <a:solidFill>
+          <a:solidFill xmlns:a="http://schemas.openxmlformats.org/drawingml/2006/main">
             <a:srgbClr val="7D5E00"/>
           </a:solidFill>
-          <a:ln/>
-        </p:spPr>
-      </p:sp>
-      <p:sp>
-        <p:nvSpPr>
-          <p:cNvPr id="13" name="Text 11"/>
-          <p:cNvSpPr/>
-          <p:nvPr/>
-        </p:nvSpPr>
-        <p:spPr>
-          <a:xfrm>
+        </p:spPr>
+      </p:sp>
+      <p:sp>
+        <p:nvSpPr>
+          <p:cNvPr id="13" name="Text 11">
+            <a:extLst xmlns:a="http://schemas.openxmlformats.org/drawingml/2006/main">
+              <a:ext uri="{FF2B5EF4-FFF2-40B4-BE49-F238E27FC236}">
+                <a16:creationId xmlns:a16="http://schemas.microsoft.com/office/drawing/2014/main" id="{A119D7E6-AF8E-4014-8D3F-1B5F51AFEB49}"/>
+              </a:ext>
+            </a:extLst>
+          </p:cNvPr>
+          <p:cNvSpPr>
+            <a:spLocks xmlns:a="http://schemas.openxmlformats.org/drawingml/2006/main" noGrp="1"/>
+          </p:cNvSpPr>
+          <p:nvPr/>
+        </p:nvSpPr>
+        <p:spPr>
+          <a:xfrm xmlns:a="http://schemas.openxmlformats.org/drawingml/2006/main">
             <a:off x="3670300" y="1984970"/>
             <a:ext cx="2243392" cy="444500"/>
           </a:xfrm>
-          <a:prstGeom prst="rect">
-            <a:avLst/>
-          </a:prstGeom>
-          <a:noFill/>
-          <a:ln/>
-        </p:spPr>
-        <p:txBody>
-          <a:bodyPr wrap="square" lIns="0" tIns="0" rIns="0" bIns="0" rtlCol="0" anchor="t">
-            <a:normAutofit/>
-          </a:bodyPr>
-          <a:lstStyle/>
-          <a:p>
-            <a:pPr algn="l" indent="0" marL="0">
+          <a:prstGeom xmlns:a="http://schemas.openxmlformats.org/drawingml/2006/main" prst="rect">
+            <a:avLst/>
+          </a:prstGeom>
+          <a:noFill xmlns:a="http://schemas.openxmlformats.org/drawingml/2006/main"/>
+        </p:spPr>
+        <p:txBody>
+          <a:bodyPr xmlns:a="http://schemas.openxmlformats.org/drawingml/2006/main" wrap="square" lIns="0" tIns="0" rIns="0" bIns="0" anchor="t">
+            <a:normAutofit/>
+          </a:bodyPr>
+          <a:lstStyle xmlns:a="http://schemas.openxmlformats.org/drawingml/2006/main"/>
+          <a:p xmlns:a="http://schemas.openxmlformats.org/drawingml/2006/main">
+            <a:pPr marL="0" indent="0" algn="l">
               <a:lnSpc>
                 <a:spcPts val="3300"/>
               </a:lnSpc>
               <a:buNone/>
             </a:pPr>
             <a:r>
-              <a:rPr lang="en-US" sz="3000" dirty="0">
+              <a:rPr sz="3000">
                 <a:solidFill>
                   <a:srgbClr val="7D5E00"/>
                 </a:solidFill>
-                <a:latin typeface="IBM Plex Mono" pitchFamily="49" charset="0"/>
-                <a:ea typeface="IBM Plex Mono" pitchFamily="49" charset="-122"/>
-                <a:cs typeface="IBM Plex Mono" pitchFamily="49" charset="-120"/>
+                <a:latin typeface="IBM Plex Mono"/>
+                <a:ea typeface="IBM Plex Mono"/>
+                <a:cs typeface="IBM Plex Mono"/>
               </a:rPr>
               <a:t>02</a:t>
             </a:r>
-            <a:endParaRPr lang="en-US" sz="3000" dirty="0"/>
-          </a:p>
-        </p:txBody>
-      </p:sp>
-      <p:sp>
-        <p:nvSpPr>
-          <p:cNvPr id="14" name="Text 12"/>
-          <p:cNvSpPr/>
-          <p:nvPr/>
-        </p:nvSpPr>
-        <p:spPr>
-          <a:xfrm>
+            <a:endParaRPr sz="3000"/>
+          </a:p>
+        </p:txBody>
+      </p:sp>
+      <p:sp>
+        <p:nvSpPr>
+          <p:cNvPr id="14" name="Text 12">
+            <a:extLst xmlns:a="http://schemas.openxmlformats.org/drawingml/2006/main">
+              <a:ext uri="{FF2B5EF4-FFF2-40B4-BE49-F238E27FC236}">
+                <a16:creationId xmlns:a16="http://schemas.microsoft.com/office/drawing/2014/main" id="{719AC622-18CB-4F92-AC60-EF244146689C}"/>
+              </a:ext>
+            </a:extLst>
+          </p:cNvPr>
+          <p:cNvSpPr>
+            <a:spLocks xmlns:a="http://schemas.openxmlformats.org/drawingml/2006/main" noGrp="1"/>
+          </p:cNvSpPr>
+          <p:nvPr/>
+        </p:nvSpPr>
+        <p:spPr>
+          <a:xfrm xmlns:a="http://schemas.openxmlformats.org/drawingml/2006/main">
             <a:off x="3670300" y="2492970"/>
             <a:ext cx="2243392" cy="238720"/>
           </a:xfrm>
-          <a:prstGeom prst="rect">
-            <a:avLst/>
-          </a:prstGeom>
-          <a:noFill/>
-          <a:ln/>
-        </p:spPr>
-        <p:txBody>
-          <a:bodyPr wrap="square" lIns="0" tIns="0" rIns="0" bIns="0" rtlCol="0" anchor="t">
-            <a:normAutofit/>
-          </a:bodyPr>
-          <a:lstStyle/>
-          <a:p>
-            <a:pPr algn="l" indent="0" marL="0">
+          <a:prstGeom xmlns:a="http://schemas.openxmlformats.org/drawingml/2006/main" prst="rect">
+            <a:avLst/>
+          </a:prstGeom>
+          <a:noFill xmlns:a="http://schemas.openxmlformats.org/drawingml/2006/main"/>
+        </p:spPr>
+        <p:txBody>
+          <a:bodyPr xmlns:a="http://schemas.openxmlformats.org/drawingml/2006/main" wrap="square" lIns="0" tIns="0" rIns="0" bIns="0" anchor="t">
+            <a:normAutofit/>
+          </a:bodyPr>
+          <a:lstStyle xmlns:a="http://schemas.openxmlformats.org/drawingml/2006/main"/>
+          <a:p xmlns:a="http://schemas.openxmlformats.org/drawingml/2006/main">
+            <a:pPr marL="0" indent="0" algn="l">
               <a:lnSpc>
                 <a:spcPts val="1680"/>
               </a:lnSpc>
               <a:buNone/>
             </a:pPr>
             <a:r>
-              <a:rPr lang="en-US" sz="1400" b="1" dirty="0">
+              <a:rPr sz="1400" b="1">
                 <a:solidFill>
                   <a:srgbClr val="13202D"/>
                 </a:solidFill>
-                <a:latin typeface="IBM Plex Sans" pitchFamily="34" charset="0"/>
-                <a:ea typeface="IBM Plex Sans" pitchFamily="34" charset="-122"/>
-                <a:cs typeface="IBM Plex Sans" pitchFamily="34" charset="-120"/>
+                <a:latin typeface="IBM Plex Sans"/>
+                <a:ea typeface="IBM Plex Sans"/>
+                <a:cs typeface="IBM Plex Sans"/>
               </a:rPr>
               <a:t>Hook и тестови</a:t>
             </a:r>
-            <a:endParaRPr lang="en-US" sz="1400" dirty="0"/>
-          </a:p>
-        </p:txBody>
-      </p:sp>
-      <p:sp>
-        <p:nvSpPr>
-          <p:cNvPr id="15" name="Text 13"/>
-          <p:cNvSpPr/>
-          <p:nvPr/>
-        </p:nvSpPr>
-        <p:spPr>
-          <a:xfrm>
+            <a:endParaRPr sz="1400"/>
+          </a:p>
+        </p:txBody>
+      </p:sp>
+      <p:sp>
+        <p:nvSpPr>
+          <p:cNvPr id="15" name="Text 13">
+            <a:extLst xmlns:a="http://schemas.openxmlformats.org/drawingml/2006/main">
+              <a:ext uri="{FF2B5EF4-FFF2-40B4-BE49-F238E27FC236}">
+                <a16:creationId xmlns:a16="http://schemas.microsoft.com/office/drawing/2014/main" id="{79636CEC-3D46-403B-BE67-29435A047C31}"/>
+              </a:ext>
+            </a:extLst>
+          </p:cNvPr>
+          <p:cNvSpPr>
+            <a:spLocks xmlns:a="http://schemas.openxmlformats.org/drawingml/2006/main" noGrp="1"/>
+          </p:cNvSpPr>
+          <p:nvPr/>
+        </p:nvSpPr>
+        <p:spPr>
+          <a:xfrm xmlns:a="http://schemas.openxmlformats.org/drawingml/2006/main">
             <a:off x="3670300" y="2795191"/>
             <a:ext cx="2243392" cy="665361"/>
           </a:xfrm>
-          <a:prstGeom prst="rect">
-            <a:avLst/>
-          </a:prstGeom>
-          <a:noFill/>
-          <a:ln/>
-        </p:spPr>
-        <p:txBody>
-          <a:bodyPr wrap="square" lIns="0" tIns="0" rIns="0" bIns="0" rtlCol="0" anchor="t">
-            <a:normAutofit/>
-          </a:bodyPr>
-          <a:lstStyle/>
-          <a:p>
-            <a:pPr algn="l" indent="0" marL="0">
+          <a:prstGeom xmlns:a="http://schemas.openxmlformats.org/drawingml/2006/main" prst="rect">
+            <a:avLst/>
+          </a:prstGeom>
+          <a:noFill xmlns:a="http://schemas.openxmlformats.org/drawingml/2006/main"/>
+        </p:spPr>
+        <p:txBody>
+          <a:bodyPr xmlns:a="http://schemas.openxmlformats.org/drawingml/2006/main" wrap="square" lIns="0" tIns="0" rIns="0" bIns="0" anchor="t">
+            <a:normAutofit/>
+          </a:bodyPr>
+          <a:lstStyle xmlns:a="http://schemas.openxmlformats.org/drawingml/2006/main"/>
+          <a:p xmlns:a="http://schemas.openxmlformats.org/drawingml/2006/main">
+            <a:pPr marL="0" indent="0" algn="l">
               <a:lnSpc>
                 <a:spcPts val="1680"/>
               </a:lnSpc>
               <a:buNone/>
             </a:pPr>
             <a:r>
-              <a:rPr lang="en-US" sz="1200" dirty="0">
+              <a:rPr sz="1200">
                 <a:solidFill>
                   <a:srgbClr val="44505D"/>
                 </a:solidFill>
-                <a:latin typeface="IBM Plex Sans" pitchFamily="34" charset="0"/>
-                <a:ea typeface="IBM Plex Sans" pitchFamily="34" charset="-122"/>
-                <a:cs typeface="IBM Plex Sans" pitchFamily="34" charset="-120"/>
+                <a:latin typeface="IBM Plex Sans"/>
+                <a:ea typeface="IBM Plex Sans"/>
+                <a:cs typeface="IBM Plex Sans"/>
               </a:rPr>
               <a:t>Hook као адаптер, конфигурација и unit тестови политика.</a:t>
             </a:r>
-            <a:endParaRPr lang="en-US" sz="1200" dirty="0"/>
-          </a:p>
-        </p:txBody>
-      </p:sp>
-      <p:sp>
-        <p:nvSpPr>
-          <p:cNvPr id="16" name="Text 14"/>
-          <p:cNvSpPr/>
-          <p:nvPr/>
-        </p:nvSpPr>
-        <p:spPr>
-          <a:xfrm>
+            <a:endParaRPr sz="1200"/>
+          </a:p>
+        </p:txBody>
+      </p:sp>
+      <p:sp>
+        <p:nvSpPr>
+          <p:cNvPr id="16" name="Text 14">
+            <a:extLst xmlns:a="http://schemas.openxmlformats.org/drawingml/2006/main">
+              <a:ext uri="{FF2B5EF4-FFF2-40B4-BE49-F238E27FC236}">
+                <a16:creationId xmlns:a16="http://schemas.microsoft.com/office/drawing/2014/main" id="{50B138CF-30DB-4BCA-A769-59CCDAB6C520}"/>
+              </a:ext>
+            </a:extLst>
+          </p:cNvPr>
+          <p:cNvSpPr>
+            <a:spLocks xmlns:a="http://schemas.openxmlformats.org/drawingml/2006/main" noGrp="1"/>
+          </p:cNvSpPr>
+          <p:nvPr/>
+        </p:nvSpPr>
+        <p:spPr>
+          <a:xfrm xmlns:a="http://schemas.openxmlformats.org/drawingml/2006/main">
             <a:off x="3670300" y="3524052"/>
             <a:ext cx="2243392" cy="238720"/>
           </a:xfrm>
-          <a:prstGeom prst="rect">
-            <a:avLst/>
-          </a:prstGeom>
-          <a:noFill/>
-          <a:ln/>
-        </p:spPr>
-        <p:txBody>
-          <a:bodyPr wrap="square" lIns="0" tIns="0" rIns="0" bIns="0" rtlCol="0" anchor="t">
-            <a:normAutofit/>
-          </a:bodyPr>
-          <a:lstStyle/>
-          <a:p>
-            <a:pPr algn="l" indent="0" marL="0">
+          <a:prstGeom xmlns:a="http://schemas.openxmlformats.org/drawingml/2006/main" prst="rect">
+            <a:avLst/>
+          </a:prstGeom>
+          <a:noFill xmlns:a="http://schemas.openxmlformats.org/drawingml/2006/main"/>
+        </p:spPr>
+        <p:txBody>
+          <a:bodyPr xmlns:a="http://schemas.openxmlformats.org/drawingml/2006/main" wrap="square" lIns="0" tIns="0" rIns="0" bIns="0" anchor="t">
+            <a:normAutofit/>
+          </a:bodyPr>
+          <a:lstStyle xmlns:a="http://schemas.openxmlformats.org/drawingml/2006/main"/>
+          <a:p xmlns:a="http://schemas.openxmlformats.org/drawingml/2006/main">
+            <a:pPr marL="0" indent="0" algn="l">
               <a:lnSpc>
                 <a:spcPts val="1680"/>
               </a:lnSpc>
               <a:buNone/>
             </a:pPr>
             <a:r>
-              <a:rPr lang="en-US" sz="1200" dirty="0">
+              <a:rPr sz="1200">
                 <a:solidFill>
                   <a:srgbClr val="5E6975"/>
                 </a:solidFill>
-                <a:latin typeface="IBM Plex Mono" pitchFamily="49" charset="0"/>
-                <a:ea typeface="IBM Plex Mono" pitchFamily="49" charset="-122"/>
-                <a:cs typeface="IBM Plex Mono" pitchFamily="49" charset="-120"/>
+                <a:latin typeface="IBM Plex Mono"/>
+                <a:ea typeface="IBM Plex Mono"/>
+                <a:cs typeface="IBM Plex Mono"/>
               </a:rPr>
               <a:t>11–17</a:t>
             </a:r>
-            <a:endParaRPr lang="en-US" sz="1200" dirty="0"/>
-          </a:p>
-        </p:txBody>
-      </p:sp>
-      <p:sp>
-        <p:nvSpPr>
-          <p:cNvPr id="17" name="Shape 15"/>
-          <p:cNvSpPr/>
-          <p:nvPr/>
-        </p:nvSpPr>
-        <p:spPr>
-          <a:xfrm>
+            <a:endParaRPr sz="1200"/>
+          </a:p>
+        </p:txBody>
+      </p:sp>
+      <p:sp>
+        <p:nvSpPr>
+          <p:cNvPr id="17" name="Shape 15">
+            <a:extLst xmlns:a="http://schemas.openxmlformats.org/drawingml/2006/main">
+              <a:ext uri="{FF2B5EF4-FFF2-40B4-BE49-F238E27FC236}">
+                <a16:creationId xmlns:a16="http://schemas.microsoft.com/office/drawing/2014/main" id="{133C1332-A82A-4230-B01F-74798BDEA71E}"/>
+              </a:ext>
+            </a:extLst>
+          </p:cNvPr>
+          <p:cNvSpPr>
+            <a:spLocks xmlns:a="http://schemas.openxmlformats.org/drawingml/2006/main" noGrp="1"/>
+          </p:cNvSpPr>
+          <p:nvPr/>
+        </p:nvSpPr>
+        <p:spPr>
+          <a:xfrm xmlns:a="http://schemas.openxmlformats.org/drawingml/2006/main">
             <a:off x="6162675" y="1676995"/>
             <a:ext cx="2540000" cy="2241352"/>
           </a:xfrm>
-          <a:prstGeom prst="roundRect">
+          <a:prstGeom xmlns:a="http://schemas.openxmlformats.org/drawingml/2006/main" prst="roundRect">
             <a:avLst>
               <a:gd name="adj" fmla="val 4391"/>
             </a:avLst>
           </a:prstGeom>
-          <a:solidFill>
+          <a:solidFill xmlns:a="http://schemas.openxmlformats.org/drawingml/2006/main">
             <a:srgbClr val="FCFCFB"/>
           </a:solidFill>
-          <a:ln w="6350">
+          <a:ln xmlns:a="http://schemas.openxmlformats.org/drawingml/2006/main" w="6350">
             <a:solidFill>
               <a:srgbClr val="D3DAE1"/>
             </a:solidFill>
@@ -17794,222 +17836,265 @@
       </p:sp>
       <p:sp>
         <p:nvSpPr>
-          <p:cNvPr id="18" name="Shape 16"/>
-          <p:cNvSpPr/>
-          <p:nvPr/>
-        </p:nvSpPr>
-        <p:spPr>
-          <a:xfrm>
+          <p:cNvPr id="18" name="Shape 16">
+            <a:extLst xmlns:a="http://schemas.openxmlformats.org/drawingml/2006/main">
+              <a:ext uri="{FF2B5EF4-FFF2-40B4-BE49-F238E27FC236}">
+                <a16:creationId xmlns:a16="http://schemas.microsoft.com/office/drawing/2014/main" id="{796D4815-E7A7-43B4-B775-A59A964CF40C}"/>
+              </a:ext>
+            </a:extLst>
+          </p:cNvPr>
+          <p:cNvSpPr>
+            <a:spLocks xmlns:a="http://schemas.openxmlformats.org/drawingml/2006/main" noGrp="1"/>
+          </p:cNvSpPr>
+          <p:nvPr/>
+        </p:nvSpPr>
+        <p:spPr>
+          <a:xfrm xmlns:a="http://schemas.openxmlformats.org/drawingml/2006/main">
             <a:off x="6343650" y="1857970"/>
             <a:ext cx="355600" cy="38100"/>
           </a:xfrm>
-          <a:prstGeom prst="roundRect">
+          <a:prstGeom xmlns:a="http://schemas.openxmlformats.org/drawingml/2006/main" prst="roundRect">
             <a:avLst>
               <a:gd name="adj" fmla="val 50000"/>
             </a:avLst>
           </a:prstGeom>
-          <a:solidFill>
+          <a:solidFill xmlns:a="http://schemas.openxmlformats.org/drawingml/2006/main">
             <a:srgbClr val="7D5E00"/>
           </a:solidFill>
-          <a:ln/>
-        </p:spPr>
-      </p:sp>
-      <p:sp>
-        <p:nvSpPr>
-          <p:cNvPr id="19" name="Text 17"/>
-          <p:cNvSpPr/>
-          <p:nvPr/>
-        </p:nvSpPr>
-        <p:spPr>
-          <a:xfrm>
+        </p:spPr>
+      </p:sp>
+      <p:sp>
+        <p:nvSpPr>
+          <p:cNvPr id="19" name="Text 17">
+            <a:extLst xmlns:a="http://schemas.openxmlformats.org/drawingml/2006/main">
+              <a:ext uri="{FF2B5EF4-FFF2-40B4-BE49-F238E27FC236}">
+                <a16:creationId xmlns:a16="http://schemas.microsoft.com/office/drawing/2014/main" id="{CC9560B3-91FE-4E73-98DA-4FFC84E32043}"/>
+              </a:ext>
+            </a:extLst>
+          </p:cNvPr>
+          <p:cNvSpPr>
+            <a:spLocks xmlns:a="http://schemas.openxmlformats.org/drawingml/2006/main" noGrp="1"/>
+          </p:cNvSpPr>
+          <p:nvPr/>
+        </p:nvSpPr>
+        <p:spPr>
+          <a:xfrm xmlns:a="http://schemas.openxmlformats.org/drawingml/2006/main">
             <a:off x="6343650" y="1984970"/>
             <a:ext cx="2243392" cy="444500"/>
           </a:xfrm>
-          <a:prstGeom prst="rect">
-            <a:avLst/>
-          </a:prstGeom>
-          <a:noFill/>
-          <a:ln/>
-        </p:spPr>
-        <p:txBody>
-          <a:bodyPr wrap="square" lIns="0" tIns="0" rIns="0" bIns="0" rtlCol="0" anchor="t">
-            <a:normAutofit/>
-          </a:bodyPr>
-          <a:lstStyle/>
-          <a:p>
-            <a:pPr algn="l" indent="0" marL="0">
+          <a:prstGeom xmlns:a="http://schemas.openxmlformats.org/drawingml/2006/main" prst="rect">
+            <a:avLst/>
+          </a:prstGeom>
+          <a:noFill xmlns:a="http://schemas.openxmlformats.org/drawingml/2006/main"/>
+        </p:spPr>
+        <p:txBody>
+          <a:bodyPr xmlns:a="http://schemas.openxmlformats.org/drawingml/2006/main" wrap="square" lIns="0" tIns="0" rIns="0" bIns="0" anchor="t">
+            <a:normAutofit/>
+          </a:bodyPr>
+          <a:lstStyle xmlns:a="http://schemas.openxmlformats.org/drawingml/2006/main"/>
+          <a:p xmlns:a="http://schemas.openxmlformats.org/drawingml/2006/main">
+            <a:pPr marL="0" indent="0" algn="l">
               <a:lnSpc>
                 <a:spcPts val="3300"/>
               </a:lnSpc>
               <a:buNone/>
             </a:pPr>
             <a:r>
-              <a:rPr lang="en-US" sz="3000" dirty="0">
+              <a:rPr sz="3000">
                 <a:solidFill>
                   <a:srgbClr val="7D5E00"/>
                 </a:solidFill>
-                <a:latin typeface="IBM Plex Mono" pitchFamily="49" charset="0"/>
-                <a:ea typeface="IBM Plex Mono" pitchFamily="49" charset="-122"/>
-                <a:cs typeface="IBM Plex Mono" pitchFamily="49" charset="-120"/>
+                <a:latin typeface="IBM Plex Mono"/>
+                <a:ea typeface="IBM Plex Mono"/>
+                <a:cs typeface="IBM Plex Mono"/>
               </a:rPr>
               <a:t>03</a:t>
             </a:r>
-            <a:endParaRPr lang="en-US" sz="3000" dirty="0"/>
-          </a:p>
-        </p:txBody>
-      </p:sp>
-      <p:sp>
-        <p:nvSpPr>
-          <p:cNvPr id="20" name="Text 18"/>
-          <p:cNvSpPr/>
-          <p:nvPr/>
-        </p:nvSpPr>
-        <p:spPr>
-          <a:xfrm>
+            <a:endParaRPr sz="3000"/>
+          </a:p>
+        </p:txBody>
+      </p:sp>
+      <p:sp>
+        <p:nvSpPr>
+          <p:cNvPr id="20" name="Text 18">
+            <a:extLst xmlns:a="http://schemas.openxmlformats.org/drawingml/2006/main">
+              <a:ext uri="{FF2B5EF4-FFF2-40B4-BE49-F238E27FC236}">
+                <a16:creationId xmlns:a16="http://schemas.microsoft.com/office/drawing/2014/main" id="{9D9AF9EE-B16C-4F15-AB76-2FED2DB71025}"/>
+              </a:ext>
+            </a:extLst>
+          </p:cNvPr>
+          <p:cNvSpPr>
+            <a:spLocks xmlns:a="http://schemas.openxmlformats.org/drawingml/2006/main" noGrp="1"/>
+          </p:cNvSpPr>
+          <p:nvPr/>
+        </p:nvSpPr>
+        <p:spPr>
+          <a:xfrm xmlns:a="http://schemas.openxmlformats.org/drawingml/2006/main">
             <a:off x="6343650" y="2492970"/>
             <a:ext cx="2243392" cy="238720"/>
           </a:xfrm>
-          <a:prstGeom prst="rect">
-            <a:avLst/>
-          </a:prstGeom>
-          <a:noFill/>
-          <a:ln/>
-        </p:spPr>
-        <p:txBody>
-          <a:bodyPr wrap="square" lIns="0" tIns="0" rIns="0" bIns="0" rtlCol="0" anchor="t">
-            <a:normAutofit/>
-          </a:bodyPr>
-          <a:lstStyle/>
-          <a:p>
-            <a:pPr algn="l" indent="0" marL="0">
+          <a:prstGeom xmlns:a="http://schemas.openxmlformats.org/drawingml/2006/main" prst="rect">
+            <a:avLst/>
+          </a:prstGeom>
+          <a:noFill xmlns:a="http://schemas.openxmlformats.org/drawingml/2006/main"/>
+        </p:spPr>
+        <p:txBody>
+          <a:bodyPr xmlns:a="http://schemas.openxmlformats.org/drawingml/2006/main" wrap="square" lIns="0" tIns="0" rIns="0" bIns="0" anchor="t">
+            <a:normAutofit/>
+          </a:bodyPr>
+          <a:lstStyle xmlns:a="http://schemas.openxmlformats.org/drawingml/2006/main"/>
+          <a:p xmlns:a="http://schemas.openxmlformats.org/drawingml/2006/main">
+            <a:pPr marL="0" indent="0" algn="l">
               <a:lnSpc>
                 <a:spcPts val="1680"/>
               </a:lnSpc>
               <a:buNone/>
             </a:pPr>
             <a:r>
-              <a:rPr lang="en-US" sz="1400" b="1" dirty="0">
+              <a:rPr sz="1400" b="1">
                 <a:solidFill>
                   <a:srgbClr val="13202D"/>
                 </a:solidFill>
-                <a:latin typeface="IBM Plex Sans" pitchFamily="34" charset="0"/>
-                <a:ea typeface="IBM Plex Sans" pitchFamily="34" charset="-122"/>
-                <a:cs typeface="IBM Plex Sans" pitchFamily="34" charset="-120"/>
+                <a:latin typeface="IBM Plex Sans"/>
+                <a:ea typeface="IBM Plex Sans"/>
+                <a:cs typeface="IBM Plex Sans"/>
               </a:rPr>
               <a:t>Евалуације и QA</a:t>
             </a:r>
-            <a:endParaRPr lang="en-US" sz="1400" dirty="0"/>
-          </a:p>
-        </p:txBody>
-      </p:sp>
-      <p:sp>
-        <p:nvSpPr>
-          <p:cNvPr id="21" name="Text 19"/>
-          <p:cNvSpPr/>
-          <p:nvPr/>
-        </p:nvSpPr>
-        <p:spPr>
-          <a:xfrm>
+            <a:endParaRPr sz="1400"/>
+          </a:p>
+        </p:txBody>
+      </p:sp>
+      <p:sp>
+        <p:nvSpPr>
+          <p:cNvPr id="21" name="Text 19">
+            <a:extLst xmlns:a="http://schemas.openxmlformats.org/drawingml/2006/main">
+              <a:ext uri="{FF2B5EF4-FFF2-40B4-BE49-F238E27FC236}">
+                <a16:creationId xmlns:a16="http://schemas.microsoft.com/office/drawing/2014/main" id="{D3141FE3-54B7-4BF5-8A7A-7CBDE9457545}"/>
+              </a:ext>
+            </a:extLst>
+          </p:cNvPr>
+          <p:cNvSpPr>
+            <a:spLocks xmlns:a="http://schemas.openxmlformats.org/drawingml/2006/main" noGrp="1"/>
+          </p:cNvSpPr>
+          <p:nvPr/>
+        </p:nvSpPr>
+        <p:spPr>
+          <a:xfrm xmlns:a="http://schemas.openxmlformats.org/drawingml/2006/main">
             <a:off x="6343650" y="2795191"/>
             <a:ext cx="2243392" cy="665361"/>
           </a:xfrm>
-          <a:prstGeom prst="rect">
-            <a:avLst/>
-          </a:prstGeom>
-          <a:noFill/>
-          <a:ln/>
-        </p:spPr>
-        <p:txBody>
-          <a:bodyPr wrap="square" lIns="0" tIns="0" rIns="0" bIns="0" rtlCol="0" anchor="t">
-            <a:normAutofit/>
-          </a:bodyPr>
-          <a:lstStyle/>
-          <a:p>
-            <a:pPr algn="l" indent="0" marL="0">
+          <a:prstGeom xmlns:a="http://schemas.openxmlformats.org/drawingml/2006/main" prst="rect">
+            <a:avLst/>
+          </a:prstGeom>
+          <a:noFill xmlns:a="http://schemas.openxmlformats.org/drawingml/2006/main"/>
+        </p:spPr>
+        <p:txBody>
+          <a:bodyPr xmlns:a="http://schemas.openxmlformats.org/drawingml/2006/main" wrap="square" lIns="0" tIns="0" rIns="0" bIns="0" anchor="t">
+            <a:normAutofit/>
+          </a:bodyPr>
+          <a:lstStyle xmlns:a="http://schemas.openxmlformats.org/drawingml/2006/main"/>
+          <a:p xmlns:a="http://schemas.openxmlformats.org/drawingml/2006/main">
+            <a:pPr marL="0" indent="0" algn="l">
               <a:lnSpc>
                 <a:spcPts val="1680"/>
               </a:lnSpc>
               <a:buNone/>
             </a:pPr>
             <a:r>
-              <a:rPr lang="en-US" sz="1200" dirty="0">
+              <a:rPr sz="1200">
                 <a:solidFill>
                   <a:srgbClr val="44505D"/>
                 </a:solidFill>
-                <a:latin typeface="IBM Plex Sans" pitchFamily="34" charset="0"/>
-                <a:ea typeface="IBM Plex Sans" pitchFamily="34" charset="-122"/>
-                <a:cs typeface="IBM Plex Sans" pitchFamily="34" charset="-120"/>
+                <a:latin typeface="IBM Plex Sans"/>
+                <a:ea typeface="IBM Plex Sans"/>
+                <a:cs typeface="IBM Plex Sans"/>
               </a:rPr>
               <a:t>Eval сценарији, сигнали завршног прегледа и неприхватљиви поступци.</a:t>
             </a:r>
-            <a:endParaRPr lang="en-US" sz="1200" dirty="0"/>
-          </a:p>
-        </p:txBody>
-      </p:sp>
-      <p:sp>
-        <p:nvSpPr>
-          <p:cNvPr id="22" name="Text 20"/>
-          <p:cNvSpPr/>
-          <p:nvPr/>
-        </p:nvSpPr>
-        <p:spPr>
-          <a:xfrm>
+            <a:endParaRPr sz="1200"/>
+          </a:p>
+        </p:txBody>
+      </p:sp>
+      <p:sp>
+        <p:nvSpPr>
+          <p:cNvPr id="22" name="Text 20">
+            <a:extLst xmlns:a="http://schemas.openxmlformats.org/drawingml/2006/main">
+              <a:ext uri="{FF2B5EF4-FFF2-40B4-BE49-F238E27FC236}">
+                <a16:creationId xmlns:a16="http://schemas.microsoft.com/office/drawing/2014/main" id="{3F23131A-D96E-4EC8-82F9-29A8A841F135}"/>
+              </a:ext>
+            </a:extLst>
+          </p:cNvPr>
+          <p:cNvSpPr>
+            <a:spLocks xmlns:a="http://schemas.openxmlformats.org/drawingml/2006/main" noGrp="1"/>
+          </p:cNvSpPr>
+          <p:nvPr/>
+        </p:nvSpPr>
+        <p:spPr>
+          <a:xfrm xmlns:a="http://schemas.openxmlformats.org/drawingml/2006/main">
             <a:off x="6343650" y="3524052"/>
             <a:ext cx="2243392" cy="238720"/>
           </a:xfrm>
-          <a:prstGeom prst="rect">
-            <a:avLst/>
-          </a:prstGeom>
-          <a:noFill/>
-          <a:ln/>
-        </p:spPr>
-        <p:txBody>
-          <a:bodyPr wrap="square" lIns="0" tIns="0" rIns="0" bIns="0" rtlCol="0" anchor="t">
-            <a:normAutofit/>
-          </a:bodyPr>
-          <a:lstStyle/>
-          <a:p>
-            <a:pPr algn="l" indent="0" marL="0">
+          <a:prstGeom xmlns:a="http://schemas.openxmlformats.org/drawingml/2006/main" prst="rect">
+            <a:avLst/>
+          </a:prstGeom>
+          <a:noFill xmlns:a="http://schemas.openxmlformats.org/drawingml/2006/main"/>
+        </p:spPr>
+        <p:txBody>
+          <a:bodyPr xmlns:a="http://schemas.openxmlformats.org/drawingml/2006/main" wrap="square" lIns="0" tIns="0" rIns="0" bIns="0" anchor="t">
+            <a:normAutofit/>
+          </a:bodyPr>
+          <a:lstStyle xmlns:a="http://schemas.openxmlformats.org/drawingml/2006/main"/>
+          <a:p xmlns:a="http://schemas.openxmlformats.org/drawingml/2006/main">
+            <a:pPr marL="0" indent="0" algn="l">
               <a:lnSpc>
                 <a:spcPts val="1680"/>
               </a:lnSpc>
               <a:buNone/>
             </a:pPr>
             <a:r>
-              <a:rPr lang="en-US" sz="1200" dirty="0">
+              <a:rPr sz="1200">
                 <a:solidFill>
                   <a:srgbClr val="5E6975"/>
                 </a:solidFill>
-                <a:latin typeface="IBM Plex Mono" pitchFamily="49" charset="0"/>
-                <a:ea typeface="IBM Plex Mono" pitchFamily="49" charset="-122"/>
-                <a:cs typeface="IBM Plex Mono" pitchFamily="49" charset="-120"/>
+                <a:latin typeface="IBM Plex Mono"/>
+                <a:ea typeface="IBM Plex Mono"/>
+                <a:cs typeface="IBM Plex Mono"/>
               </a:rPr>
               <a:t>18–22</a:t>
             </a:r>
-            <a:endParaRPr lang="en-US" sz="1200" dirty="0"/>
-          </a:p>
-        </p:txBody>
-      </p:sp>
-      <p:sp>
-        <p:nvSpPr>
-          <p:cNvPr id="23" name="Shape 21"/>
-          <p:cNvSpPr/>
-          <p:nvPr/>
-        </p:nvSpPr>
-        <p:spPr>
-          <a:xfrm>
+            <a:endParaRPr sz="1200"/>
+          </a:p>
+        </p:txBody>
+      </p:sp>
+      <p:sp>
+        <p:nvSpPr>
+          <p:cNvPr id="23" name="Shape 21">
+            <a:extLst xmlns:a="http://schemas.openxmlformats.org/drawingml/2006/main">
+              <a:ext uri="{FF2B5EF4-FFF2-40B4-BE49-F238E27FC236}">
+                <a16:creationId xmlns:a16="http://schemas.microsoft.com/office/drawing/2014/main" id="{8B5C534B-6C08-4B12-88AA-C801DE474141}"/>
+              </a:ext>
+            </a:extLst>
+          </p:cNvPr>
+          <p:cNvSpPr>
+            <a:spLocks xmlns:a="http://schemas.openxmlformats.org/drawingml/2006/main" noGrp="1"/>
+          </p:cNvSpPr>
+          <p:nvPr/>
+        </p:nvSpPr>
+        <p:spPr>
+          <a:xfrm xmlns:a="http://schemas.openxmlformats.org/drawingml/2006/main">
             <a:off x="8836025" y="1676995"/>
             <a:ext cx="2540000" cy="2241352"/>
           </a:xfrm>
-          <a:prstGeom prst="roundRect">
+          <a:prstGeom xmlns:a="http://schemas.openxmlformats.org/drawingml/2006/main" prst="roundRect">
             <a:avLst>
               <a:gd name="adj" fmla="val 4391"/>
             </a:avLst>
           </a:prstGeom>
-          <a:solidFill>
+          <a:solidFill xmlns:a="http://schemas.openxmlformats.org/drawingml/2006/main">
             <a:srgbClr val="FCFCFB"/>
           </a:solidFill>
-          <a:ln w="6350">
+          <a:ln xmlns:a="http://schemas.openxmlformats.org/drawingml/2006/main" w="6350">
             <a:solidFill>
               <a:srgbClr val="D3DAE1"/>
             </a:solidFill>
@@ -18019,277 +18104,360 @@
       </p:sp>
       <p:sp>
         <p:nvSpPr>
-          <p:cNvPr id="24" name="Shape 22"/>
-          <p:cNvSpPr/>
-          <p:nvPr/>
-        </p:nvSpPr>
-        <p:spPr>
-          <a:xfrm>
+          <p:cNvPr id="24" name="Shape 22">
+            <a:extLst xmlns:a="http://schemas.openxmlformats.org/drawingml/2006/main">
+              <a:ext uri="{FF2B5EF4-FFF2-40B4-BE49-F238E27FC236}">
+                <a16:creationId xmlns:a16="http://schemas.microsoft.com/office/drawing/2014/main" id="{9D57E6F0-8423-45AD-B76D-BAB9C272E2EB}"/>
+              </a:ext>
+            </a:extLst>
+          </p:cNvPr>
+          <p:cNvSpPr>
+            <a:spLocks xmlns:a="http://schemas.openxmlformats.org/drawingml/2006/main" noGrp="1"/>
+          </p:cNvSpPr>
+          <p:nvPr/>
+        </p:nvSpPr>
+        <p:spPr>
+          <a:xfrm xmlns:a="http://schemas.openxmlformats.org/drawingml/2006/main">
             <a:off x="9017000" y="1857970"/>
             <a:ext cx="355600" cy="38100"/>
           </a:xfrm>
-          <a:prstGeom prst="roundRect">
+          <a:prstGeom xmlns:a="http://schemas.openxmlformats.org/drawingml/2006/main" prst="roundRect">
             <a:avLst>
               <a:gd name="adj" fmla="val 50000"/>
             </a:avLst>
           </a:prstGeom>
-          <a:solidFill>
+          <a:solidFill xmlns:a="http://schemas.openxmlformats.org/drawingml/2006/main">
             <a:srgbClr val="E07B1F"/>
           </a:solidFill>
-          <a:ln/>
-        </p:spPr>
-      </p:sp>
-      <p:sp>
-        <p:nvSpPr>
-          <p:cNvPr id="25" name="Text 23"/>
-          <p:cNvSpPr/>
-          <p:nvPr/>
-        </p:nvSpPr>
-        <p:spPr>
-          <a:xfrm>
+        </p:spPr>
+      </p:sp>
+      <p:sp>
+        <p:nvSpPr>
+          <p:cNvPr id="25" name="Text 23">
+            <a:extLst xmlns:a="http://schemas.openxmlformats.org/drawingml/2006/main">
+              <a:ext uri="{FF2B5EF4-FFF2-40B4-BE49-F238E27FC236}">
+                <a16:creationId xmlns:a16="http://schemas.microsoft.com/office/drawing/2014/main" id="{87CE239E-B474-4A97-8AC3-25EFC526E203}"/>
+              </a:ext>
+            </a:extLst>
+          </p:cNvPr>
+          <p:cNvSpPr>
+            <a:spLocks xmlns:a="http://schemas.openxmlformats.org/drawingml/2006/main" noGrp="1"/>
+          </p:cNvSpPr>
+          <p:nvPr/>
+        </p:nvSpPr>
+        <p:spPr>
+          <a:xfrm xmlns:a="http://schemas.openxmlformats.org/drawingml/2006/main">
             <a:off x="9017000" y="1984970"/>
             <a:ext cx="2243392" cy="444500"/>
           </a:xfrm>
-          <a:prstGeom prst="rect">
-            <a:avLst/>
-          </a:prstGeom>
-          <a:noFill/>
-          <a:ln/>
-        </p:spPr>
-        <p:txBody>
-          <a:bodyPr wrap="square" lIns="0" tIns="0" rIns="0" bIns="0" rtlCol="0" anchor="t">
-            <a:normAutofit/>
-          </a:bodyPr>
-          <a:lstStyle/>
-          <a:p>
-            <a:pPr algn="l" indent="0" marL="0">
+          <a:prstGeom xmlns:a="http://schemas.openxmlformats.org/drawingml/2006/main" prst="rect">
+            <a:avLst/>
+          </a:prstGeom>
+          <a:noFill xmlns:a="http://schemas.openxmlformats.org/drawingml/2006/main"/>
+        </p:spPr>
+        <p:txBody>
+          <a:bodyPr xmlns:a="http://schemas.openxmlformats.org/drawingml/2006/main" wrap="square" lIns="0" tIns="0" rIns="0" bIns="0" anchor="t">
+            <a:normAutofit/>
+          </a:bodyPr>
+          <a:lstStyle xmlns:a="http://schemas.openxmlformats.org/drawingml/2006/main"/>
+          <a:p xmlns:a="http://schemas.openxmlformats.org/drawingml/2006/main">
+            <a:pPr marL="0" indent="0" algn="l">
               <a:lnSpc>
                 <a:spcPts val="3300"/>
               </a:lnSpc>
               <a:buNone/>
             </a:pPr>
             <a:r>
-              <a:rPr lang="en-US" sz="3000" dirty="0">
+              <a:rPr sz="3000">
                 <a:solidFill>
                   <a:srgbClr val="7D5E00"/>
                 </a:solidFill>
-                <a:latin typeface="IBM Plex Mono" pitchFamily="49" charset="0"/>
-                <a:ea typeface="IBM Plex Mono" pitchFamily="49" charset="-122"/>
-                <a:cs typeface="IBM Plex Mono" pitchFamily="49" charset="-120"/>
+                <a:latin typeface="IBM Plex Mono"/>
+                <a:ea typeface="IBM Plex Mono"/>
+                <a:cs typeface="IBM Plex Mono"/>
               </a:rPr>
               <a:t>04</a:t>
             </a:r>
-            <a:endParaRPr lang="en-US" sz="3000" dirty="0"/>
-          </a:p>
-        </p:txBody>
-      </p:sp>
-      <p:sp>
-        <p:nvSpPr>
-          <p:cNvPr id="26" name="Text 24"/>
-          <p:cNvSpPr/>
-          <p:nvPr/>
-        </p:nvSpPr>
-        <p:spPr>
-          <a:xfrm>
+            <a:endParaRPr sz="3000"/>
+          </a:p>
+        </p:txBody>
+      </p:sp>
+      <p:sp>
+        <p:nvSpPr>
+          <p:cNvPr id="26" name="Text 24">
+            <a:extLst xmlns:a="http://schemas.openxmlformats.org/drawingml/2006/main">
+              <a:ext uri="{FF2B5EF4-FFF2-40B4-BE49-F238E27FC236}">
+                <a16:creationId xmlns:a16="http://schemas.microsoft.com/office/drawing/2014/main" id="{0422DA1F-17D8-408D-BAEC-FFF358DB5026}"/>
+              </a:ext>
+            </a:extLst>
+          </p:cNvPr>
+          <p:cNvSpPr>
+            <a:spLocks xmlns:a="http://schemas.openxmlformats.org/drawingml/2006/main" noGrp="1"/>
+          </p:cNvSpPr>
+          <p:nvPr/>
+        </p:nvSpPr>
+        <p:spPr>
+          <a:xfrm xmlns:a="http://schemas.openxmlformats.org/drawingml/2006/main">
             <a:off x="9017000" y="2492970"/>
             <a:ext cx="2243392" cy="238720"/>
           </a:xfrm>
-          <a:prstGeom prst="rect">
-            <a:avLst/>
-          </a:prstGeom>
-          <a:noFill/>
-          <a:ln/>
-        </p:spPr>
-        <p:txBody>
-          <a:bodyPr wrap="square" lIns="0" tIns="0" rIns="0" bIns="0" rtlCol="0" anchor="t">
-            <a:normAutofit/>
-          </a:bodyPr>
-          <a:lstStyle/>
-          <a:p>
-            <a:pPr algn="l" indent="0" marL="0">
+          <a:prstGeom xmlns:a="http://schemas.openxmlformats.org/drawingml/2006/main" prst="rect">
+            <a:avLst/>
+          </a:prstGeom>
+          <a:noFill xmlns:a="http://schemas.openxmlformats.org/drawingml/2006/main"/>
+        </p:spPr>
+        <p:txBody>
+          <a:bodyPr xmlns:a="http://schemas.openxmlformats.org/drawingml/2006/main" wrap="square" lIns="0" tIns="0" rIns="0" bIns="0" anchor="t">
+            <a:normAutofit fontScale="100000"/>
+          </a:bodyPr>
+          <a:lstStyle xmlns:a="http://schemas.openxmlformats.org/drawingml/2006/main"/>
+          <a:p xmlns:a="http://schemas.openxmlformats.org/drawingml/2006/main">
+            <a:pPr marL="0" indent="0" algn="l">
               <a:lnSpc>
                 <a:spcPts val="1680"/>
               </a:lnSpc>
               <a:buNone/>
             </a:pPr>
             <a:r>
-              <a:rPr lang="en-US" sz="1400" b="1" dirty="0">
+              <a:rPr sz="1400" b="1">
                 <a:solidFill>
                   <a:srgbClr val="13202D"/>
                 </a:solidFill>
-                <a:latin typeface="IBM Plex Sans" pitchFamily="34" charset="0"/>
-                <a:ea typeface="IBM Plex Sans" pitchFamily="34" charset="-122"/>
-                <a:cs typeface="IBM Plex Sans" pitchFamily="34" charset="-120"/>
-              </a:rPr>
-              <a:t>Задатак и P4</a:t>
-            </a:r>
-            <a:endParaRPr lang="en-US" sz="1400" dirty="0"/>
-          </a:p>
-        </p:txBody>
-      </p:sp>
-      <p:sp>
-        <p:nvSpPr>
-          <p:cNvPr id="27" name="Text 25"/>
-          <p:cNvSpPr/>
-          <p:nvPr/>
-        </p:nvSpPr>
-        <p:spPr>
-          <a:xfrm>
+                <a:latin typeface="IBM Plex Sans"/>
+                <a:ea typeface="IBM Plex Sans"/>
+                <a:cs typeface="IBM Plex Sans"/>
+              </a:rPr>
+              <a:t>Задатак и </a:t>
+            </a:r>
+            <a:r>
+              <a:rPr sz="1400" b="1">
+                <a:solidFill>
+                  <a:srgbClr val="13202D"/>
+                </a:solidFill>
+                <a:latin typeface="IBM Plex Sans"/>
+                <a:ea typeface="IBM Plex Sans"/>
+                <a:cs typeface="IBM Plex Sans"/>
+              </a:rPr>
+              <a:t>КТ2</a:t>
+            </a:r>
+            <a:endParaRPr sz="1400"/>
+          </a:p>
+        </p:txBody>
+      </p:sp>
+      <p:sp>
+        <p:nvSpPr>
+          <p:cNvPr id="27" name="Text 25">
+            <a:extLst xmlns:a="http://schemas.openxmlformats.org/drawingml/2006/main">
+              <a:ext uri="{FF2B5EF4-FFF2-40B4-BE49-F238E27FC236}">
+                <a16:creationId xmlns:a16="http://schemas.microsoft.com/office/drawing/2014/main" id="{7F300A4B-B7D2-4902-8A47-832BC60F5F55}"/>
+              </a:ext>
+            </a:extLst>
+          </p:cNvPr>
+          <p:cNvSpPr>
+            <a:spLocks xmlns:a="http://schemas.openxmlformats.org/drawingml/2006/main" noGrp="1"/>
+          </p:cNvSpPr>
+          <p:nvPr/>
+        </p:nvSpPr>
+        <p:spPr>
+          <a:xfrm xmlns:a="http://schemas.openxmlformats.org/drawingml/2006/main">
             <a:off x="9017000" y="2795191"/>
             <a:ext cx="2243392" cy="665361"/>
           </a:xfrm>
-          <a:prstGeom prst="rect">
-            <a:avLst/>
-          </a:prstGeom>
-          <a:noFill/>
-          <a:ln/>
-        </p:spPr>
-        <p:txBody>
-          <a:bodyPr wrap="square" lIns="0" tIns="0" rIns="0" bIns="0" rtlCol="0" anchor="t">
-            <a:normAutofit/>
-          </a:bodyPr>
-          <a:lstStyle/>
-          <a:p>
-            <a:pPr algn="l" indent="0" marL="0">
+          <a:prstGeom xmlns:a="http://schemas.openxmlformats.org/drawingml/2006/main" prst="rect">
+            <a:avLst/>
+          </a:prstGeom>
+          <a:noFill xmlns:a="http://schemas.openxmlformats.org/drawingml/2006/main"/>
+        </p:spPr>
+        <p:txBody>
+          <a:bodyPr xmlns:a="http://schemas.openxmlformats.org/drawingml/2006/main" wrap="square" lIns="0" tIns="0" rIns="0" bIns="0" anchor="t">
+            <a:normAutofit fontScale="100000"/>
+          </a:bodyPr>
+          <a:lstStyle xmlns:a="http://schemas.openxmlformats.org/drawingml/2006/main"/>
+          <a:p xmlns:a="http://schemas.openxmlformats.org/drawingml/2006/main">
+            <a:pPr marL="0" indent="0" algn="l">
               <a:lnSpc>
                 <a:spcPts val="1680"/>
               </a:lnSpc>
               <a:buNone/>
             </a:pPr>
             <a:r>
-              <a:rPr lang="en-US" sz="1200" dirty="0">
+              <a:rPr sz="1200">
                 <a:solidFill>
                   <a:srgbClr val="44505D"/>
                 </a:solidFill>
-                <a:latin typeface="IBM Plex Sans" pitchFamily="34" charset="0"/>
-                <a:ea typeface="IBM Plex Sans" pitchFamily="34" charset="-122"/>
-                <a:cs typeface="IBM Plex Sans" pitchFamily="34" charset="-120"/>
-              </a:rPr>
-              <a:t>Задатак на вежби, резиме и контролна тачка P4.</a:t>
-            </a:r>
-            <a:endParaRPr lang="en-US" sz="1200" dirty="0"/>
-          </a:p>
-        </p:txBody>
-      </p:sp>
-      <p:sp>
-        <p:nvSpPr>
-          <p:cNvPr id="28" name="Text 26"/>
-          <p:cNvSpPr/>
-          <p:nvPr/>
-        </p:nvSpPr>
-        <p:spPr>
-          <a:xfrm>
+                <a:latin typeface="IBM Plex Sans"/>
+                <a:ea typeface="IBM Plex Sans"/>
+                <a:cs typeface="IBM Plex Sans"/>
+              </a:rPr>
+              <a:t>Задатак на вежби, резиме и контролна тачка </a:t>
+            </a:r>
+            <a:r>
+              <a:rPr sz="1200">
+                <a:solidFill>
+                  <a:srgbClr val="44505D"/>
+                </a:solidFill>
+                <a:latin typeface="IBM Plex Sans"/>
+                <a:ea typeface="IBM Plex Sans"/>
+                <a:cs typeface="IBM Plex Sans"/>
+              </a:rPr>
+              <a:t>КТ2</a:t>
+            </a:r>
+            <a:r>
+              <a:rPr sz="1200">
+                <a:solidFill>
+                  <a:srgbClr val="44505D"/>
+                </a:solidFill>
+                <a:latin typeface="IBM Plex Sans"/>
+                <a:ea typeface="IBM Plex Sans"/>
+                <a:cs typeface="IBM Plex Sans"/>
+              </a:rPr>
+              <a:t>.</a:t>
+            </a:r>
+            <a:endParaRPr sz="1200"/>
+          </a:p>
+        </p:txBody>
+      </p:sp>
+      <p:sp>
+        <p:nvSpPr>
+          <p:cNvPr id="28" name="Text 26">
+            <a:extLst xmlns:a="http://schemas.openxmlformats.org/drawingml/2006/main">
+              <a:ext uri="{FF2B5EF4-FFF2-40B4-BE49-F238E27FC236}">
+                <a16:creationId xmlns:a16="http://schemas.microsoft.com/office/drawing/2014/main" id="{A53F0C75-EC9C-400A-A970-53A4EC45E6AE}"/>
+              </a:ext>
+            </a:extLst>
+          </p:cNvPr>
+          <p:cNvSpPr>
+            <a:spLocks xmlns:a="http://schemas.openxmlformats.org/drawingml/2006/main" noGrp="1"/>
+          </p:cNvSpPr>
+          <p:nvPr/>
+        </p:nvSpPr>
+        <p:spPr>
+          <a:xfrm xmlns:a="http://schemas.openxmlformats.org/drawingml/2006/main">
             <a:off x="9017000" y="3524052"/>
             <a:ext cx="2243392" cy="238720"/>
           </a:xfrm>
-          <a:prstGeom prst="rect">
-            <a:avLst/>
-          </a:prstGeom>
-          <a:noFill/>
-          <a:ln/>
-        </p:spPr>
-        <p:txBody>
-          <a:bodyPr wrap="square" lIns="0" tIns="0" rIns="0" bIns="0" rtlCol="0" anchor="t">
-            <a:normAutofit/>
-          </a:bodyPr>
-          <a:lstStyle/>
-          <a:p>
-            <a:pPr algn="l" indent="0" marL="0">
+          <a:prstGeom xmlns:a="http://schemas.openxmlformats.org/drawingml/2006/main" prst="rect">
+            <a:avLst/>
+          </a:prstGeom>
+          <a:noFill xmlns:a="http://schemas.openxmlformats.org/drawingml/2006/main"/>
+        </p:spPr>
+        <p:txBody>
+          <a:bodyPr xmlns:a="http://schemas.openxmlformats.org/drawingml/2006/main" wrap="square" lIns="0" tIns="0" rIns="0" bIns="0" anchor="t">
+            <a:normAutofit/>
+          </a:bodyPr>
+          <a:lstStyle xmlns:a="http://schemas.openxmlformats.org/drawingml/2006/main"/>
+          <a:p xmlns:a="http://schemas.openxmlformats.org/drawingml/2006/main">
+            <a:pPr marL="0" indent="0" algn="l">
               <a:lnSpc>
                 <a:spcPts val="1680"/>
               </a:lnSpc>
               <a:buNone/>
             </a:pPr>
             <a:r>
-              <a:rPr lang="en-US" sz="1200" dirty="0">
+              <a:rPr sz="1200">
                 <a:solidFill>
                   <a:srgbClr val="5E6975"/>
                 </a:solidFill>
-                <a:latin typeface="IBM Plex Mono" pitchFamily="49" charset="0"/>
-                <a:ea typeface="IBM Plex Mono" pitchFamily="49" charset="-122"/>
-                <a:cs typeface="IBM Plex Mono" pitchFamily="49" charset="-120"/>
+                <a:latin typeface="IBM Plex Mono"/>
+                <a:ea typeface="IBM Plex Mono"/>
+                <a:cs typeface="IBM Plex Mono"/>
               </a:rPr>
               <a:t>23–26</a:t>
             </a:r>
-            <a:endParaRPr lang="en-US" sz="1200" dirty="0"/>
-          </a:p>
-        </p:txBody>
-      </p:sp>
-      <p:sp>
-        <p:nvSpPr>
-          <p:cNvPr id="29" name="Text 27"/>
-          <p:cNvSpPr/>
-          <p:nvPr/>
-        </p:nvSpPr>
-        <p:spPr>
-          <a:xfrm>
+            <a:endParaRPr sz="1200"/>
+          </a:p>
+        </p:txBody>
+      </p:sp>
+      <p:sp>
+        <p:nvSpPr>
+          <p:cNvPr id="29" name="Text 27">
+            <a:extLst xmlns:a="http://schemas.openxmlformats.org/drawingml/2006/main">
+              <a:ext uri="{FF2B5EF4-FFF2-40B4-BE49-F238E27FC236}">
+                <a16:creationId xmlns:a16="http://schemas.microsoft.com/office/drawing/2014/main" id="{204535AB-FC8B-4F73-A757-2D696B52059D}"/>
+              </a:ext>
+            </a:extLst>
+          </p:cNvPr>
+          <p:cNvSpPr>
+            <a:spLocks xmlns:a="http://schemas.openxmlformats.org/drawingml/2006/main" noGrp="1"/>
+          </p:cNvSpPr>
+          <p:nvPr/>
+        </p:nvSpPr>
+        <p:spPr>
+          <a:xfrm xmlns:a="http://schemas.openxmlformats.org/drawingml/2006/main">
             <a:off x="812800" y="4175522"/>
             <a:ext cx="10566400" cy="416520"/>
           </a:xfrm>
-          <a:prstGeom prst="roundRect">
+          <a:prstGeom xmlns:a="http://schemas.openxmlformats.org/drawingml/2006/main" prst="roundRect">
             <a:avLst>
               <a:gd name="adj" fmla="val 18294"/>
             </a:avLst>
           </a:prstGeom>
-          <a:solidFill>
+          <a:solidFill xmlns:a="http://schemas.openxmlformats.org/drawingml/2006/main">
             <a:srgbClr val="ECEAE0"/>
           </a:solidFill>
-          <a:ln/>
-        </p:spPr>
-        <p:txBody>
-          <a:bodyPr wrap="square" lIns="130082" tIns="79282" rIns="0" bIns="53882" rtlCol="0" anchor="t">
-            <a:normAutofit/>
-          </a:bodyPr>
-          <a:lstStyle/>
-          <a:p>
-            <a:pPr algn="l" indent="0" marL="0">
+        </p:spPr>
+        <p:txBody>
+          <a:bodyPr xmlns:a="http://schemas.openxmlformats.org/drawingml/2006/main" wrap="square" lIns="130082" tIns="79282" rIns="0" bIns="53882" anchor="t">
+            <a:normAutofit/>
+          </a:bodyPr>
+          <a:lstStyle xmlns:a="http://schemas.openxmlformats.org/drawingml/2006/main"/>
+          <a:p xmlns:a="http://schemas.openxmlformats.org/drawingml/2006/main">
+            <a:pPr marL="0" indent="0" algn="l">
               <a:lnSpc>
                 <a:spcPts val="1680"/>
               </a:lnSpc>
               <a:buNone/>
             </a:pPr>
             <a:r>
-              <a:rPr lang="en-US" sz="1200" b="1" dirty="0">
+              <a:rPr sz="1200" b="1">
                 <a:solidFill>
                   <a:srgbClr val="44505D"/>
                 </a:solidFill>
-                <a:latin typeface="IBM Plex Sans" pitchFamily="34" charset="0"/>
-                <a:ea typeface="IBM Plex Sans" pitchFamily="34" charset="-122"/>
-                <a:cs typeface="IBM Plex Sans" pitchFamily="34" charset="-120"/>
+                <a:latin typeface="IBM Plex Sans"/>
+                <a:ea typeface="IBM Plex Sans"/>
+                <a:cs typeface="IBM Plex Sans"/>
               </a:rPr>
               <a:t>Увод</a:t>
             </a:r>
             <a:r>
-              <a:rPr lang="en-US" sz="1200" dirty="0">
+              <a:rPr sz="1200">
                 <a:solidFill>
                   <a:srgbClr val="44505D"/>
                 </a:solidFill>
-                <a:latin typeface="IBM Plex Sans" pitchFamily="34" charset="0"/>
-                <a:ea typeface="IBM Plex Sans" pitchFamily="34" charset="-122"/>
-                <a:cs typeface="IBM Plex Sans" pitchFamily="34" charset="-120"/>
+                <a:latin typeface="IBM Plex Sans"/>
+                <a:ea typeface="IBM Plex Sans"/>
+                <a:cs typeface="IBM Plex Sans"/>
               </a:rPr>
               <a:t> · извршива правила и слојеви заштите (03–04)</a:t>
             </a:r>
-            <a:endParaRPr lang="en-US" sz="1200" dirty="0"/>
-          </a:p>
-        </p:txBody>
-      </p:sp>
-      <p:sp>
-        <p:nvSpPr>
-          <p:cNvPr id="30" name="Shape 28"/>
-          <p:cNvSpPr/>
-          <p:nvPr/>
-        </p:nvSpPr>
-        <p:spPr>
-          <a:xfrm>
+            <a:endParaRPr sz="1200"/>
+          </a:p>
+        </p:txBody>
+      </p:sp>
+      <p:sp>
+        <p:nvSpPr>
+          <p:cNvPr id="30" name="Shape 28">
+            <a:extLst xmlns:a="http://schemas.openxmlformats.org/drawingml/2006/main">
+              <a:ext uri="{FF2B5EF4-FFF2-40B4-BE49-F238E27FC236}">
+                <a16:creationId xmlns:a16="http://schemas.microsoft.com/office/drawing/2014/main" id="{3420C1C5-7CD3-470A-A0E9-C66D10FA8B07}"/>
+              </a:ext>
+            </a:extLst>
+          </p:cNvPr>
+          <p:cNvSpPr>
+            <a:spLocks xmlns:a="http://schemas.openxmlformats.org/drawingml/2006/main" noGrp="1"/>
+          </p:cNvSpPr>
+          <p:nvPr/>
+        </p:nvSpPr>
+        <p:spPr>
+          <a:xfrm xmlns:a="http://schemas.openxmlformats.org/drawingml/2006/main">
             <a:off x="812800" y="6209705"/>
             <a:ext cx="10566400" cy="0"/>
           </a:xfrm>
-          <a:prstGeom prst="line">
-            <a:avLst/>
-          </a:prstGeom>
-          <a:noFill/>
-          <a:ln w="6350">
+          <a:prstGeom xmlns:a="http://schemas.openxmlformats.org/drawingml/2006/main" prst="line">
+            <a:avLst/>
+          </a:prstGeom>
+          <a:noFill xmlns:a="http://schemas.openxmlformats.org/drawingml/2006/main"/>
+          <a:ln xmlns:a="http://schemas.openxmlformats.org/drawingml/2006/main" w="6350">
             <a:solidFill>
               <a:srgbClr val="D3DAE1"/>
             </a:solidFill>
@@ -18299,97 +18467,113 @@
       </p:sp>
       <p:sp>
         <p:nvSpPr>
-          <p:cNvPr id="31" name="Text 29"/>
-          <p:cNvSpPr/>
-          <p:nvPr/>
-        </p:nvSpPr>
-        <p:spPr>
-          <a:xfrm>
+          <p:cNvPr id="31" name="Text 29">
+            <a:extLst xmlns:a="http://schemas.openxmlformats.org/drawingml/2006/main">
+              <a:ext uri="{FF2B5EF4-FFF2-40B4-BE49-F238E27FC236}">
+                <a16:creationId xmlns:a16="http://schemas.microsoft.com/office/drawing/2014/main" id="{A882525C-B07E-4471-A83F-511F6A9D64EA}"/>
+              </a:ext>
+            </a:extLst>
+          </p:cNvPr>
+          <p:cNvSpPr>
+            <a:spLocks xmlns:a="http://schemas.openxmlformats.org/drawingml/2006/main" noGrp="1"/>
+          </p:cNvSpPr>
+          <p:nvPr/>
+        </p:nvSpPr>
+        <p:spPr>
+          <a:xfrm xmlns:a="http://schemas.openxmlformats.org/drawingml/2006/main">
             <a:off x="812800" y="6314480"/>
             <a:ext cx="2390061" cy="238720"/>
           </a:xfrm>
-          <a:prstGeom prst="rect">
-            <a:avLst/>
-          </a:prstGeom>
-          <a:noFill/>
-          <a:ln/>
-        </p:spPr>
-        <p:txBody>
-          <a:bodyPr wrap="square" lIns="0" tIns="0" rIns="0" bIns="0" rtlCol="0" anchor="t">
-            <a:normAutofit/>
-          </a:bodyPr>
-          <a:lstStyle/>
-          <a:p>
-            <a:pPr algn="l" indent="0" marL="0">
+          <a:prstGeom xmlns:a="http://schemas.openxmlformats.org/drawingml/2006/main" prst="rect">
+            <a:avLst/>
+          </a:prstGeom>
+          <a:noFill xmlns:a="http://schemas.openxmlformats.org/drawingml/2006/main"/>
+        </p:spPr>
+        <p:txBody>
+          <a:bodyPr xmlns:a="http://schemas.openxmlformats.org/drawingml/2006/main" wrap="square" lIns="0" tIns="0" rIns="0" bIns="0" anchor="t">
+            <a:normAutofit/>
+          </a:bodyPr>
+          <a:lstStyle xmlns:a="http://schemas.openxmlformats.org/drawingml/2006/main"/>
+          <a:p xmlns:a="http://schemas.openxmlformats.org/drawingml/2006/main">
+            <a:pPr marL="0" indent="0" algn="l">
               <a:lnSpc>
                 <a:spcPts val="1680"/>
               </a:lnSpc>
               <a:buNone/>
             </a:pPr>
             <a:r>
-              <a:rPr lang="en-US" sz="1200" dirty="0">
+              <a:rPr sz="1200">
                 <a:solidFill>
                   <a:srgbClr val="5E6975"/>
                 </a:solidFill>
-                <a:latin typeface="IBM Plex Sans" pitchFamily="34" charset="0"/>
-                <a:ea typeface="IBM Plex Sans" pitchFamily="34" charset="-122"/>
-                <a:cs typeface="IBM Plex Sans" pitchFamily="34" charset="-120"/>
+                <a:latin typeface="IBM Plex Sans"/>
+                <a:ea typeface="IBM Plex Sans"/>
+                <a:cs typeface="IBM Plex Sans"/>
               </a:rPr>
               <a:t>Елементи развоја софтвера</a:t>
             </a:r>
-            <a:endParaRPr lang="en-US" sz="1200" dirty="0"/>
-          </a:p>
-        </p:txBody>
-      </p:sp>
-      <p:sp>
-        <p:nvSpPr>
-          <p:cNvPr id="32" name="Text 30"/>
-          <p:cNvSpPr/>
-          <p:nvPr/>
-        </p:nvSpPr>
-        <p:spPr>
-          <a:xfrm>
+            <a:endParaRPr sz="1200"/>
+          </a:p>
+        </p:txBody>
+      </p:sp>
+      <p:sp>
+        <p:nvSpPr>
+          <p:cNvPr id="32" name="Text 30">
+            <a:extLst xmlns:a="http://schemas.openxmlformats.org/drawingml/2006/main">
+              <a:ext uri="{FF2B5EF4-FFF2-40B4-BE49-F238E27FC236}">
+                <a16:creationId xmlns:a16="http://schemas.microsoft.com/office/drawing/2014/main" id="{4CB3C9EF-DA9A-45DD-A741-6804576BA292}"/>
+              </a:ext>
+            </a:extLst>
+          </p:cNvPr>
+          <p:cNvSpPr>
+            <a:spLocks xmlns:a="http://schemas.openxmlformats.org/drawingml/2006/main" noGrp="1"/>
+          </p:cNvSpPr>
+          <p:nvPr/>
+        </p:nvSpPr>
+        <p:spPr>
+          <a:xfrm xmlns:a="http://schemas.openxmlformats.org/drawingml/2006/main">
             <a:off x="11145441" y="6314480"/>
             <a:ext cx="233759" cy="238720"/>
           </a:xfrm>
-          <a:prstGeom prst="rect">
-            <a:avLst/>
-          </a:prstGeom>
-          <a:noFill/>
-          <a:ln/>
-        </p:spPr>
-        <p:txBody>
-          <a:bodyPr wrap="square" lIns="0" tIns="0" rIns="0" bIns="0" rtlCol="0" anchor="t">
-            <a:normAutofit/>
-          </a:bodyPr>
-          <a:lstStyle/>
-          <a:p>
-            <a:pPr algn="r" indent="0" marL="0">
+          <a:prstGeom xmlns:a="http://schemas.openxmlformats.org/drawingml/2006/main" prst="rect">
+            <a:avLst/>
+          </a:prstGeom>
+          <a:noFill xmlns:a="http://schemas.openxmlformats.org/drawingml/2006/main"/>
+        </p:spPr>
+        <p:txBody>
+          <a:bodyPr xmlns:a="http://schemas.openxmlformats.org/drawingml/2006/main" wrap="square" lIns="0" tIns="0" rIns="0" bIns="0" anchor="t">
+            <a:normAutofit/>
+          </a:bodyPr>
+          <a:lstStyle xmlns:a="http://schemas.openxmlformats.org/drawingml/2006/main"/>
+          <a:p xmlns:a="http://schemas.openxmlformats.org/drawingml/2006/main">
+            <a:pPr marL="0" indent="0" algn="r">
               <a:lnSpc>
                 <a:spcPts val="1680"/>
               </a:lnSpc>
               <a:buNone/>
             </a:pPr>
             <a:r>
-              <a:rPr lang="en-US" sz="1200" dirty="0">
+              <a:rPr sz="1200">
                 <a:solidFill>
                   <a:srgbClr val="5E6975"/>
                 </a:solidFill>
-                <a:latin typeface="IBM Plex Mono" pitchFamily="49" charset="0"/>
-                <a:ea typeface="IBM Plex Mono" pitchFamily="49" charset="-122"/>
-                <a:cs typeface="IBM Plex Mono" pitchFamily="49" charset="-120"/>
+                <a:latin typeface="IBM Plex Mono"/>
+                <a:ea typeface="IBM Plex Mono"/>
+                <a:cs typeface="IBM Plex Mono"/>
               </a:rPr>
               <a:t>02</a:t>
             </a:r>
-            <a:endParaRPr lang="en-US" sz="1200" dirty="0"/>
+            <a:endParaRPr sz="1200"/>
           </a:p>
         </p:txBody>
       </p:sp>
     </p:spTree>
+    <p:extLst>
+      <p:ext uri="{BB962C8B-B14F-4D97-AF65-F5344CB8AC3E}">
+        <p14:creationId xmlns:p14="http://schemas.microsoft.com/office/powerpoint/2010/main" val="2004686982"/>
+      </p:ext>
+    </p:extLst>
   </p:cSld>
-  <p:clrMapOvr>
-    <a:masterClrMapping/>
-  </p:clrMapOvr>
 </p:sld>
 </file>
 
@@ -22185,11 +22369,11 @@
 </file>
 
 <file path=ppt/slides/slide23.xml><?xml version="1.0" encoding="utf-8"?>
-<p:sld xmlns:a="http://schemas.openxmlformats.org/drawingml/2006/main" xmlns:r="http://schemas.openxmlformats.org/officeDocument/2006/relationships" xmlns:p="http://schemas.openxmlformats.org/presentationml/2006/main">
-  <p:cSld name="Slide 23">
+<p:sld xmlns:p="http://schemas.openxmlformats.org/presentationml/2006/main">
+  <p:cSld>
     <p:bg>
       <p:bgPr>
-        <a:solidFill>
+        <a:solidFill xmlns:a="http://schemas.openxmlformats.org/drawingml/2006/main">
           <a:srgbClr val="ECEAE0"/>
         </a:solidFill>
       </p:bgPr>
@@ -22201,211 +22385,253 @@
         <p:nvPr/>
       </p:nvGrpSpPr>
       <p:grpSpPr>
-        <a:xfrm>
-          <a:off x="0" y="0"/>
-          <a:ext cx="0" cy="0"/>
-          <a:chOff x="0" y="0"/>
-          <a:chExt cx="0" cy="0"/>
-        </a:xfrm>
+        <a:xfrm xmlns:a="http://schemas.openxmlformats.org/drawingml/2006/main"/>
       </p:grpSpPr>
       <p:sp>
         <p:nvSpPr>
-          <p:cNvPr id="2" name="Text 0"/>
-          <p:cNvSpPr/>
-          <p:nvPr/>
-        </p:nvSpPr>
-        <p:spPr>
-          <a:xfrm>
+          <p:cNvPr id="2" name="Text 0">
+            <a:extLst xmlns:a="http://schemas.openxmlformats.org/drawingml/2006/main">
+              <a:ext uri="{FF2B5EF4-FFF2-40B4-BE49-F238E27FC236}">
+                <a16:creationId xmlns:a16="http://schemas.microsoft.com/office/drawing/2014/main" id="{3804E3B1-EEE7-402F-882F-6BA6E7CAF45A}"/>
+              </a:ext>
+            </a:extLst>
+          </p:cNvPr>
+          <p:cNvSpPr>
+            <a:spLocks xmlns:a="http://schemas.openxmlformats.org/drawingml/2006/main" noGrp="1"/>
+          </p:cNvSpPr>
+          <p:nvPr/>
+        </p:nvSpPr>
+        <p:spPr>
+          <a:xfrm xmlns:a="http://schemas.openxmlformats.org/drawingml/2006/main">
             <a:off x="812800" y="2438400"/>
             <a:ext cx="3139440" cy="1803400"/>
           </a:xfrm>
-          <a:prstGeom prst="rect">
-            <a:avLst/>
-          </a:prstGeom>
-          <a:noFill/>
-          <a:ln/>
-        </p:spPr>
-        <p:txBody>
-          <a:bodyPr wrap="square" lIns="0" tIns="0" rIns="0" bIns="0" rtlCol="0" anchor="t">
-            <a:normAutofit/>
-          </a:bodyPr>
-          <a:lstStyle/>
-          <a:p>
-            <a:pPr algn="l" indent="0" marL="0">
+          <a:prstGeom xmlns:a="http://schemas.openxmlformats.org/drawingml/2006/main" prst="rect">
+            <a:avLst/>
+          </a:prstGeom>
+          <a:noFill xmlns:a="http://schemas.openxmlformats.org/drawingml/2006/main"/>
+        </p:spPr>
+        <p:txBody>
+          <a:bodyPr xmlns:a="http://schemas.openxmlformats.org/drawingml/2006/main" wrap="square" lIns="0" tIns="0" rIns="0" bIns="0" anchor="t">
+            <a:normAutofit/>
+          </a:bodyPr>
+          <a:lstStyle xmlns:a="http://schemas.openxmlformats.org/drawingml/2006/main"/>
+          <a:p xmlns:a="http://schemas.openxmlformats.org/drawingml/2006/main">
+            <a:pPr marL="0" indent="0" algn="l">
               <a:lnSpc>
                 <a:spcPts val="14000"/>
               </a:lnSpc>
               <a:buNone/>
             </a:pPr>
             <a:r>
-              <a:rPr lang="en-US" sz="14000" spc="-400" kern="0" dirty="0">
+              <a:rPr sz="14000" spc="-400">
                 <a:solidFill>
                   <a:srgbClr val="7D5E00"/>
                 </a:solidFill>
-                <a:latin typeface="IBM Plex Mono" pitchFamily="49" charset="0"/>
-                <a:ea typeface="IBM Plex Mono" pitchFamily="49" charset="-122"/>
-                <a:cs typeface="IBM Plex Mono" pitchFamily="49" charset="-120"/>
+                <a:latin typeface="IBM Plex Mono"/>
+                <a:ea typeface="IBM Plex Mono"/>
+                <a:cs typeface="IBM Plex Mono"/>
               </a:rPr>
               <a:t>04</a:t>
             </a:r>
-            <a:endParaRPr lang="en-US" sz="14000" dirty="0"/>
-          </a:p>
-        </p:txBody>
-      </p:sp>
-      <p:sp>
-        <p:nvSpPr>
-          <p:cNvPr id="3" name="Text 1"/>
-          <p:cNvSpPr/>
-          <p:nvPr/>
-        </p:nvSpPr>
-        <p:spPr>
-          <a:xfrm>
+            <a:endParaRPr sz="14000"/>
+          </a:p>
+        </p:txBody>
+      </p:sp>
+      <p:sp>
+        <p:nvSpPr>
+          <p:cNvPr id="3" name="Text 1">
+            <a:extLst xmlns:a="http://schemas.openxmlformats.org/drawingml/2006/main">
+              <a:ext uri="{FF2B5EF4-FFF2-40B4-BE49-F238E27FC236}">
+                <a16:creationId xmlns:a16="http://schemas.microsoft.com/office/drawing/2014/main" id="{6BF0A5D7-9587-4DE2-BC7C-B4909873FAD0}"/>
+              </a:ext>
+            </a:extLst>
+          </p:cNvPr>
+          <p:cNvSpPr>
+            <a:spLocks xmlns:a="http://schemas.openxmlformats.org/drawingml/2006/main" noGrp="1"/>
+          </p:cNvSpPr>
+          <p:nvPr/>
+        </p:nvSpPr>
+        <p:spPr>
+          <a:xfrm xmlns:a="http://schemas.openxmlformats.org/drawingml/2006/main">
             <a:off x="4267200" y="2139355"/>
             <a:ext cx="7325360" cy="238720"/>
           </a:xfrm>
-          <a:prstGeom prst="rect">
-            <a:avLst/>
-          </a:prstGeom>
-          <a:noFill/>
-          <a:ln/>
-        </p:spPr>
-        <p:txBody>
-          <a:bodyPr wrap="square" lIns="0" tIns="0" rIns="0" bIns="0" rtlCol="0" anchor="t">
-            <a:normAutofit/>
-          </a:bodyPr>
-          <a:lstStyle/>
-          <a:p>
-            <a:pPr algn="l" indent="0" marL="0">
+          <a:prstGeom xmlns:a="http://schemas.openxmlformats.org/drawingml/2006/main" prst="rect">
+            <a:avLst/>
+          </a:prstGeom>
+          <a:noFill xmlns:a="http://schemas.openxmlformats.org/drawingml/2006/main"/>
+        </p:spPr>
+        <p:txBody>
+          <a:bodyPr xmlns:a="http://schemas.openxmlformats.org/drawingml/2006/main" wrap="square" lIns="0" tIns="0" rIns="0" bIns="0" anchor="t">
+            <a:normAutofit/>
+          </a:bodyPr>
+          <a:lstStyle xmlns:a="http://schemas.openxmlformats.org/drawingml/2006/main"/>
+          <a:p xmlns:a="http://schemas.openxmlformats.org/drawingml/2006/main">
+            <a:pPr marL="0" indent="0" algn="l">
               <a:lnSpc>
                 <a:spcPts val="1680"/>
               </a:lnSpc>
               <a:buNone/>
             </a:pPr>
             <a:r>
-              <a:rPr lang="en-US" sz="1200" spc="100" kern="0" dirty="0">
+              <a:rPr sz="1200" spc="100">
                 <a:solidFill>
                   <a:srgbClr val="7D5E00"/>
                 </a:solidFill>
-                <a:latin typeface="IBM Plex Mono" pitchFamily="49" charset="0"/>
-                <a:ea typeface="IBM Plex Mono" pitchFamily="49" charset="-122"/>
-                <a:cs typeface="IBM Plex Mono" pitchFamily="49" charset="-120"/>
+                <a:latin typeface="IBM Plex Mono"/>
+                <a:ea typeface="IBM Plex Mono"/>
+                <a:cs typeface="IBM Plex Mono"/>
               </a:rPr>
               <a:t>ЧЕТВРТИ ДЕО</a:t>
             </a:r>
-            <a:endParaRPr lang="en-US" sz="1200" dirty="0"/>
-          </a:p>
-        </p:txBody>
-      </p:sp>
-      <p:sp>
-        <p:nvSpPr>
-          <p:cNvPr id="4" name="Text 2"/>
-          <p:cNvSpPr/>
+            <a:endParaRPr sz="1200"/>
+          </a:p>
+        </p:txBody>
+      </p:sp>
+      <p:sp>
+        <p:nvSpPr>
+          <p:cNvPr id="4" name="Text 2">
+            <a:extLst xmlns:a="http://schemas.openxmlformats.org/drawingml/2006/main">
+              <a:ext uri="{FF2B5EF4-FFF2-40B4-BE49-F238E27FC236}">
+                <a16:creationId xmlns:a16="http://schemas.microsoft.com/office/drawing/2014/main" id="{1508C2B3-AE2E-43B8-810C-61C1104B4E3F}"/>
+              </a:ext>
+            </a:extLst>
+          </p:cNvPr>
+          <p:cNvSpPr>
+            <a:spLocks xmlns:a="http://schemas.openxmlformats.org/drawingml/2006/main" noGrp="1"/>
+          </p:cNvSpPr>
           <p:nvPr>
-            <p:ph type="title"/>
+            <p:ph type="title" idx="0"/>
           </p:nvPr>
         </p:nvSpPr>
         <p:spPr>
-          <a:xfrm>
+          <a:xfrm xmlns:a="http://schemas.openxmlformats.org/drawingml/2006/main">
             <a:off x="4267200" y="2530475"/>
             <a:ext cx="7325360" cy="665460"/>
           </a:xfrm>
-          <a:prstGeom prst="rect">
-            <a:avLst/>
-          </a:prstGeom>
-          <a:noFill/>
-          <a:ln/>
-        </p:spPr>
-        <p:txBody>
-          <a:bodyPr wrap="square" lIns="0" tIns="0" rIns="0" bIns="0" rtlCol="0" anchor="t">
-            <a:normAutofit/>
-          </a:bodyPr>
-          <a:lstStyle/>
-          <a:p>
-            <a:pPr algn="l" indent="0" marL="0">
+          <a:prstGeom xmlns:a="http://schemas.openxmlformats.org/drawingml/2006/main" prst="rect">
+            <a:avLst/>
+          </a:prstGeom>
+          <a:noFill xmlns:a="http://schemas.openxmlformats.org/drawingml/2006/main"/>
+        </p:spPr>
+        <p:txBody>
+          <a:bodyPr xmlns:a="http://schemas.openxmlformats.org/drawingml/2006/main" wrap="square" lIns="0" tIns="0" rIns="0" bIns="0" anchor="t">
+            <a:normAutofit fontScale="100000"/>
+          </a:bodyPr>
+          <a:lstStyle xmlns:a="http://schemas.openxmlformats.org/drawingml/2006/main"/>
+          <a:p xmlns:a="http://schemas.openxmlformats.org/drawingml/2006/main">
+            <a:pPr marL="0" indent="0" algn="l">
               <a:lnSpc>
                 <a:spcPts val="5040"/>
               </a:lnSpc>
               <a:buNone/>
             </a:pPr>
             <a:r>
-              <a:rPr lang="en-US" sz="4800" b="1" i="0" spc="-100" kern="0" dirty="0">
+              <a:rPr sz="4800" b="1" i="0" spc="-100">
                 <a:solidFill>
                   <a:srgbClr val="13202D"/>
                 </a:solidFill>
-                <a:latin typeface="IBM Plex Sans" pitchFamily="34" charset="0"/>
-                <a:ea typeface="IBM Plex Sans" pitchFamily="34" charset="-122"/>
-                <a:cs typeface="IBM Plex Sans" pitchFamily="34" charset="-120"/>
-              </a:rPr>
-              <a:t>Задатак и P4</a:t>
-            </a:r>
-            <a:endParaRPr lang="en-US" sz="4800" dirty="0"/>
-          </a:p>
-        </p:txBody>
-      </p:sp>
-      <p:sp>
-        <p:nvSpPr>
-          <p:cNvPr id="5" name="Text 3"/>
-          <p:cNvSpPr/>
-          <p:nvPr/>
-        </p:nvSpPr>
-        <p:spPr>
-          <a:xfrm>
+                <a:latin typeface="IBM Plex Sans"/>
+                <a:ea typeface="IBM Plex Sans"/>
+                <a:cs typeface="IBM Plex Sans"/>
+              </a:rPr>
+              <a:t>Задатак и </a:t>
+            </a:r>
+            <a:r>
+              <a:rPr sz="4800" b="1" i="0" spc="-100">
+                <a:solidFill>
+                  <a:srgbClr val="13202D"/>
+                </a:solidFill>
+                <a:latin typeface="IBM Plex Sans"/>
+                <a:ea typeface="IBM Plex Sans"/>
+                <a:cs typeface="IBM Plex Sans"/>
+              </a:rPr>
+              <a:t>КТ2</a:t>
+            </a:r>
+            <a:endParaRPr sz="4800"/>
+          </a:p>
+        </p:txBody>
+      </p:sp>
+      <p:sp>
+        <p:nvSpPr>
+          <p:cNvPr id="5" name="Text 3">
+            <a:extLst xmlns:a="http://schemas.openxmlformats.org/drawingml/2006/main">
+              <a:ext uri="{FF2B5EF4-FFF2-40B4-BE49-F238E27FC236}">
+                <a16:creationId xmlns:a16="http://schemas.microsoft.com/office/drawing/2014/main" id="{EBA9C99C-F59E-4E99-8517-6A915C4EAFD2}"/>
+              </a:ext>
+            </a:extLst>
+          </p:cNvPr>
+          <p:cNvSpPr>
+            <a:spLocks xmlns:a="http://schemas.openxmlformats.org/drawingml/2006/main" noGrp="1"/>
+          </p:cNvSpPr>
+          <p:nvPr/>
+        </p:nvSpPr>
+        <p:spPr>
+          <a:xfrm xmlns:a="http://schemas.openxmlformats.org/drawingml/2006/main">
             <a:off x="4267200" y="3348335"/>
             <a:ext cx="7315200" cy="283170"/>
           </a:xfrm>
-          <a:prstGeom prst="rect">
-            <a:avLst/>
-          </a:prstGeom>
-          <a:noFill/>
-          <a:ln/>
-        </p:spPr>
-        <p:txBody>
-          <a:bodyPr wrap="square" lIns="0" tIns="0" rIns="0" bIns="0" rtlCol="0" anchor="t">
-            <a:normAutofit/>
-          </a:bodyPr>
-          <a:lstStyle/>
-          <a:p>
-            <a:pPr algn="l" indent="0" marL="0">
+          <a:prstGeom xmlns:a="http://schemas.openxmlformats.org/drawingml/2006/main" prst="rect">
+            <a:avLst/>
+          </a:prstGeom>
+          <a:noFill xmlns:a="http://schemas.openxmlformats.org/drawingml/2006/main"/>
+        </p:spPr>
+        <p:txBody>
+          <a:bodyPr xmlns:a="http://schemas.openxmlformats.org/drawingml/2006/main" wrap="square" lIns="0" tIns="0" rIns="0" bIns="0" anchor="t">
+            <a:normAutofit/>
+          </a:bodyPr>
+          <a:lstStyle xmlns:a="http://schemas.openxmlformats.org/drawingml/2006/main"/>
+          <a:p xmlns:a="http://schemas.openxmlformats.org/drawingml/2006/main">
+            <a:pPr marL="0" indent="0" algn="l">
               <a:lnSpc>
                 <a:spcPts val="2030"/>
               </a:lnSpc>
               <a:buNone/>
             </a:pPr>
             <a:r>
-              <a:rPr lang="en-US" sz="1400" dirty="0">
+              <a:rPr sz="1400">
                 <a:solidFill>
                   <a:srgbClr val="44505D"/>
                 </a:solidFill>
-                <a:latin typeface="IBM Plex Sans" pitchFamily="34" charset="0"/>
-                <a:ea typeface="IBM Plex Sans" pitchFamily="34" charset="-122"/>
-                <a:cs typeface="IBM Plex Sans" pitchFamily="34" charset="-120"/>
+                <a:latin typeface="IBM Plex Sans"/>
+                <a:ea typeface="IBM Plex Sans"/>
+                <a:cs typeface="IBM Plex Sans"/>
               </a:rPr>
               <a:t>Једно правило из инструкција постаје извршива и тестирана политика.</a:t>
             </a:r>
-            <a:endParaRPr lang="en-US" sz="1400" dirty="0"/>
-          </a:p>
-        </p:txBody>
-      </p:sp>
-      <p:sp>
-        <p:nvSpPr>
-          <p:cNvPr id="6" name="Text 4"/>
-          <p:cNvSpPr/>
-          <p:nvPr/>
-        </p:nvSpPr>
-        <p:spPr>
-          <a:xfrm>
+            <a:endParaRPr sz="1400"/>
+          </a:p>
+        </p:txBody>
+      </p:sp>
+      <p:sp>
+        <p:nvSpPr>
+          <p:cNvPr id="6" name="Text 4">
+            <a:extLst xmlns:a="http://schemas.openxmlformats.org/drawingml/2006/main">
+              <a:ext uri="{FF2B5EF4-FFF2-40B4-BE49-F238E27FC236}">
+                <a16:creationId xmlns:a16="http://schemas.microsoft.com/office/drawing/2014/main" id="{205108FD-EBD9-487D-A573-92427B80646A}"/>
+              </a:ext>
+            </a:extLst>
+          </p:cNvPr>
+          <p:cNvSpPr>
+            <a:spLocks xmlns:a="http://schemas.openxmlformats.org/drawingml/2006/main" noGrp="1"/>
+          </p:cNvSpPr>
+          <p:nvPr/>
+        </p:nvSpPr>
+        <p:spPr>
+          <a:xfrm xmlns:a="http://schemas.openxmlformats.org/drawingml/2006/main">
             <a:off x="4270375" y="3787080"/>
             <a:ext cx="1490762" cy="321270"/>
           </a:xfrm>
-          <a:prstGeom prst="roundRect">
+          <a:prstGeom xmlns:a="http://schemas.openxmlformats.org/drawingml/2006/main" prst="roundRect">
             <a:avLst>
               <a:gd name="adj" fmla="val 50000"/>
             </a:avLst>
           </a:prstGeom>
-          <a:solidFill>
+          <a:solidFill xmlns:a="http://schemas.openxmlformats.org/drawingml/2006/main">
             <a:srgbClr val="FCFCFB"/>
           </a:solidFill>
-          <a:ln w="6350">
+          <a:ln xmlns:a="http://schemas.openxmlformats.org/drawingml/2006/main" w="6350">
             <a:solidFill>
               <a:srgbClr val="C0BFB5"/>
             </a:solidFill>
@@ -22413,52 +22639,60 @@
           </a:ln>
         </p:spPr>
         <p:txBody>
-          <a:bodyPr wrap="none" lIns="0" tIns="0" rIns="0" bIns="0" rtlCol="0" anchor="ctr">
-            <a:normAutofit/>
-          </a:bodyPr>
-          <a:lstStyle/>
-          <a:p>
-            <a:pPr algn="ctr" indent="0" marL="0">
+          <a:bodyPr xmlns:a="http://schemas.openxmlformats.org/drawingml/2006/main" wrap="none" lIns="0" tIns="0" rIns="0" bIns="0" anchor="ctr">
+            <a:normAutofit/>
+          </a:bodyPr>
+          <a:lstStyle xmlns:a="http://schemas.openxmlformats.org/drawingml/2006/main"/>
+          <a:p xmlns:a="http://schemas.openxmlformats.org/drawingml/2006/main">
+            <a:pPr marL="0" indent="0" algn="ctr">
               <a:lnSpc>
                 <a:spcPts val="1680"/>
               </a:lnSpc>
               <a:buNone/>
             </a:pPr>
             <a:r>
-              <a:rPr lang="en-US" sz="1200" dirty="0">
+              <a:rPr sz="1200">
                 <a:solidFill>
                   <a:srgbClr val="13202D"/>
                 </a:solidFill>
-                <a:latin typeface="IBM Plex Sans" pitchFamily="34" charset="0"/>
-                <a:ea typeface="IBM Plex Sans" pitchFamily="34" charset="-122"/>
-                <a:cs typeface="IBM Plex Sans" pitchFamily="34" charset="-120"/>
+                <a:latin typeface="IBM Plex Sans"/>
+                <a:ea typeface="IBM Plex Sans"/>
+                <a:cs typeface="IBM Plex Sans"/>
               </a:rPr>
               <a:t>Guardrail тестови</a:t>
             </a:r>
-            <a:endParaRPr lang="en-US" sz="1200" dirty="0"/>
-          </a:p>
-        </p:txBody>
-      </p:sp>
-      <p:sp>
-        <p:nvSpPr>
-          <p:cNvPr id="7" name="Text 5"/>
-          <p:cNvSpPr/>
-          <p:nvPr/>
-        </p:nvSpPr>
-        <p:spPr>
-          <a:xfrm>
+            <a:endParaRPr sz="1200"/>
+          </a:p>
+        </p:txBody>
+      </p:sp>
+      <p:sp>
+        <p:nvSpPr>
+          <p:cNvPr id="7" name="Text 5">
+            <a:extLst xmlns:a="http://schemas.openxmlformats.org/drawingml/2006/main">
+              <a:ext uri="{FF2B5EF4-FFF2-40B4-BE49-F238E27FC236}">
+                <a16:creationId xmlns:a16="http://schemas.microsoft.com/office/drawing/2014/main" id="{45C1BEBC-FBFF-40C0-B636-7DBB51EA300D}"/>
+              </a:ext>
+            </a:extLst>
+          </p:cNvPr>
+          <p:cNvSpPr>
+            <a:spLocks xmlns:a="http://schemas.openxmlformats.org/drawingml/2006/main" noGrp="1"/>
+          </p:cNvSpPr>
+          <p:nvPr/>
+        </p:nvSpPr>
+        <p:spPr>
+          <a:xfrm xmlns:a="http://schemas.openxmlformats.org/drawingml/2006/main">
             <a:off x="5843687" y="3787080"/>
             <a:ext cx="1176635" cy="321270"/>
           </a:xfrm>
-          <a:prstGeom prst="roundRect">
+          <a:prstGeom xmlns:a="http://schemas.openxmlformats.org/drawingml/2006/main" prst="roundRect">
             <a:avLst>
               <a:gd name="adj" fmla="val 50000"/>
             </a:avLst>
           </a:prstGeom>
-          <a:solidFill>
+          <a:solidFill xmlns:a="http://schemas.openxmlformats.org/drawingml/2006/main">
             <a:srgbClr val="FCFCFB"/>
           </a:solidFill>
-          <a:ln w="6350">
+          <a:ln xmlns:a="http://schemas.openxmlformats.org/drawingml/2006/main" w="6350">
             <a:solidFill>
               <a:srgbClr val="C0BFB5"/>
             </a:solidFill>
@@ -22466,52 +22700,60 @@
           </a:ln>
         </p:spPr>
         <p:txBody>
-          <a:bodyPr wrap="none" lIns="0" tIns="0" rIns="0" bIns="0" rtlCol="0" anchor="ctr">
-            <a:normAutofit/>
-          </a:bodyPr>
-          <a:lstStyle/>
-          <a:p>
-            <a:pPr algn="ctr" indent="0" marL="0">
+          <a:bodyPr xmlns:a="http://schemas.openxmlformats.org/drawingml/2006/main" wrap="none" lIns="0" tIns="0" rIns="0" bIns="0" anchor="ctr">
+            <a:normAutofit/>
+          </a:bodyPr>
+          <a:lstStyle xmlns:a="http://schemas.openxmlformats.org/drawingml/2006/main"/>
+          <a:p xmlns:a="http://schemas.openxmlformats.org/drawingml/2006/main">
+            <a:pPr marL="0" indent="0" algn="ctr">
               <a:lnSpc>
                 <a:spcPts val="1680"/>
               </a:lnSpc>
               <a:buNone/>
             </a:pPr>
             <a:r>
-              <a:rPr lang="en-US" sz="1200" dirty="0">
+              <a:rPr sz="1200">
                 <a:solidFill>
                   <a:srgbClr val="13202D"/>
                 </a:solidFill>
-                <a:latin typeface="IBM Plex Sans" pitchFamily="34" charset="0"/>
-                <a:ea typeface="IBM Plex Sans" pitchFamily="34" charset="-122"/>
-                <a:cs typeface="IBM Plex Sans" pitchFamily="34" charset="-120"/>
+                <a:latin typeface="IBM Plex Sans"/>
+                <a:ea typeface="IBM Plex Sans"/>
+                <a:cs typeface="IBM Plex Sans"/>
               </a:rPr>
               <a:t>.env блокада</a:t>
             </a:r>
-            <a:endParaRPr lang="en-US" sz="1200" dirty="0"/>
-          </a:p>
-        </p:txBody>
-      </p:sp>
-      <p:sp>
-        <p:nvSpPr>
-          <p:cNvPr id="8" name="Text 6"/>
-          <p:cNvSpPr/>
-          <p:nvPr/>
-        </p:nvSpPr>
-        <p:spPr>
-          <a:xfrm>
+            <a:endParaRPr sz="1200"/>
+          </a:p>
+        </p:txBody>
+      </p:sp>
+      <p:sp>
+        <p:nvSpPr>
+          <p:cNvPr id="8" name="Text 6">
+            <a:extLst xmlns:a="http://schemas.openxmlformats.org/drawingml/2006/main">
+              <a:ext uri="{FF2B5EF4-FFF2-40B4-BE49-F238E27FC236}">
+                <a16:creationId xmlns:a16="http://schemas.microsoft.com/office/drawing/2014/main" id="{FCA4F1C2-FE66-4987-86D2-30040EF50CED}"/>
+              </a:ext>
+            </a:extLst>
+          </p:cNvPr>
+          <p:cNvSpPr>
+            <a:spLocks xmlns:a="http://schemas.openxmlformats.org/drawingml/2006/main" noGrp="1"/>
+          </p:cNvSpPr>
+          <p:nvPr/>
+        </p:nvSpPr>
+        <p:spPr>
+          <a:xfrm xmlns:a="http://schemas.openxmlformats.org/drawingml/2006/main">
             <a:off x="7102872" y="3787080"/>
             <a:ext cx="1453654" cy="321270"/>
           </a:xfrm>
-          <a:prstGeom prst="roundRect">
+          <a:prstGeom xmlns:a="http://schemas.openxmlformats.org/drawingml/2006/main" prst="roundRect">
             <a:avLst>
               <a:gd name="adj" fmla="val 50000"/>
             </a:avLst>
           </a:prstGeom>
-          <a:solidFill>
+          <a:solidFill xmlns:a="http://schemas.openxmlformats.org/drawingml/2006/main">
             <a:srgbClr val="FCFCFB"/>
           </a:solidFill>
-          <a:ln w="6350">
+          <a:ln xmlns:a="http://schemas.openxmlformats.org/drawingml/2006/main" w="6350">
             <a:solidFill>
               <a:srgbClr val="C0BFB5"/>
             </a:solidFill>
@@ -22519,52 +22761,60 @@
           </a:ln>
         </p:spPr>
         <p:txBody>
-          <a:bodyPr wrap="none" lIns="0" tIns="0" rIns="0" bIns="0" rtlCol="0" anchor="ctr">
-            <a:normAutofit/>
-          </a:bodyPr>
-          <a:lstStyle/>
-          <a:p>
-            <a:pPr algn="ctr" indent="0" marL="0">
+          <a:bodyPr xmlns:a="http://schemas.openxmlformats.org/drawingml/2006/main" wrap="none" lIns="0" tIns="0" rIns="0" bIns="0" anchor="ctr">
+            <a:normAutofit/>
+          </a:bodyPr>
+          <a:lstStyle xmlns:a="http://schemas.openxmlformats.org/drawingml/2006/main"/>
+          <a:p xmlns:a="http://schemas.openxmlformats.org/drawingml/2006/main">
+            <a:pPr marL="0" indent="0" algn="ctr">
               <a:lnSpc>
                 <a:spcPts val="1680"/>
               </a:lnSpc>
               <a:buNone/>
             </a:pPr>
             <a:r>
-              <a:rPr lang="en-US" sz="1200" dirty="0">
+              <a:rPr sz="1200">
                 <a:solidFill>
                   <a:srgbClr val="13202D"/>
                 </a:solidFill>
-                <a:latin typeface="IBM Plex Sans" pitchFamily="34" charset="0"/>
-                <a:ea typeface="IBM Plex Sans" pitchFamily="34" charset="-122"/>
-                <a:cs typeface="IBM Plex Sans" pitchFamily="34" charset="-120"/>
+                <a:latin typeface="IBM Plex Sans"/>
+                <a:ea typeface="IBM Plex Sans"/>
+                <a:cs typeface="IBM Plex Sans"/>
               </a:rPr>
               <a:t>Hook и политика</a:t>
             </a:r>
-            <a:endParaRPr lang="en-US" sz="1200" dirty="0"/>
-          </a:p>
-        </p:txBody>
-      </p:sp>
-      <p:sp>
-        <p:nvSpPr>
-          <p:cNvPr id="9" name="Text 7"/>
-          <p:cNvSpPr/>
-          <p:nvPr/>
-        </p:nvSpPr>
-        <p:spPr>
-          <a:xfrm>
+            <a:endParaRPr sz="1200"/>
+          </a:p>
+        </p:txBody>
+      </p:sp>
+      <p:sp>
+        <p:nvSpPr>
+          <p:cNvPr id="9" name="Text 7">
+            <a:extLst xmlns:a="http://schemas.openxmlformats.org/drawingml/2006/main">
+              <a:ext uri="{FF2B5EF4-FFF2-40B4-BE49-F238E27FC236}">
+                <a16:creationId xmlns:a16="http://schemas.microsoft.com/office/drawing/2014/main" id="{5BB0710A-DEFD-4991-BA15-50E1A7664445}"/>
+              </a:ext>
+            </a:extLst>
+          </p:cNvPr>
+          <p:cNvSpPr>
+            <a:spLocks xmlns:a="http://schemas.openxmlformats.org/drawingml/2006/main" noGrp="1"/>
+          </p:cNvSpPr>
+          <p:nvPr/>
+        </p:nvSpPr>
+        <p:spPr>
+          <a:xfrm xmlns:a="http://schemas.openxmlformats.org/drawingml/2006/main">
             <a:off x="8639076" y="3787080"/>
             <a:ext cx="1267718" cy="321270"/>
           </a:xfrm>
-          <a:prstGeom prst="roundRect">
+          <a:prstGeom xmlns:a="http://schemas.openxmlformats.org/drawingml/2006/main" prst="roundRect">
             <a:avLst>
               <a:gd name="adj" fmla="val 50000"/>
             </a:avLst>
           </a:prstGeom>
-          <a:solidFill>
+          <a:solidFill xmlns:a="http://schemas.openxmlformats.org/drawingml/2006/main">
             <a:srgbClr val="FCFCFB"/>
           </a:solidFill>
-          <a:ln w="6350">
+          <a:ln xmlns:a="http://schemas.openxmlformats.org/drawingml/2006/main" w="6350">
             <a:solidFill>
               <a:srgbClr val="C0BFB5"/>
             </a:solidFill>
@@ -22572,52 +22822,60 @@
           </a:ln>
         </p:spPr>
         <p:txBody>
-          <a:bodyPr wrap="none" lIns="0" tIns="0" rIns="0" bIns="0" rtlCol="0" anchor="ctr">
-            <a:normAutofit/>
-          </a:bodyPr>
-          <a:lstStyle/>
-          <a:p>
-            <a:pPr algn="ctr" indent="0" marL="0">
+          <a:bodyPr xmlns:a="http://schemas.openxmlformats.org/drawingml/2006/main" wrap="none" lIns="0" tIns="0" rIns="0" bIns="0" anchor="ctr">
+            <a:normAutofit/>
+          </a:bodyPr>
+          <a:lstStyle xmlns:a="http://schemas.openxmlformats.org/drawingml/2006/main"/>
+          <a:p xmlns:a="http://schemas.openxmlformats.org/drawingml/2006/main">
+            <a:pPr marL="0" indent="0" algn="ctr">
               <a:lnSpc>
                 <a:spcPts val="1680"/>
               </a:lnSpc>
               <a:buNone/>
             </a:pPr>
             <a:r>
-              <a:rPr lang="en-US" sz="1200" dirty="0">
+              <a:rPr sz="1200">
                 <a:solidFill>
                   <a:srgbClr val="13202D"/>
                 </a:solidFill>
-                <a:latin typeface="IBM Plex Sans" pitchFamily="34" charset="0"/>
-                <a:ea typeface="IBM Plex Sans" pitchFamily="34" charset="-122"/>
-                <a:cs typeface="IBM Plex Sans" pitchFamily="34" charset="-120"/>
+                <a:latin typeface="IBM Plex Sans"/>
+                <a:ea typeface="IBM Plex Sans"/>
+                <a:cs typeface="IBM Plex Sans"/>
               </a:rPr>
               <a:t>Eval сценарио</a:t>
             </a:r>
-            <a:endParaRPr lang="en-US" sz="1200" dirty="0"/>
-          </a:p>
-        </p:txBody>
-      </p:sp>
-      <p:sp>
-        <p:nvSpPr>
-          <p:cNvPr id="10" name="Text 8"/>
-          <p:cNvSpPr/>
-          <p:nvPr/>
-        </p:nvSpPr>
-        <p:spPr>
-          <a:xfrm>
+            <a:endParaRPr sz="1200"/>
+          </a:p>
+        </p:txBody>
+      </p:sp>
+      <p:sp>
+        <p:nvSpPr>
+          <p:cNvPr id="10" name="Text 8">
+            <a:extLst xmlns:a="http://schemas.openxmlformats.org/drawingml/2006/main">
+              <a:ext uri="{FF2B5EF4-FFF2-40B4-BE49-F238E27FC236}">
+                <a16:creationId xmlns:a16="http://schemas.microsoft.com/office/drawing/2014/main" id="{A809C4B7-5621-4567-BD97-D21B02D9DCB7}"/>
+              </a:ext>
+            </a:extLst>
+          </p:cNvPr>
+          <p:cNvSpPr>
+            <a:spLocks xmlns:a="http://schemas.openxmlformats.org/drawingml/2006/main" noGrp="1"/>
+          </p:cNvSpPr>
+          <p:nvPr/>
+        </p:nvSpPr>
+        <p:spPr>
+          <a:xfrm xmlns:a="http://schemas.openxmlformats.org/drawingml/2006/main">
             <a:off x="4270375" y="4190901"/>
             <a:ext cx="1685627" cy="321270"/>
           </a:xfrm>
-          <a:prstGeom prst="roundRect">
+          <a:prstGeom xmlns:a="http://schemas.openxmlformats.org/drawingml/2006/main" prst="roundRect">
             <a:avLst>
               <a:gd name="adj" fmla="val 50000"/>
             </a:avLst>
           </a:prstGeom>
-          <a:solidFill>
+          <a:solidFill xmlns:a="http://schemas.openxmlformats.org/drawingml/2006/main">
             <a:srgbClr val="FCFCFB"/>
           </a:solidFill>
-          <a:ln w="6350">
+          <a:ln xmlns:a="http://schemas.openxmlformats.org/drawingml/2006/main" w="6350">
             <a:solidFill>
               <a:srgbClr val="C0BFB5"/>
             </a:solidFill>
@@ -22625,48 +22883,67 @@
           </a:ln>
         </p:spPr>
         <p:txBody>
-          <a:bodyPr wrap="none" lIns="0" tIns="0" rIns="0" bIns="0" rtlCol="0" anchor="ctr">
-            <a:normAutofit/>
-          </a:bodyPr>
-          <a:lstStyle/>
-          <a:p>
-            <a:pPr algn="ctr" indent="0" marL="0">
+          <a:bodyPr xmlns:a="http://schemas.openxmlformats.org/drawingml/2006/main" wrap="none" lIns="0" tIns="0" rIns="0" bIns="0" anchor="ctr">
+            <a:normAutofit fontScale="100000"/>
+          </a:bodyPr>
+          <a:lstStyle xmlns:a="http://schemas.openxmlformats.org/drawingml/2006/main"/>
+          <a:p xmlns:a="http://schemas.openxmlformats.org/drawingml/2006/main">
+            <a:pPr marL="0" indent="0" algn="ctr">
               <a:lnSpc>
                 <a:spcPts val="1680"/>
               </a:lnSpc>
               <a:buNone/>
             </a:pPr>
             <a:r>
-              <a:rPr lang="en-US" sz="1200" dirty="0">
+              <a:rPr sz="1200">
                 <a:solidFill>
                   <a:srgbClr val="13202D"/>
                 </a:solidFill>
-                <a:latin typeface="IBM Plex Sans" pitchFamily="34" charset="0"/>
-                <a:ea typeface="IBM Plex Sans" pitchFamily="34" charset="-122"/>
-                <a:cs typeface="IBM Plex Sans" pitchFamily="34" charset="-120"/>
-              </a:rPr>
-              <a:t>Контролна тачка P4</a:t>
-            </a:r>
-            <a:endParaRPr lang="en-US" sz="1200" dirty="0"/>
-          </a:p>
-        </p:txBody>
-      </p:sp>
-      <p:sp>
-        <p:nvSpPr>
-          <p:cNvPr id="11" name="Shape 9"/>
-          <p:cNvSpPr/>
-          <p:nvPr/>
-        </p:nvSpPr>
-        <p:spPr>
-          <a:xfrm>
+                <a:latin typeface="IBM Plex Sans"/>
+                <a:ea typeface="IBM Plex Sans"/>
+                <a:cs typeface="IBM Plex Sans"/>
+              </a:rPr>
+              <a:t>Контролна тачка </a:t>
+            </a:r>
+            <a:r>
+              <a:rPr sz="1200">
+                <a:solidFill>
+                  <a:srgbClr val="13202D"/>
+                </a:solidFill>
+                <a:latin typeface="IBM Plex Sans"/>
+                <a:ea typeface="IBM Plex Sans"/>
+                <a:cs typeface="IBM Plex Sans"/>
+              </a:rPr>
+              <a:t>КТ2</a:t>
+            </a:r>
+            <a:endParaRPr sz="1200"/>
+          </a:p>
+        </p:txBody>
+      </p:sp>
+      <p:sp>
+        <p:nvSpPr>
+          <p:cNvPr id="11" name="Shape 9">
+            <a:extLst xmlns:a="http://schemas.openxmlformats.org/drawingml/2006/main">
+              <a:ext uri="{FF2B5EF4-FFF2-40B4-BE49-F238E27FC236}">
+                <a16:creationId xmlns:a16="http://schemas.microsoft.com/office/drawing/2014/main" id="{3FCFFE7F-5A03-4CBE-83EE-12DD2CDBE2EC}"/>
+              </a:ext>
+            </a:extLst>
+          </p:cNvPr>
+          <p:cNvSpPr>
+            <a:spLocks xmlns:a="http://schemas.openxmlformats.org/drawingml/2006/main" noGrp="1"/>
+          </p:cNvSpPr>
+          <p:nvPr/>
+        </p:nvSpPr>
+        <p:spPr>
+          <a:xfrm xmlns:a="http://schemas.openxmlformats.org/drawingml/2006/main">
             <a:off x="812800" y="6209705"/>
             <a:ext cx="10566400" cy="0"/>
           </a:xfrm>
-          <a:prstGeom prst="line">
-            <a:avLst/>
-          </a:prstGeom>
-          <a:noFill/>
-          <a:ln w="6350">
+          <a:prstGeom xmlns:a="http://schemas.openxmlformats.org/drawingml/2006/main" prst="line">
+            <a:avLst/>
+          </a:prstGeom>
+          <a:noFill xmlns:a="http://schemas.openxmlformats.org/drawingml/2006/main"/>
+          <a:ln xmlns:a="http://schemas.openxmlformats.org/drawingml/2006/main" w="6350">
             <a:solidFill>
               <a:srgbClr val="C0BFB5"/>
             </a:solidFill>
@@ -22676,106 +22953,122 @@
       </p:sp>
       <p:sp>
         <p:nvSpPr>
-          <p:cNvPr id="12" name="Text 10"/>
-          <p:cNvSpPr/>
-          <p:nvPr/>
-        </p:nvSpPr>
-        <p:spPr>
-          <a:xfrm>
+          <p:cNvPr id="12" name="Text 10">
+            <a:extLst xmlns:a="http://schemas.openxmlformats.org/drawingml/2006/main">
+              <a:ext uri="{FF2B5EF4-FFF2-40B4-BE49-F238E27FC236}">
+                <a16:creationId xmlns:a16="http://schemas.microsoft.com/office/drawing/2014/main" id="{D89877A7-95CC-49CA-96DE-BF5AC8D7DC8F}"/>
+              </a:ext>
+            </a:extLst>
+          </p:cNvPr>
+          <p:cNvSpPr>
+            <a:spLocks xmlns:a="http://schemas.openxmlformats.org/drawingml/2006/main" noGrp="1"/>
+          </p:cNvSpPr>
+          <p:nvPr/>
+        </p:nvSpPr>
+        <p:spPr>
+          <a:xfrm xmlns:a="http://schemas.openxmlformats.org/drawingml/2006/main">
             <a:off x="812800" y="6314480"/>
             <a:ext cx="2390061" cy="238720"/>
           </a:xfrm>
-          <a:prstGeom prst="rect">
-            <a:avLst/>
-          </a:prstGeom>
-          <a:noFill/>
-          <a:ln/>
-        </p:spPr>
-        <p:txBody>
-          <a:bodyPr wrap="square" lIns="0" tIns="0" rIns="0" bIns="0" rtlCol="0" anchor="t">
-            <a:normAutofit/>
-          </a:bodyPr>
-          <a:lstStyle/>
-          <a:p>
-            <a:pPr algn="l" indent="0" marL="0">
+          <a:prstGeom xmlns:a="http://schemas.openxmlformats.org/drawingml/2006/main" prst="rect">
+            <a:avLst/>
+          </a:prstGeom>
+          <a:noFill xmlns:a="http://schemas.openxmlformats.org/drawingml/2006/main"/>
+        </p:spPr>
+        <p:txBody>
+          <a:bodyPr xmlns:a="http://schemas.openxmlformats.org/drawingml/2006/main" wrap="square" lIns="0" tIns="0" rIns="0" bIns="0" anchor="t">
+            <a:normAutofit/>
+          </a:bodyPr>
+          <a:lstStyle xmlns:a="http://schemas.openxmlformats.org/drawingml/2006/main"/>
+          <a:p xmlns:a="http://schemas.openxmlformats.org/drawingml/2006/main">
+            <a:pPr marL="0" indent="0" algn="l">
               <a:lnSpc>
                 <a:spcPts val="1680"/>
               </a:lnSpc>
               <a:buNone/>
             </a:pPr>
             <a:r>
-              <a:rPr lang="en-US" sz="1200" dirty="0">
+              <a:rPr sz="1200">
                 <a:solidFill>
                   <a:srgbClr val="5E6975"/>
                 </a:solidFill>
-                <a:latin typeface="IBM Plex Sans" pitchFamily="34" charset="0"/>
-                <a:ea typeface="IBM Plex Sans" pitchFamily="34" charset="-122"/>
-                <a:cs typeface="IBM Plex Sans" pitchFamily="34" charset="-120"/>
+                <a:latin typeface="IBM Plex Sans"/>
+                <a:ea typeface="IBM Plex Sans"/>
+                <a:cs typeface="IBM Plex Sans"/>
               </a:rPr>
               <a:t>Елементи развоја софтвера</a:t>
             </a:r>
-            <a:endParaRPr lang="en-US" sz="1200" dirty="0"/>
-          </a:p>
-        </p:txBody>
-      </p:sp>
-      <p:sp>
-        <p:nvSpPr>
-          <p:cNvPr id="13" name="Text 11"/>
-          <p:cNvSpPr/>
-          <p:nvPr/>
-        </p:nvSpPr>
-        <p:spPr>
-          <a:xfrm>
+            <a:endParaRPr sz="1200"/>
+          </a:p>
+        </p:txBody>
+      </p:sp>
+      <p:sp>
+        <p:nvSpPr>
+          <p:cNvPr id="13" name="Text 11">
+            <a:extLst xmlns:a="http://schemas.openxmlformats.org/drawingml/2006/main">
+              <a:ext uri="{FF2B5EF4-FFF2-40B4-BE49-F238E27FC236}">
+                <a16:creationId xmlns:a16="http://schemas.microsoft.com/office/drawing/2014/main" id="{907E25B9-E881-4A79-B2E0-36D4140DBBFF}"/>
+              </a:ext>
+            </a:extLst>
+          </p:cNvPr>
+          <p:cNvSpPr>
+            <a:spLocks xmlns:a="http://schemas.openxmlformats.org/drawingml/2006/main" noGrp="1"/>
+          </p:cNvSpPr>
+          <p:nvPr/>
+        </p:nvSpPr>
+        <p:spPr>
+          <a:xfrm xmlns:a="http://schemas.openxmlformats.org/drawingml/2006/main">
             <a:off x="11145441" y="6314480"/>
             <a:ext cx="233759" cy="238720"/>
           </a:xfrm>
-          <a:prstGeom prst="rect">
-            <a:avLst/>
-          </a:prstGeom>
-          <a:noFill/>
-          <a:ln/>
-        </p:spPr>
-        <p:txBody>
-          <a:bodyPr wrap="square" lIns="0" tIns="0" rIns="0" bIns="0" rtlCol="0" anchor="t">
-            <a:normAutofit/>
-          </a:bodyPr>
-          <a:lstStyle/>
-          <a:p>
-            <a:pPr algn="r" indent="0" marL="0">
+          <a:prstGeom xmlns:a="http://schemas.openxmlformats.org/drawingml/2006/main" prst="rect">
+            <a:avLst/>
+          </a:prstGeom>
+          <a:noFill xmlns:a="http://schemas.openxmlformats.org/drawingml/2006/main"/>
+        </p:spPr>
+        <p:txBody>
+          <a:bodyPr xmlns:a="http://schemas.openxmlformats.org/drawingml/2006/main" wrap="square" lIns="0" tIns="0" rIns="0" bIns="0" anchor="t">
+            <a:normAutofit/>
+          </a:bodyPr>
+          <a:lstStyle xmlns:a="http://schemas.openxmlformats.org/drawingml/2006/main"/>
+          <a:p xmlns:a="http://schemas.openxmlformats.org/drawingml/2006/main">
+            <a:pPr marL="0" indent="0" algn="r">
               <a:lnSpc>
                 <a:spcPts val="1680"/>
               </a:lnSpc>
               <a:buNone/>
             </a:pPr>
             <a:r>
-              <a:rPr lang="en-US" sz="1200" dirty="0">
+              <a:rPr sz="1200">
                 <a:solidFill>
                   <a:srgbClr val="5E6975"/>
                 </a:solidFill>
-                <a:latin typeface="IBM Plex Mono" pitchFamily="49" charset="0"/>
-                <a:ea typeface="IBM Plex Mono" pitchFamily="49" charset="-122"/>
-                <a:cs typeface="IBM Plex Mono" pitchFamily="49" charset="-120"/>
+                <a:latin typeface="IBM Plex Mono"/>
+                <a:ea typeface="IBM Plex Mono"/>
+                <a:cs typeface="IBM Plex Mono"/>
               </a:rPr>
               <a:t>23</a:t>
             </a:r>
-            <a:endParaRPr lang="en-US" sz="1200" dirty="0"/>
+            <a:endParaRPr sz="1200"/>
           </a:p>
         </p:txBody>
       </p:sp>
     </p:spTree>
+    <p:extLst>
+      <p:ext uri="{BB962C8B-B14F-4D97-AF65-F5344CB8AC3E}">
+        <p14:creationId xmlns:p14="http://schemas.microsoft.com/office/powerpoint/2010/main" val="32891322"/>
+      </p:ext>
+    </p:extLst>
   </p:cSld>
-  <p:clrMapOvr>
-    <a:masterClrMapping/>
-  </p:clrMapOvr>
 </p:sld>
 </file>
 
 <file path=ppt/slides/slide24.xml><?xml version="1.0" encoding="utf-8"?>
-<p:sld xmlns:a="http://schemas.openxmlformats.org/drawingml/2006/main" xmlns:r="http://schemas.openxmlformats.org/officeDocument/2006/relationships" xmlns:p="http://schemas.openxmlformats.org/presentationml/2006/main">
-  <p:cSld name="Slide 24">
+<p:sld xmlns:p="http://schemas.openxmlformats.org/presentationml/2006/main">
+  <p:cSld>
     <p:bg>
       <p:bgPr>
-        <a:solidFill>
+        <a:solidFill xmlns:a="http://schemas.openxmlformats.org/drawingml/2006/main">
           <a:srgbClr val="F6F7F5"/>
         </a:solidFill>
       </p:bgPr>
@@ -22787,189 +23080,231 @@
         <p:nvPr/>
       </p:nvGrpSpPr>
       <p:grpSpPr>
-        <a:xfrm>
-          <a:off x="0" y="0"/>
-          <a:ext cx="0" cy="0"/>
-          <a:chOff x="0" y="0"/>
-          <a:chExt cx="0" cy="0"/>
-        </a:xfrm>
+        <a:xfrm xmlns:a="http://schemas.openxmlformats.org/drawingml/2006/main"/>
       </p:grpSpPr>
       <p:sp>
         <p:nvSpPr>
-          <p:cNvPr id="2" name="Shape 0"/>
-          <p:cNvSpPr/>
-          <p:nvPr/>
-        </p:nvSpPr>
-        <p:spPr>
-          <a:xfrm>
+          <p:cNvPr id="2" name="Shape 0">
+            <a:extLst xmlns:a="http://schemas.openxmlformats.org/drawingml/2006/main">
+              <a:ext uri="{FF2B5EF4-FFF2-40B4-BE49-F238E27FC236}">
+                <a16:creationId xmlns:a16="http://schemas.microsoft.com/office/drawing/2014/main" id="{515E03A7-FF77-4BAF-BA97-FC04AFA1B460}"/>
+              </a:ext>
+            </a:extLst>
+          </p:cNvPr>
+          <p:cNvSpPr>
+            <a:spLocks xmlns:a="http://schemas.openxmlformats.org/drawingml/2006/main" noGrp="1"/>
+          </p:cNvSpPr>
+          <p:nvPr/>
+        </p:nvSpPr>
+        <p:spPr>
+          <a:xfrm xmlns:a="http://schemas.openxmlformats.org/drawingml/2006/main">
             <a:off x="812800" y="457200"/>
             <a:ext cx="457200" cy="38100"/>
           </a:xfrm>
-          <a:prstGeom prst="roundRect">
+          <a:prstGeom xmlns:a="http://schemas.openxmlformats.org/drawingml/2006/main" prst="roundRect">
             <a:avLst>
               <a:gd name="adj" fmla="val 50000"/>
             </a:avLst>
           </a:prstGeom>
-          <a:solidFill>
+          <a:solidFill xmlns:a="http://schemas.openxmlformats.org/drawingml/2006/main">
             <a:srgbClr val="7D5E00"/>
           </a:solidFill>
-          <a:ln/>
-        </p:spPr>
-      </p:sp>
-      <p:sp>
-        <p:nvSpPr>
-          <p:cNvPr id="3" name="Text 1"/>
-          <p:cNvSpPr/>
-          <p:nvPr/>
-        </p:nvSpPr>
-        <p:spPr>
-          <a:xfrm>
+        </p:spPr>
+      </p:sp>
+      <p:sp>
+        <p:nvSpPr>
+          <p:cNvPr id="3" name="Text 1">
+            <a:extLst xmlns:a="http://schemas.openxmlformats.org/drawingml/2006/main">
+              <a:ext uri="{FF2B5EF4-FFF2-40B4-BE49-F238E27FC236}">
+                <a16:creationId xmlns:a16="http://schemas.microsoft.com/office/drawing/2014/main" id="{C55B1898-54B5-4D80-A754-C871104CE987}"/>
+              </a:ext>
+            </a:extLst>
+          </p:cNvPr>
+          <p:cNvSpPr>
+            <a:spLocks xmlns:a="http://schemas.openxmlformats.org/drawingml/2006/main" noGrp="1"/>
+          </p:cNvSpPr>
+          <p:nvPr/>
+        </p:nvSpPr>
+        <p:spPr>
+          <a:xfrm xmlns:a="http://schemas.openxmlformats.org/drawingml/2006/main">
             <a:off x="812800" y="711200"/>
             <a:ext cx="10883392" cy="238720"/>
           </a:xfrm>
-          <a:prstGeom prst="rect">
-            <a:avLst/>
-          </a:prstGeom>
-          <a:noFill/>
-          <a:ln/>
-        </p:spPr>
-        <p:txBody>
-          <a:bodyPr wrap="square" lIns="0" tIns="0" rIns="0" bIns="0" rtlCol="0" anchor="t">
-            <a:normAutofit/>
-          </a:bodyPr>
-          <a:lstStyle/>
-          <a:p>
-            <a:pPr algn="l" indent="0" marL="0">
+          <a:prstGeom xmlns:a="http://schemas.openxmlformats.org/drawingml/2006/main" prst="rect">
+            <a:avLst/>
+          </a:prstGeom>
+          <a:noFill xmlns:a="http://schemas.openxmlformats.org/drawingml/2006/main"/>
+        </p:spPr>
+        <p:txBody>
+          <a:bodyPr xmlns:a="http://schemas.openxmlformats.org/drawingml/2006/main" wrap="square" lIns="0" tIns="0" rIns="0" bIns="0" anchor="t">
+            <a:normAutofit fontScale="100000"/>
+          </a:bodyPr>
+          <a:lstStyle xmlns:a="http://schemas.openxmlformats.org/drawingml/2006/main"/>
+          <a:p xmlns:a="http://schemas.openxmlformats.org/drawingml/2006/main">
+            <a:pPr marL="0" indent="0" algn="l">
               <a:lnSpc>
                 <a:spcPts val="1680"/>
               </a:lnSpc>
               <a:buNone/>
             </a:pPr>
             <a:r>
-              <a:rPr lang="en-US" sz="1200" spc="100" kern="0" dirty="0">
+              <a:rPr sz="1200" spc="100">
                 <a:solidFill>
                   <a:srgbClr val="7D5E00"/>
                 </a:solidFill>
-                <a:latin typeface="IBM Plex Mono" pitchFamily="49" charset="0"/>
-                <a:ea typeface="IBM Plex Mono" pitchFamily="49" charset="-122"/>
-                <a:cs typeface="IBM Plex Mono" pitchFamily="49" charset="-120"/>
-              </a:rPr>
-              <a:t>04 · ЗАДАТАК И P4</a:t>
-            </a:r>
-            <a:endParaRPr lang="en-US" sz="1200" dirty="0"/>
-          </a:p>
-        </p:txBody>
-      </p:sp>
-      <p:sp>
-        <p:nvSpPr>
-          <p:cNvPr id="4" name="Text 2"/>
-          <p:cNvSpPr/>
+                <a:latin typeface="IBM Plex Mono"/>
+                <a:ea typeface="IBM Plex Mono"/>
+                <a:cs typeface="IBM Plex Mono"/>
+              </a:rPr>
+              <a:t>04 · ЗАДАТАК И </a:t>
+            </a:r>
+            <a:r>
+              <a:rPr sz="1200" spc="100">
+                <a:solidFill>
+                  <a:srgbClr val="7D5E00"/>
+                </a:solidFill>
+                <a:latin typeface="IBM Plex Mono"/>
+                <a:ea typeface="IBM Plex Mono"/>
+                <a:cs typeface="IBM Plex Mono"/>
+              </a:rPr>
+              <a:t>КТ2</a:t>
+            </a:r>
+            <a:endParaRPr sz="1200"/>
+          </a:p>
+        </p:txBody>
+      </p:sp>
+      <p:sp>
+        <p:nvSpPr>
+          <p:cNvPr id="4" name="Text 2">
+            <a:extLst xmlns:a="http://schemas.openxmlformats.org/drawingml/2006/main">
+              <a:ext uri="{FF2B5EF4-FFF2-40B4-BE49-F238E27FC236}">
+                <a16:creationId xmlns:a16="http://schemas.microsoft.com/office/drawing/2014/main" id="{C597BA74-76F5-47EB-859A-FB44950894B6}"/>
+              </a:ext>
+            </a:extLst>
+          </p:cNvPr>
+          <p:cNvSpPr>
+            <a:spLocks xmlns:a="http://schemas.openxmlformats.org/drawingml/2006/main" noGrp="1"/>
+          </p:cNvSpPr>
           <p:nvPr>
-            <p:ph type="title"/>
+            <p:ph type="title" idx="0"/>
           </p:nvPr>
         </p:nvSpPr>
         <p:spPr>
-          <a:xfrm>
+          <a:xfrm xmlns:a="http://schemas.openxmlformats.org/drawingml/2006/main">
             <a:off x="812800" y="1000720"/>
             <a:ext cx="10883392" cy="444500"/>
           </a:xfrm>
-          <a:prstGeom prst="rect">
-            <a:avLst/>
-          </a:prstGeom>
-          <a:noFill/>
-          <a:ln/>
-        </p:spPr>
-        <p:txBody>
-          <a:bodyPr wrap="square" lIns="0" tIns="0" rIns="0" bIns="0" rtlCol="0" anchor="t">
-            <a:normAutofit/>
-          </a:bodyPr>
-          <a:lstStyle/>
-          <a:p>
-            <a:pPr algn="l" indent="0" marL="0">
+          <a:prstGeom xmlns:a="http://schemas.openxmlformats.org/drawingml/2006/main" prst="rect">
+            <a:avLst/>
+          </a:prstGeom>
+          <a:noFill xmlns:a="http://schemas.openxmlformats.org/drawingml/2006/main"/>
+        </p:spPr>
+        <p:txBody>
+          <a:bodyPr xmlns:a="http://schemas.openxmlformats.org/drawingml/2006/main" wrap="square" lIns="0" tIns="0" rIns="0" bIns="0" anchor="t">
+            <a:normAutofit/>
+          </a:bodyPr>
+          <a:lstStyle xmlns:a="http://schemas.openxmlformats.org/drawingml/2006/main"/>
+          <a:p xmlns:a="http://schemas.openxmlformats.org/drawingml/2006/main">
+            <a:pPr marL="0" indent="0" algn="l">
               <a:lnSpc>
                 <a:spcPts val="3300"/>
               </a:lnSpc>
               <a:buNone/>
             </a:pPr>
             <a:r>
-              <a:rPr lang="en-US" sz="3000" b="1" i="0" spc="-50" kern="0" dirty="0">
+              <a:rPr sz="3000" b="1" i="0" spc="-50">
                 <a:solidFill>
                   <a:srgbClr val="13202D"/>
                 </a:solidFill>
-                <a:latin typeface="IBM Plex Sans" pitchFamily="34" charset="0"/>
-                <a:ea typeface="IBM Plex Sans" pitchFamily="34" charset="-122"/>
-                <a:cs typeface="IBM Plex Sans" pitchFamily="34" charset="-120"/>
+                <a:latin typeface="IBM Plex Sans"/>
+                <a:ea typeface="IBM Plex Sans"/>
+                <a:cs typeface="IBM Plex Sans"/>
               </a:rPr>
               <a:t>Задатак на вежби</a:t>
             </a:r>
-            <a:endParaRPr lang="en-US" sz="3000" dirty="0"/>
-          </a:p>
-        </p:txBody>
-      </p:sp>
-      <p:sp>
-        <p:nvSpPr>
-          <p:cNvPr id="5" name="Text 3"/>
-          <p:cNvSpPr/>
-          <p:nvPr/>
-        </p:nvSpPr>
-        <p:spPr>
-          <a:xfrm>
+            <a:endParaRPr sz="3000"/>
+          </a:p>
+        </p:txBody>
+      </p:sp>
+      <p:sp>
+        <p:nvSpPr>
+          <p:cNvPr id="5" name="Text 3">
+            <a:extLst xmlns:a="http://schemas.openxmlformats.org/drawingml/2006/main">
+              <a:ext uri="{FF2B5EF4-FFF2-40B4-BE49-F238E27FC236}">
+                <a16:creationId xmlns:a16="http://schemas.microsoft.com/office/drawing/2014/main" id="{4C999D29-6115-4532-BF08-CBECC5130352}"/>
+              </a:ext>
+            </a:extLst>
+          </p:cNvPr>
+          <p:cNvSpPr>
+            <a:spLocks xmlns:a="http://schemas.openxmlformats.org/drawingml/2006/main" noGrp="1"/>
+          </p:cNvSpPr>
+          <p:nvPr/>
+        </p:nvSpPr>
+        <p:spPr>
+          <a:xfrm xmlns:a="http://schemas.openxmlformats.org/drawingml/2006/main">
             <a:off x="812800" y="1648420"/>
             <a:ext cx="10883392" cy="274241"/>
           </a:xfrm>
-          <a:prstGeom prst="rect">
-            <a:avLst/>
-          </a:prstGeom>
-          <a:noFill/>
-          <a:ln/>
-        </p:spPr>
-        <p:txBody>
-          <a:bodyPr wrap="square" lIns="0" tIns="0" rIns="0" bIns="0" rtlCol="0" anchor="t">
-            <a:normAutofit/>
-          </a:bodyPr>
-          <a:lstStyle/>
-          <a:p>
-            <a:pPr algn="l" indent="0" marL="0">
+          <a:prstGeom xmlns:a="http://schemas.openxmlformats.org/drawingml/2006/main" prst="rect">
+            <a:avLst/>
+          </a:prstGeom>
+          <a:noFill xmlns:a="http://schemas.openxmlformats.org/drawingml/2006/main"/>
+        </p:spPr>
+        <p:txBody>
+          <a:bodyPr xmlns:a="http://schemas.openxmlformats.org/drawingml/2006/main" wrap="square" lIns="0" tIns="0" rIns="0" bIns="0" anchor="t">
+            <a:normAutofit/>
+          </a:bodyPr>
+          <a:lstStyle xmlns:a="http://schemas.openxmlformats.org/drawingml/2006/main"/>
+          <a:p xmlns:a="http://schemas.openxmlformats.org/drawingml/2006/main">
+            <a:pPr marL="0" indent="0" algn="l">
               <a:lnSpc>
                 <a:spcPts val="1960"/>
               </a:lnSpc>
               <a:buNone/>
             </a:pPr>
             <a:r>
-              <a:rPr lang="en-US" sz="1400" dirty="0">
+              <a:rPr sz="1400">
                 <a:solidFill>
                   <a:srgbClr val="44505D"/>
                 </a:solidFill>
-                <a:latin typeface="IBM Plex Sans" pitchFamily="34" charset="0"/>
-                <a:ea typeface="IBM Plex Sans" pitchFamily="34" charset="-122"/>
-                <a:cs typeface="IBM Plex Sans" pitchFamily="34" charset="-120"/>
+                <a:latin typeface="IBM Plex Sans"/>
+                <a:ea typeface="IBM Plex Sans"/>
+                <a:cs typeface="IBM Plex Sans"/>
               </a:rPr>
               <a:t>Једно правило из инструкција претвара се у извршиву и тестирану guardrail политику.</a:t>
             </a:r>
-            <a:endParaRPr lang="en-US" sz="1400" dirty="0"/>
-          </a:p>
-        </p:txBody>
-      </p:sp>
-      <p:sp>
-        <p:nvSpPr>
-          <p:cNvPr id="6" name="Shape 4"/>
-          <p:cNvSpPr/>
-          <p:nvPr/>
-        </p:nvSpPr>
-        <p:spPr>
-          <a:xfrm>
+            <a:endParaRPr sz="1400"/>
+          </a:p>
+        </p:txBody>
+      </p:sp>
+      <p:sp>
+        <p:nvSpPr>
+          <p:cNvPr id="6" name="Shape 4">
+            <a:extLst xmlns:a="http://schemas.openxmlformats.org/drawingml/2006/main">
+              <a:ext uri="{FF2B5EF4-FFF2-40B4-BE49-F238E27FC236}">
+                <a16:creationId xmlns:a16="http://schemas.microsoft.com/office/drawing/2014/main" id="{D4A9D3E8-0B83-4635-B9F8-B3840A70C97B}"/>
+              </a:ext>
+            </a:extLst>
+          </p:cNvPr>
+          <p:cNvSpPr>
+            <a:spLocks xmlns:a="http://schemas.openxmlformats.org/drawingml/2006/main" noGrp="1"/>
+          </p:cNvSpPr>
+          <p:nvPr/>
+        </p:nvSpPr>
+        <p:spPr>
+          <a:xfrm xmlns:a="http://schemas.openxmlformats.org/drawingml/2006/main">
             <a:off x="815975" y="2129036"/>
             <a:ext cx="10560050" cy="3054350"/>
           </a:xfrm>
-          <a:prstGeom prst="roundRect">
+          <a:prstGeom xmlns:a="http://schemas.openxmlformats.org/drawingml/2006/main" prst="roundRect">
             <a:avLst>
               <a:gd name="adj" fmla="val 3222"/>
             </a:avLst>
           </a:prstGeom>
-          <a:solidFill>
+          <a:solidFill xmlns:a="http://schemas.openxmlformats.org/drawingml/2006/main">
             <a:srgbClr val="FCFCFB"/>
           </a:solidFill>
-          <a:ln w="6350">
+          <a:ln xmlns:a="http://schemas.openxmlformats.org/drawingml/2006/main" w="6350">
             <a:solidFill>
               <a:srgbClr val="D3DAE1"/>
             </a:solidFill>
@@ -22979,108 +23314,130 @@
       </p:sp>
       <p:sp>
         <p:nvSpPr>
-          <p:cNvPr id="7" name="Text 5"/>
-          <p:cNvSpPr/>
-          <p:nvPr/>
-        </p:nvSpPr>
-        <p:spPr>
-          <a:xfrm>
+          <p:cNvPr id="7" name="Text 5">
+            <a:extLst xmlns:a="http://schemas.openxmlformats.org/drawingml/2006/main">
+              <a:ext uri="{FF2B5EF4-FFF2-40B4-BE49-F238E27FC236}">
+                <a16:creationId xmlns:a16="http://schemas.microsoft.com/office/drawing/2014/main" id="{EAF044F8-E39B-4A25-96CF-278B197E2C8F}"/>
+              </a:ext>
+            </a:extLst>
+          </p:cNvPr>
+          <p:cNvSpPr>
+            <a:spLocks xmlns:a="http://schemas.openxmlformats.org/drawingml/2006/main" noGrp="1"/>
+          </p:cNvSpPr>
+          <p:nvPr/>
+        </p:nvSpPr>
+        <p:spPr>
+          <a:xfrm xmlns:a="http://schemas.openxmlformats.org/drawingml/2006/main">
             <a:off x="1047750" y="2297311"/>
             <a:ext cx="508000" cy="381000"/>
           </a:xfrm>
-          <a:prstGeom prst="rect">
-            <a:avLst/>
-          </a:prstGeom>
-          <a:noFill/>
-          <a:ln/>
-        </p:spPr>
-        <p:txBody>
-          <a:bodyPr wrap="square" lIns="0" tIns="0" rIns="0" bIns="0" rtlCol="0" anchor="t">
-            <a:normAutofit/>
-          </a:bodyPr>
-          <a:lstStyle/>
-          <a:p>
-            <a:pPr algn="l" indent="0" marL="0">
+          <a:prstGeom xmlns:a="http://schemas.openxmlformats.org/drawingml/2006/main" prst="rect">
+            <a:avLst/>
+          </a:prstGeom>
+          <a:noFill xmlns:a="http://schemas.openxmlformats.org/drawingml/2006/main"/>
+        </p:spPr>
+        <p:txBody>
+          <a:bodyPr xmlns:a="http://schemas.openxmlformats.org/drawingml/2006/main" wrap="square" lIns="0" tIns="0" rIns="0" bIns="0" anchor="t">
+            <a:normAutofit/>
+          </a:bodyPr>
+          <a:lstStyle xmlns:a="http://schemas.openxmlformats.org/drawingml/2006/main"/>
+          <a:p xmlns:a="http://schemas.openxmlformats.org/drawingml/2006/main">
+            <a:pPr marL="0" indent="0" algn="l">
               <a:lnSpc>
                 <a:spcPts val="2800"/>
               </a:lnSpc>
               <a:buNone/>
             </a:pPr>
             <a:r>
-              <a:rPr lang="en-US" sz="2000" dirty="0">
+              <a:rPr sz="2000">
                 <a:solidFill>
                   <a:srgbClr val="7D5E00"/>
                 </a:solidFill>
-                <a:latin typeface="IBM Plex Mono" pitchFamily="49" charset="0"/>
-                <a:ea typeface="IBM Plex Mono" pitchFamily="49" charset="-122"/>
-                <a:cs typeface="IBM Plex Mono" pitchFamily="49" charset="-120"/>
+                <a:latin typeface="IBM Plex Mono"/>
+                <a:ea typeface="IBM Plex Mono"/>
+                <a:cs typeface="IBM Plex Mono"/>
               </a:rPr>
               <a:t>01</a:t>
             </a:r>
-            <a:endParaRPr lang="en-US" sz="2000" dirty="0"/>
-          </a:p>
-        </p:txBody>
-      </p:sp>
-      <p:sp>
-        <p:nvSpPr>
-          <p:cNvPr id="8" name="Text 6"/>
-          <p:cNvSpPr/>
-          <p:nvPr/>
-        </p:nvSpPr>
-        <p:spPr>
-          <a:xfrm>
+            <a:endParaRPr sz="2000"/>
+          </a:p>
+        </p:txBody>
+      </p:sp>
+      <p:sp>
+        <p:nvSpPr>
+          <p:cNvPr id="8" name="Text 6">
+            <a:extLst xmlns:a="http://schemas.openxmlformats.org/drawingml/2006/main">
+              <a:ext uri="{FF2B5EF4-FFF2-40B4-BE49-F238E27FC236}">
+                <a16:creationId xmlns:a16="http://schemas.microsoft.com/office/drawing/2014/main" id="{85A3F65D-A968-4B19-B692-03FEBB09EEE1}"/>
+              </a:ext>
+            </a:extLst>
+          </p:cNvPr>
+          <p:cNvSpPr>
+            <a:spLocks xmlns:a="http://schemas.openxmlformats.org/drawingml/2006/main" noGrp="1"/>
+          </p:cNvSpPr>
+          <p:nvPr/>
+        </p:nvSpPr>
+        <p:spPr>
+          <a:xfrm xmlns:a="http://schemas.openxmlformats.org/drawingml/2006/main">
             <a:off x="1708150" y="2350691"/>
             <a:ext cx="9719183" cy="274241"/>
           </a:xfrm>
-          <a:prstGeom prst="rect">
-            <a:avLst/>
-          </a:prstGeom>
-          <a:noFill/>
-          <a:ln/>
-        </p:spPr>
-        <p:txBody>
-          <a:bodyPr wrap="square" lIns="0" tIns="0" rIns="0" bIns="0" rtlCol="0" anchor="t">
-            <a:normAutofit/>
-          </a:bodyPr>
-          <a:lstStyle/>
-          <a:p>
-            <a:pPr algn="l" indent="0" marL="0">
+          <a:prstGeom xmlns:a="http://schemas.openxmlformats.org/drawingml/2006/main" prst="rect">
+            <a:avLst/>
+          </a:prstGeom>
+          <a:noFill xmlns:a="http://schemas.openxmlformats.org/drawingml/2006/main"/>
+        </p:spPr>
+        <p:txBody>
+          <a:bodyPr xmlns:a="http://schemas.openxmlformats.org/drawingml/2006/main" wrap="square" lIns="0" tIns="0" rIns="0" bIns="0" anchor="t">
+            <a:normAutofit/>
+          </a:bodyPr>
+          <a:lstStyle xmlns:a="http://schemas.openxmlformats.org/drawingml/2006/main"/>
+          <a:p xmlns:a="http://schemas.openxmlformats.org/drawingml/2006/main">
+            <a:pPr marL="0" indent="0" algn="l">
               <a:lnSpc>
                 <a:spcPts val="1960"/>
               </a:lnSpc>
               <a:buNone/>
             </a:pPr>
             <a:r>
-              <a:rPr lang="en-US" sz="1400" dirty="0">
+              <a:rPr sz="1400">
                 <a:solidFill>
                   <a:srgbClr val="13202D"/>
                 </a:solidFill>
-                <a:latin typeface="IBM Plex Sans" pitchFamily="34" charset="0"/>
-                <a:ea typeface="IBM Plex Sans" pitchFamily="34" charset="-122"/>
-                <a:cs typeface="IBM Plex Sans" pitchFamily="34" charset="-120"/>
+                <a:latin typeface="IBM Plex Sans"/>
+                <a:ea typeface="IBM Plex Sans"/>
+                <a:cs typeface="IBM Plex Sans"/>
               </a:rPr>
               <a:t>Покренути guardrail тестове.</a:t>
             </a:r>
-            <a:endParaRPr lang="en-US" sz="1400" dirty="0"/>
-          </a:p>
-        </p:txBody>
-      </p:sp>
-      <p:sp>
-        <p:nvSpPr>
-          <p:cNvPr id="9" name="Shape 7"/>
-          <p:cNvSpPr/>
-          <p:nvPr/>
-        </p:nvSpPr>
-        <p:spPr>
-          <a:xfrm>
+            <a:endParaRPr sz="1400"/>
+          </a:p>
+        </p:txBody>
+      </p:sp>
+      <p:sp>
+        <p:nvSpPr>
+          <p:cNvPr id="9" name="Shape 7">
+            <a:extLst xmlns:a="http://schemas.openxmlformats.org/drawingml/2006/main">
+              <a:ext uri="{FF2B5EF4-FFF2-40B4-BE49-F238E27FC236}">
+                <a16:creationId xmlns:a16="http://schemas.microsoft.com/office/drawing/2014/main" id="{D0D1B796-33AF-4B1E-BD70-52C6CBA78EAF}"/>
+              </a:ext>
+            </a:extLst>
+          </p:cNvPr>
+          <p:cNvSpPr>
+            <a:spLocks xmlns:a="http://schemas.openxmlformats.org/drawingml/2006/main" noGrp="1"/>
+          </p:cNvSpPr>
+          <p:nvPr/>
+        </p:nvSpPr>
+        <p:spPr>
+          <a:xfrm xmlns:a="http://schemas.openxmlformats.org/drawingml/2006/main">
             <a:off x="1047750" y="2770386"/>
             <a:ext cx="10096500" cy="0"/>
           </a:xfrm>
-          <a:prstGeom prst="line">
-            <a:avLst/>
-          </a:prstGeom>
-          <a:noFill/>
-          <a:ln w="6350">
+          <a:prstGeom xmlns:a="http://schemas.openxmlformats.org/drawingml/2006/main" prst="line">
+            <a:avLst/>
+          </a:prstGeom>
+          <a:noFill xmlns:a="http://schemas.openxmlformats.org/drawingml/2006/main"/>
+          <a:ln xmlns:a="http://schemas.openxmlformats.org/drawingml/2006/main" w="6350">
             <a:solidFill>
               <a:srgbClr val="E3E8EE"/>
             </a:solidFill>
@@ -23090,108 +23447,130 @@
       </p:sp>
       <p:sp>
         <p:nvSpPr>
-          <p:cNvPr id="10" name="Text 8"/>
-          <p:cNvSpPr/>
-          <p:nvPr/>
-        </p:nvSpPr>
-        <p:spPr>
-          <a:xfrm>
+          <p:cNvPr id="10" name="Text 8">
+            <a:extLst xmlns:a="http://schemas.openxmlformats.org/drawingml/2006/main">
+              <a:ext uri="{FF2B5EF4-FFF2-40B4-BE49-F238E27FC236}">
+                <a16:creationId xmlns:a16="http://schemas.microsoft.com/office/drawing/2014/main" id="{67741FB8-1D60-4C47-A095-2E2F4D07327E}"/>
+              </a:ext>
+            </a:extLst>
+          </p:cNvPr>
+          <p:cNvSpPr>
+            <a:spLocks xmlns:a="http://schemas.openxmlformats.org/drawingml/2006/main" noGrp="1"/>
+          </p:cNvSpPr>
+          <p:nvPr/>
+        </p:nvSpPr>
+        <p:spPr>
+          <a:xfrm xmlns:a="http://schemas.openxmlformats.org/drawingml/2006/main">
             <a:off x="1047750" y="2887861"/>
             <a:ext cx="508000" cy="381000"/>
           </a:xfrm>
-          <a:prstGeom prst="rect">
-            <a:avLst/>
-          </a:prstGeom>
-          <a:noFill/>
-          <a:ln/>
-        </p:spPr>
-        <p:txBody>
-          <a:bodyPr wrap="square" lIns="0" tIns="0" rIns="0" bIns="0" rtlCol="0" anchor="t">
-            <a:normAutofit/>
-          </a:bodyPr>
-          <a:lstStyle/>
-          <a:p>
-            <a:pPr algn="l" indent="0" marL="0">
+          <a:prstGeom xmlns:a="http://schemas.openxmlformats.org/drawingml/2006/main" prst="rect">
+            <a:avLst/>
+          </a:prstGeom>
+          <a:noFill xmlns:a="http://schemas.openxmlformats.org/drawingml/2006/main"/>
+        </p:spPr>
+        <p:txBody>
+          <a:bodyPr xmlns:a="http://schemas.openxmlformats.org/drawingml/2006/main" wrap="square" lIns="0" tIns="0" rIns="0" bIns="0" anchor="t">
+            <a:normAutofit/>
+          </a:bodyPr>
+          <a:lstStyle xmlns:a="http://schemas.openxmlformats.org/drawingml/2006/main"/>
+          <a:p xmlns:a="http://schemas.openxmlformats.org/drawingml/2006/main">
+            <a:pPr marL="0" indent="0" algn="l">
               <a:lnSpc>
                 <a:spcPts val="2800"/>
               </a:lnSpc>
               <a:buNone/>
             </a:pPr>
             <a:r>
-              <a:rPr lang="en-US" sz="2000" dirty="0">
+              <a:rPr sz="2000">
                 <a:solidFill>
                   <a:srgbClr val="7D5E00"/>
                 </a:solidFill>
-                <a:latin typeface="IBM Plex Mono" pitchFamily="49" charset="0"/>
-                <a:ea typeface="IBM Plex Mono" pitchFamily="49" charset="-122"/>
-                <a:cs typeface="IBM Plex Mono" pitchFamily="49" charset="-120"/>
+                <a:latin typeface="IBM Plex Mono"/>
+                <a:ea typeface="IBM Plex Mono"/>
+                <a:cs typeface="IBM Plex Mono"/>
               </a:rPr>
               <a:t>02</a:t>
             </a:r>
-            <a:endParaRPr lang="en-US" sz="2000" dirty="0"/>
-          </a:p>
-        </p:txBody>
-      </p:sp>
-      <p:sp>
-        <p:nvSpPr>
-          <p:cNvPr id="11" name="Text 9"/>
-          <p:cNvSpPr/>
-          <p:nvPr/>
-        </p:nvSpPr>
-        <p:spPr>
-          <a:xfrm>
+            <a:endParaRPr sz="2000"/>
+          </a:p>
+        </p:txBody>
+      </p:sp>
+      <p:sp>
+        <p:nvSpPr>
+          <p:cNvPr id="11" name="Text 9">
+            <a:extLst xmlns:a="http://schemas.openxmlformats.org/drawingml/2006/main">
+              <a:ext uri="{FF2B5EF4-FFF2-40B4-BE49-F238E27FC236}">
+                <a16:creationId xmlns:a16="http://schemas.microsoft.com/office/drawing/2014/main" id="{4C53A5CF-4297-422B-BFA2-50B18F459E15}"/>
+              </a:ext>
+            </a:extLst>
+          </p:cNvPr>
+          <p:cNvSpPr>
+            <a:spLocks xmlns:a="http://schemas.openxmlformats.org/drawingml/2006/main" noGrp="1"/>
+          </p:cNvSpPr>
+          <p:nvPr/>
+        </p:nvSpPr>
+        <p:spPr>
+          <a:xfrm xmlns:a="http://schemas.openxmlformats.org/drawingml/2006/main">
             <a:off x="1708150" y="2941241"/>
             <a:ext cx="9719183" cy="274241"/>
           </a:xfrm>
-          <a:prstGeom prst="rect">
-            <a:avLst/>
-          </a:prstGeom>
-          <a:noFill/>
-          <a:ln/>
-        </p:spPr>
-        <p:txBody>
-          <a:bodyPr wrap="square" lIns="0" tIns="0" rIns="0" bIns="0" rtlCol="0" anchor="t">
-            <a:normAutofit/>
-          </a:bodyPr>
-          <a:lstStyle/>
-          <a:p>
-            <a:pPr algn="l" indent="0" marL="0">
+          <a:prstGeom xmlns:a="http://schemas.openxmlformats.org/drawingml/2006/main" prst="rect">
+            <a:avLst/>
+          </a:prstGeom>
+          <a:noFill xmlns:a="http://schemas.openxmlformats.org/drawingml/2006/main"/>
+        </p:spPr>
+        <p:txBody>
+          <a:bodyPr xmlns:a="http://schemas.openxmlformats.org/drawingml/2006/main" wrap="square" lIns="0" tIns="0" rIns="0" bIns="0" anchor="t">
+            <a:normAutofit/>
+          </a:bodyPr>
+          <a:lstStyle xmlns:a="http://schemas.openxmlformats.org/drawingml/2006/main"/>
+          <a:p xmlns:a="http://schemas.openxmlformats.org/drawingml/2006/main">
+            <a:pPr marL="0" indent="0" algn="l">
               <a:lnSpc>
                 <a:spcPts val="1960"/>
               </a:lnSpc>
               <a:buNone/>
             </a:pPr>
             <a:r>
-              <a:rPr lang="en-US" sz="1400" dirty="0">
+              <a:rPr sz="1400">
                 <a:solidFill>
                   <a:srgbClr val="13202D"/>
                 </a:solidFill>
-                <a:latin typeface="IBM Plex Sans" pitchFamily="34" charset="0"/>
-                <a:ea typeface="IBM Plex Sans" pitchFamily="34" charset="-122"/>
-                <a:cs typeface="IBM Plex Sans" pitchFamily="34" charset="-120"/>
+                <a:latin typeface="IBM Plex Sans"/>
+                <a:ea typeface="IBM Plex Sans"/>
+                <a:cs typeface="IBM Plex Sans"/>
               </a:rPr>
               <a:t>Проверити да .env приступ буде блокиран.</a:t>
             </a:r>
-            <a:endParaRPr lang="en-US" sz="1400" dirty="0"/>
-          </a:p>
-        </p:txBody>
-      </p:sp>
-      <p:sp>
-        <p:nvSpPr>
-          <p:cNvPr id="12" name="Shape 10"/>
-          <p:cNvSpPr/>
-          <p:nvPr/>
-        </p:nvSpPr>
-        <p:spPr>
-          <a:xfrm>
+            <a:endParaRPr sz="1400"/>
+          </a:p>
+        </p:txBody>
+      </p:sp>
+      <p:sp>
+        <p:nvSpPr>
+          <p:cNvPr id="12" name="Shape 10">
+            <a:extLst xmlns:a="http://schemas.openxmlformats.org/drawingml/2006/main">
+              <a:ext uri="{FF2B5EF4-FFF2-40B4-BE49-F238E27FC236}">
+                <a16:creationId xmlns:a16="http://schemas.microsoft.com/office/drawing/2014/main" id="{FA321864-CDFE-4E66-9777-A3C65FE58786}"/>
+              </a:ext>
+            </a:extLst>
+          </p:cNvPr>
+          <p:cNvSpPr>
+            <a:spLocks xmlns:a="http://schemas.openxmlformats.org/drawingml/2006/main" noGrp="1"/>
+          </p:cNvSpPr>
+          <p:nvPr/>
+        </p:nvSpPr>
+        <p:spPr>
+          <a:xfrm xmlns:a="http://schemas.openxmlformats.org/drawingml/2006/main">
             <a:off x="1047750" y="3360936"/>
             <a:ext cx="10096500" cy="0"/>
           </a:xfrm>
-          <a:prstGeom prst="line">
-            <a:avLst/>
-          </a:prstGeom>
-          <a:noFill/>
-          <a:ln w="6350">
+          <a:prstGeom xmlns:a="http://schemas.openxmlformats.org/drawingml/2006/main" prst="line">
+            <a:avLst/>
+          </a:prstGeom>
+          <a:noFill xmlns:a="http://schemas.openxmlformats.org/drawingml/2006/main"/>
+          <a:ln xmlns:a="http://schemas.openxmlformats.org/drawingml/2006/main" w="6350">
             <a:solidFill>
               <a:srgbClr val="E3E8EE"/>
             </a:solidFill>
@@ -23201,108 +23580,130 @@
       </p:sp>
       <p:sp>
         <p:nvSpPr>
-          <p:cNvPr id="13" name="Text 11"/>
-          <p:cNvSpPr/>
-          <p:nvPr/>
-        </p:nvSpPr>
-        <p:spPr>
-          <a:xfrm>
+          <p:cNvPr id="13" name="Text 11">
+            <a:extLst xmlns:a="http://schemas.openxmlformats.org/drawingml/2006/main">
+              <a:ext uri="{FF2B5EF4-FFF2-40B4-BE49-F238E27FC236}">
+                <a16:creationId xmlns:a16="http://schemas.microsoft.com/office/drawing/2014/main" id="{26FC4610-DD21-417A-B6C3-BCD51B302AA1}"/>
+              </a:ext>
+            </a:extLst>
+          </p:cNvPr>
+          <p:cNvSpPr>
+            <a:spLocks xmlns:a="http://schemas.openxmlformats.org/drawingml/2006/main" noGrp="1"/>
+          </p:cNvSpPr>
+          <p:nvPr/>
+        </p:nvSpPr>
+        <p:spPr>
+          <a:xfrm xmlns:a="http://schemas.openxmlformats.org/drawingml/2006/main">
             <a:off x="1047750" y="3478411"/>
             <a:ext cx="508000" cy="381000"/>
           </a:xfrm>
-          <a:prstGeom prst="rect">
-            <a:avLst/>
-          </a:prstGeom>
-          <a:noFill/>
-          <a:ln/>
-        </p:spPr>
-        <p:txBody>
-          <a:bodyPr wrap="square" lIns="0" tIns="0" rIns="0" bIns="0" rtlCol="0" anchor="t">
-            <a:normAutofit/>
-          </a:bodyPr>
-          <a:lstStyle/>
-          <a:p>
-            <a:pPr algn="l" indent="0" marL="0">
+          <a:prstGeom xmlns:a="http://schemas.openxmlformats.org/drawingml/2006/main" prst="rect">
+            <a:avLst/>
+          </a:prstGeom>
+          <a:noFill xmlns:a="http://schemas.openxmlformats.org/drawingml/2006/main"/>
+        </p:spPr>
+        <p:txBody>
+          <a:bodyPr xmlns:a="http://schemas.openxmlformats.org/drawingml/2006/main" wrap="square" lIns="0" tIns="0" rIns="0" bIns="0" anchor="t">
+            <a:normAutofit/>
+          </a:bodyPr>
+          <a:lstStyle xmlns:a="http://schemas.openxmlformats.org/drawingml/2006/main"/>
+          <a:p xmlns:a="http://schemas.openxmlformats.org/drawingml/2006/main">
+            <a:pPr marL="0" indent="0" algn="l">
               <a:lnSpc>
                 <a:spcPts val="2800"/>
               </a:lnSpc>
               <a:buNone/>
             </a:pPr>
             <a:r>
-              <a:rPr lang="en-US" sz="2000" dirty="0">
+              <a:rPr sz="2000">
                 <a:solidFill>
                   <a:srgbClr val="7D5E00"/>
                 </a:solidFill>
-                <a:latin typeface="IBM Plex Mono" pitchFamily="49" charset="0"/>
-                <a:ea typeface="IBM Plex Mono" pitchFamily="49" charset="-122"/>
-                <a:cs typeface="IBM Plex Mono" pitchFamily="49" charset="-120"/>
+                <a:latin typeface="IBM Plex Mono"/>
+                <a:ea typeface="IBM Plex Mono"/>
+                <a:cs typeface="IBM Plex Mono"/>
               </a:rPr>
               <a:t>03</a:t>
             </a:r>
-            <a:endParaRPr lang="en-US" sz="2000" dirty="0"/>
-          </a:p>
-        </p:txBody>
-      </p:sp>
-      <p:sp>
-        <p:nvSpPr>
-          <p:cNvPr id="14" name="Text 12"/>
-          <p:cNvSpPr/>
-          <p:nvPr/>
-        </p:nvSpPr>
-        <p:spPr>
-          <a:xfrm>
+            <a:endParaRPr sz="2000"/>
+          </a:p>
+        </p:txBody>
+      </p:sp>
+      <p:sp>
+        <p:nvSpPr>
+          <p:cNvPr id="14" name="Text 12">
+            <a:extLst xmlns:a="http://schemas.openxmlformats.org/drawingml/2006/main">
+              <a:ext uri="{FF2B5EF4-FFF2-40B4-BE49-F238E27FC236}">
+                <a16:creationId xmlns:a16="http://schemas.microsoft.com/office/drawing/2014/main" id="{121CBBA1-6126-4487-A30A-F275EED0DE32}"/>
+              </a:ext>
+            </a:extLst>
+          </p:cNvPr>
+          <p:cNvSpPr>
+            <a:spLocks xmlns:a="http://schemas.openxmlformats.org/drawingml/2006/main" noGrp="1"/>
+          </p:cNvSpPr>
+          <p:nvPr/>
+        </p:nvSpPr>
+        <p:spPr>
+          <a:xfrm xmlns:a="http://schemas.openxmlformats.org/drawingml/2006/main">
             <a:off x="1708150" y="3531791"/>
             <a:ext cx="9719183" cy="274241"/>
           </a:xfrm>
-          <a:prstGeom prst="rect">
-            <a:avLst/>
-          </a:prstGeom>
-          <a:noFill/>
-          <a:ln/>
-        </p:spPr>
-        <p:txBody>
-          <a:bodyPr wrap="square" lIns="0" tIns="0" rIns="0" bIns="0" rtlCol="0" anchor="t">
-            <a:normAutofit/>
-          </a:bodyPr>
-          <a:lstStyle/>
-          <a:p>
-            <a:pPr algn="l" indent="0" marL="0">
+          <a:prstGeom xmlns:a="http://schemas.openxmlformats.org/drawingml/2006/main" prst="rect">
+            <a:avLst/>
+          </a:prstGeom>
+          <a:noFill xmlns:a="http://schemas.openxmlformats.org/drawingml/2006/main"/>
+        </p:spPr>
+        <p:txBody>
+          <a:bodyPr xmlns:a="http://schemas.openxmlformats.org/drawingml/2006/main" wrap="square" lIns="0" tIns="0" rIns="0" bIns="0" anchor="t">
+            <a:normAutofit/>
+          </a:bodyPr>
+          <a:lstStyle xmlns:a="http://schemas.openxmlformats.org/drawingml/2006/main"/>
+          <a:p xmlns:a="http://schemas.openxmlformats.org/drawingml/2006/main">
+            <a:pPr marL="0" indent="0" algn="l">
               <a:lnSpc>
                 <a:spcPts val="1960"/>
               </a:lnSpc>
               <a:buNone/>
             </a:pPr>
             <a:r>
-              <a:rPr lang="en-US" sz="1400" dirty="0">
+              <a:rPr sz="1400">
                 <a:solidFill>
                   <a:srgbClr val="13202D"/>
                 </a:solidFill>
-                <a:latin typeface="IBM Plex Sans" pitchFamily="34" charset="0"/>
-                <a:ea typeface="IBM Plex Sans" pitchFamily="34" charset="-122"/>
-                <a:cs typeface="IBM Plex Sans" pitchFamily="34" charset="-120"/>
+                <a:latin typeface="IBM Plex Sans"/>
+                <a:ea typeface="IBM Plex Sans"/>
+                <a:cs typeface="IBM Plex Sans"/>
               </a:rPr>
               <a:t>Проверити да деструктивне команде буду блокиране.</a:t>
             </a:r>
-            <a:endParaRPr lang="en-US" sz="1400" dirty="0"/>
-          </a:p>
-        </p:txBody>
-      </p:sp>
-      <p:sp>
-        <p:nvSpPr>
-          <p:cNvPr id="15" name="Shape 13"/>
-          <p:cNvSpPr/>
-          <p:nvPr/>
-        </p:nvSpPr>
-        <p:spPr>
-          <a:xfrm>
+            <a:endParaRPr sz="1400"/>
+          </a:p>
+        </p:txBody>
+      </p:sp>
+      <p:sp>
+        <p:nvSpPr>
+          <p:cNvPr id="15" name="Shape 13">
+            <a:extLst xmlns:a="http://schemas.openxmlformats.org/drawingml/2006/main">
+              <a:ext uri="{FF2B5EF4-FFF2-40B4-BE49-F238E27FC236}">
+                <a16:creationId xmlns:a16="http://schemas.microsoft.com/office/drawing/2014/main" id="{658ADF8F-2978-4C99-9F40-2CC11DA5DC96}"/>
+              </a:ext>
+            </a:extLst>
+          </p:cNvPr>
+          <p:cNvSpPr>
+            <a:spLocks xmlns:a="http://schemas.openxmlformats.org/drawingml/2006/main" noGrp="1"/>
+          </p:cNvSpPr>
+          <p:nvPr/>
+        </p:nvSpPr>
+        <p:spPr>
+          <a:xfrm xmlns:a="http://schemas.openxmlformats.org/drawingml/2006/main">
             <a:off x="1047750" y="3951486"/>
             <a:ext cx="10096500" cy="0"/>
           </a:xfrm>
-          <a:prstGeom prst="line">
-            <a:avLst/>
-          </a:prstGeom>
-          <a:noFill/>
-          <a:ln w="6350">
+          <a:prstGeom xmlns:a="http://schemas.openxmlformats.org/drawingml/2006/main" prst="line">
+            <a:avLst/>
+          </a:prstGeom>
+          <a:noFill xmlns:a="http://schemas.openxmlformats.org/drawingml/2006/main"/>
+          <a:ln xmlns:a="http://schemas.openxmlformats.org/drawingml/2006/main" w="6350">
             <a:solidFill>
               <a:srgbClr val="E3E8EE"/>
             </a:solidFill>
@@ -23312,108 +23713,130 @@
       </p:sp>
       <p:sp>
         <p:nvSpPr>
-          <p:cNvPr id="16" name="Text 14"/>
-          <p:cNvSpPr/>
-          <p:nvPr/>
-        </p:nvSpPr>
-        <p:spPr>
-          <a:xfrm>
+          <p:cNvPr id="16" name="Text 14">
+            <a:extLst xmlns:a="http://schemas.openxmlformats.org/drawingml/2006/main">
+              <a:ext uri="{FF2B5EF4-FFF2-40B4-BE49-F238E27FC236}">
+                <a16:creationId xmlns:a16="http://schemas.microsoft.com/office/drawing/2014/main" id="{B23B0490-BF01-4825-A87F-AE5476CC32CC}"/>
+              </a:ext>
+            </a:extLst>
+          </p:cNvPr>
+          <p:cNvSpPr>
+            <a:spLocks xmlns:a="http://schemas.openxmlformats.org/drawingml/2006/main" noGrp="1"/>
+          </p:cNvSpPr>
+          <p:nvPr/>
+        </p:nvSpPr>
+        <p:spPr>
+          <a:xfrm xmlns:a="http://schemas.openxmlformats.org/drawingml/2006/main">
             <a:off x="1047750" y="4068961"/>
             <a:ext cx="508000" cy="381000"/>
           </a:xfrm>
-          <a:prstGeom prst="rect">
-            <a:avLst/>
-          </a:prstGeom>
-          <a:noFill/>
-          <a:ln/>
-        </p:spPr>
-        <p:txBody>
-          <a:bodyPr wrap="square" lIns="0" tIns="0" rIns="0" bIns="0" rtlCol="0" anchor="t">
-            <a:normAutofit/>
-          </a:bodyPr>
-          <a:lstStyle/>
-          <a:p>
-            <a:pPr algn="l" indent="0" marL="0">
+          <a:prstGeom xmlns:a="http://schemas.openxmlformats.org/drawingml/2006/main" prst="rect">
+            <a:avLst/>
+          </a:prstGeom>
+          <a:noFill xmlns:a="http://schemas.openxmlformats.org/drawingml/2006/main"/>
+        </p:spPr>
+        <p:txBody>
+          <a:bodyPr xmlns:a="http://schemas.openxmlformats.org/drawingml/2006/main" wrap="square" lIns="0" tIns="0" rIns="0" bIns="0" anchor="t">
+            <a:normAutofit/>
+          </a:bodyPr>
+          <a:lstStyle xmlns:a="http://schemas.openxmlformats.org/drawingml/2006/main"/>
+          <a:p xmlns:a="http://schemas.openxmlformats.org/drawingml/2006/main">
+            <a:pPr marL="0" indent="0" algn="l">
               <a:lnSpc>
                 <a:spcPts val="2800"/>
               </a:lnSpc>
               <a:buNone/>
             </a:pPr>
             <a:r>
-              <a:rPr lang="en-US" sz="2000" dirty="0">
+              <a:rPr sz="2000">
                 <a:solidFill>
                   <a:srgbClr val="7D5E00"/>
                 </a:solidFill>
-                <a:latin typeface="IBM Plex Mono" pitchFamily="49" charset="0"/>
-                <a:ea typeface="IBM Plex Mono" pitchFamily="49" charset="-122"/>
-                <a:cs typeface="IBM Plex Mono" pitchFamily="49" charset="-120"/>
+                <a:latin typeface="IBM Plex Mono"/>
+                <a:ea typeface="IBM Plex Mono"/>
+                <a:cs typeface="IBM Plex Mono"/>
               </a:rPr>
               <a:t>04</a:t>
             </a:r>
-            <a:endParaRPr lang="en-US" sz="2000" dirty="0"/>
-          </a:p>
-        </p:txBody>
-      </p:sp>
-      <p:sp>
-        <p:nvSpPr>
-          <p:cNvPr id="17" name="Text 15"/>
-          <p:cNvSpPr/>
-          <p:nvPr/>
-        </p:nvSpPr>
-        <p:spPr>
-          <a:xfrm>
+            <a:endParaRPr sz="2000"/>
+          </a:p>
+        </p:txBody>
+      </p:sp>
+      <p:sp>
+        <p:nvSpPr>
+          <p:cNvPr id="17" name="Text 15">
+            <a:extLst xmlns:a="http://schemas.openxmlformats.org/drawingml/2006/main">
+              <a:ext uri="{FF2B5EF4-FFF2-40B4-BE49-F238E27FC236}">
+                <a16:creationId xmlns:a16="http://schemas.microsoft.com/office/drawing/2014/main" id="{0C211DD0-D40E-4A6E-B4DC-FA6CCFF37270}"/>
+              </a:ext>
+            </a:extLst>
+          </p:cNvPr>
+          <p:cNvSpPr>
+            <a:spLocks xmlns:a="http://schemas.openxmlformats.org/drawingml/2006/main" noGrp="1"/>
+          </p:cNvSpPr>
+          <p:nvPr/>
+        </p:nvSpPr>
+        <p:spPr>
+          <a:xfrm xmlns:a="http://schemas.openxmlformats.org/drawingml/2006/main">
             <a:off x="1708150" y="4122341"/>
             <a:ext cx="9719183" cy="274241"/>
           </a:xfrm>
-          <a:prstGeom prst="rect">
-            <a:avLst/>
-          </a:prstGeom>
-          <a:noFill/>
-          <a:ln/>
-        </p:spPr>
-        <p:txBody>
-          <a:bodyPr wrap="square" lIns="0" tIns="0" rIns="0" bIns="0" rtlCol="0" anchor="t">
-            <a:normAutofit/>
-          </a:bodyPr>
-          <a:lstStyle/>
-          <a:p>
-            <a:pPr algn="l" indent="0" marL="0">
+          <a:prstGeom xmlns:a="http://schemas.openxmlformats.org/drawingml/2006/main" prst="rect">
+            <a:avLst/>
+          </a:prstGeom>
+          <a:noFill xmlns:a="http://schemas.openxmlformats.org/drawingml/2006/main"/>
+        </p:spPr>
+        <p:txBody>
+          <a:bodyPr xmlns:a="http://schemas.openxmlformats.org/drawingml/2006/main" wrap="square" lIns="0" tIns="0" rIns="0" bIns="0" anchor="t">
+            <a:normAutofit/>
+          </a:bodyPr>
+          <a:lstStyle xmlns:a="http://schemas.openxmlformats.org/drawingml/2006/main"/>
+          <a:p xmlns:a="http://schemas.openxmlformats.org/drawingml/2006/main">
+            <a:pPr marL="0" indent="0" algn="l">
               <a:lnSpc>
                 <a:spcPts val="1960"/>
               </a:lnSpc>
               <a:buNone/>
             </a:pPr>
             <a:r>
-              <a:rPr lang="en-US" sz="1400" dirty="0">
+              <a:rPr sz="1400">
                 <a:solidFill>
                   <a:srgbClr val="13202D"/>
                 </a:solidFill>
-                <a:latin typeface="IBM Plex Sans" pitchFamily="34" charset="0"/>
-                <a:ea typeface="IBM Plex Sans" pitchFamily="34" charset="-122"/>
-                <a:cs typeface="IBM Plex Sans" pitchFamily="34" charset="-120"/>
+                <a:latin typeface="IBM Plex Sans"/>
+                <a:ea typeface="IBM Plex Sans"/>
+                <a:cs typeface="IBM Plex Sans"/>
               </a:rPr>
               <a:t>Објаснити разлику између hook адаптера и саме политике.</a:t>
             </a:r>
-            <a:endParaRPr lang="en-US" sz="1400" dirty="0"/>
-          </a:p>
-        </p:txBody>
-      </p:sp>
-      <p:sp>
-        <p:nvSpPr>
-          <p:cNvPr id="18" name="Shape 16"/>
-          <p:cNvSpPr/>
-          <p:nvPr/>
-        </p:nvSpPr>
-        <p:spPr>
-          <a:xfrm>
+            <a:endParaRPr sz="1400"/>
+          </a:p>
+        </p:txBody>
+      </p:sp>
+      <p:sp>
+        <p:nvSpPr>
+          <p:cNvPr id="18" name="Shape 16">
+            <a:extLst xmlns:a="http://schemas.openxmlformats.org/drawingml/2006/main">
+              <a:ext uri="{FF2B5EF4-FFF2-40B4-BE49-F238E27FC236}">
+                <a16:creationId xmlns:a16="http://schemas.microsoft.com/office/drawing/2014/main" id="{391BD74C-8610-4A6C-85BF-818B7664E42A}"/>
+              </a:ext>
+            </a:extLst>
+          </p:cNvPr>
+          <p:cNvSpPr>
+            <a:spLocks xmlns:a="http://schemas.openxmlformats.org/drawingml/2006/main" noGrp="1"/>
+          </p:cNvSpPr>
+          <p:nvPr/>
+        </p:nvSpPr>
+        <p:spPr>
+          <a:xfrm xmlns:a="http://schemas.openxmlformats.org/drawingml/2006/main">
             <a:off x="1047750" y="4542036"/>
             <a:ext cx="10096500" cy="0"/>
           </a:xfrm>
-          <a:prstGeom prst="line">
-            <a:avLst/>
-          </a:prstGeom>
-          <a:noFill/>
-          <a:ln w="6350">
+          <a:prstGeom xmlns:a="http://schemas.openxmlformats.org/drawingml/2006/main" prst="line">
+            <a:avLst/>
+          </a:prstGeom>
+          <a:noFill xmlns:a="http://schemas.openxmlformats.org/drawingml/2006/main"/>
+          <a:ln xmlns:a="http://schemas.openxmlformats.org/drawingml/2006/main" w="6350">
             <a:solidFill>
               <a:srgbClr val="E3E8EE"/>
             </a:solidFill>
@@ -23423,108 +23846,130 @@
       </p:sp>
       <p:sp>
         <p:nvSpPr>
-          <p:cNvPr id="19" name="Text 17"/>
-          <p:cNvSpPr/>
-          <p:nvPr/>
-        </p:nvSpPr>
-        <p:spPr>
-          <a:xfrm>
+          <p:cNvPr id="19" name="Text 17">
+            <a:extLst xmlns:a="http://schemas.openxmlformats.org/drawingml/2006/main">
+              <a:ext uri="{FF2B5EF4-FFF2-40B4-BE49-F238E27FC236}">
+                <a16:creationId xmlns:a16="http://schemas.microsoft.com/office/drawing/2014/main" id="{31ECF21E-4D0A-4D89-A49C-6204FA6A2FA2}"/>
+              </a:ext>
+            </a:extLst>
+          </p:cNvPr>
+          <p:cNvSpPr>
+            <a:spLocks xmlns:a="http://schemas.openxmlformats.org/drawingml/2006/main" noGrp="1"/>
+          </p:cNvSpPr>
+          <p:nvPr/>
+        </p:nvSpPr>
+        <p:spPr>
+          <a:xfrm xmlns:a="http://schemas.openxmlformats.org/drawingml/2006/main">
             <a:off x="1047750" y="4659511"/>
             <a:ext cx="508000" cy="381000"/>
           </a:xfrm>
-          <a:prstGeom prst="rect">
-            <a:avLst/>
-          </a:prstGeom>
-          <a:noFill/>
-          <a:ln/>
-        </p:spPr>
-        <p:txBody>
-          <a:bodyPr wrap="square" lIns="0" tIns="0" rIns="0" bIns="0" rtlCol="0" anchor="t">
-            <a:normAutofit/>
-          </a:bodyPr>
-          <a:lstStyle/>
-          <a:p>
-            <a:pPr algn="l" indent="0" marL="0">
+          <a:prstGeom xmlns:a="http://schemas.openxmlformats.org/drawingml/2006/main" prst="rect">
+            <a:avLst/>
+          </a:prstGeom>
+          <a:noFill xmlns:a="http://schemas.openxmlformats.org/drawingml/2006/main"/>
+        </p:spPr>
+        <p:txBody>
+          <a:bodyPr xmlns:a="http://schemas.openxmlformats.org/drawingml/2006/main" wrap="square" lIns="0" tIns="0" rIns="0" bIns="0" anchor="t">
+            <a:normAutofit/>
+          </a:bodyPr>
+          <a:lstStyle xmlns:a="http://schemas.openxmlformats.org/drawingml/2006/main"/>
+          <a:p xmlns:a="http://schemas.openxmlformats.org/drawingml/2006/main">
+            <a:pPr marL="0" indent="0" algn="l">
               <a:lnSpc>
                 <a:spcPts val="2800"/>
               </a:lnSpc>
               <a:buNone/>
             </a:pPr>
             <a:r>
-              <a:rPr lang="en-US" sz="2000" dirty="0">
+              <a:rPr sz="2000">
                 <a:solidFill>
                   <a:srgbClr val="A8520A"/>
                 </a:solidFill>
-                <a:latin typeface="IBM Plex Mono" pitchFamily="49" charset="0"/>
-                <a:ea typeface="IBM Plex Mono" pitchFamily="49" charset="-122"/>
-                <a:cs typeface="IBM Plex Mono" pitchFamily="49" charset="-120"/>
+                <a:latin typeface="IBM Plex Mono"/>
+                <a:ea typeface="IBM Plex Mono"/>
+                <a:cs typeface="IBM Plex Mono"/>
               </a:rPr>
               <a:t>05</a:t>
             </a:r>
-            <a:endParaRPr lang="en-US" sz="2000" dirty="0"/>
-          </a:p>
-        </p:txBody>
-      </p:sp>
-      <p:sp>
-        <p:nvSpPr>
-          <p:cNvPr id="20" name="Text 18"/>
-          <p:cNvSpPr/>
-          <p:nvPr/>
-        </p:nvSpPr>
-        <p:spPr>
-          <a:xfrm>
+            <a:endParaRPr sz="2000"/>
+          </a:p>
+        </p:txBody>
+      </p:sp>
+      <p:sp>
+        <p:nvSpPr>
+          <p:cNvPr id="20" name="Text 18">
+            <a:extLst xmlns:a="http://schemas.openxmlformats.org/drawingml/2006/main">
+              <a:ext uri="{FF2B5EF4-FFF2-40B4-BE49-F238E27FC236}">
+                <a16:creationId xmlns:a16="http://schemas.microsoft.com/office/drawing/2014/main" id="{44E3DB07-116A-404B-A3EA-3CD10D544A3C}"/>
+              </a:ext>
+            </a:extLst>
+          </p:cNvPr>
+          <p:cNvSpPr>
+            <a:spLocks xmlns:a="http://schemas.openxmlformats.org/drawingml/2006/main" noGrp="1"/>
+          </p:cNvSpPr>
+          <p:nvPr/>
+        </p:nvSpPr>
+        <p:spPr>
+          <a:xfrm xmlns:a="http://schemas.openxmlformats.org/drawingml/2006/main">
             <a:off x="1708150" y="4712891"/>
             <a:ext cx="9719183" cy="274241"/>
           </a:xfrm>
-          <a:prstGeom prst="rect">
-            <a:avLst/>
-          </a:prstGeom>
-          <a:noFill/>
-          <a:ln/>
-        </p:spPr>
-        <p:txBody>
-          <a:bodyPr wrap="square" lIns="0" tIns="0" rIns="0" bIns="0" rtlCol="0" anchor="t">
-            <a:normAutofit/>
-          </a:bodyPr>
-          <a:lstStyle/>
-          <a:p>
-            <a:pPr algn="l" indent="0" marL="0">
+          <a:prstGeom xmlns:a="http://schemas.openxmlformats.org/drawingml/2006/main" prst="rect">
+            <a:avLst/>
+          </a:prstGeom>
+          <a:noFill xmlns:a="http://schemas.openxmlformats.org/drawingml/2006/main"/>
+        </p:spPr>
+        <p:txBody>
+          <a:bodyPr xmlns:a="http://schemas.openxmlformats.org/drawingml/2006/main" wrap="square" lIns="0" tIns="0" rIns="0" bIns="0" anchor="t">
+            <a:normAutofit/>
+          </a:bodyPr>
+          <a:lstStyle xmlns:a="http://schemas.openxmlformats.org/drawingml/2006/main"/>
+          <a:p xmlns:a="http://schemas.openxmlformats.org/drawingml/2006/main">
+            <a:pPr marL="0" indent="0" algn="l">
               <a:lnSpc>
                 <a:spcPts val="1960"/>
               </a:lnSpc>
               <a:buNone/>
             </a:pPr>
             <a:r>
-              <a:rPr lang="en-US" sz="1400" dirty="0">
+              <a:rPr sz="1400">
                 <a:solidFill>
                   <a:srgbClr val="13202D"/>
                 </a:solidFill>
-                <a:latin typeface="IBM Plex Sans" pitchFamily="34" charset="0"/>
-                <a:ea typeface="IBM Plex Sans" pitchFamily="34" charset="-122"/>
-                <a:cs typeface="IBM Plex Sans" pitchFamily="34" charset="-120"/>
+                <a:latin typeface="IBM Plex Sans"/>
+                <a:ea typeface="IBM Plex Sans"/>
+                <a:cs typeface="IBM Plex Sans"/>
               </a:rPr>
               <a:t>Осмислити један eval сценарио за агентски ток.</a:t>
             </a:r>
-            <a:endParaRPr lang="en-US" sz="1400" dirty="0"/>
-          </a:p>
-        </p:txBody>
-      </p:sp>
-      <p:sp>
-        <p:nvSpPr>
-          <p:cNvPr id="21" name="Shape 19"/>
-          <p:cNvSpPr/>
-          <p:nvPr/>
-        </p:nvSpPr>
-        <p:spPr>
-          <a:xfrm>
+            <a:endParaRPr sz="1400"/>
+          </a:p>
+        </p:txBody>
+      </p:sp>
+      <p:sp>
+        <p:nvSpPr>
+          <p:cNvPr id="21" name="Shape 19">
+            <a:extLst xmlns:a="http://schemas.openxmlformats.org/drawingml/2006/main">
+              <a:ext uri="{FF2B5EF4-FFF2-40B4-BE49-F238E27FC236}">
+                <a16:creationId xmlns:a16="http://schemas.microsoft.com/office/drawing/2014/main" id="{00D61AA6-81E2-4247-8FE8-C833C37F566F}"/>
+              </a:ext>
+            </a:extLst>
+          </p:cNvPr>
+          <p:cNvSpPr>
+            <a:spLocks xmlns:a="http://schemas.openxmlformats.org/drawingml/2006/main" noGrp="1"/>
+          </p:cNvSpPr>
+          <p:nvPr/>
+        </p:nvSpPr>
+        <p:spPr>
+          <a:xfrm xmlns:a="http://schemas.openxmlformats.org/drawingml/2006/main">
             <a:off x="812800" y="6209705"/>
             <a:ext cx="10566400" cy="0"/>
           </a:xfrm>
-          <a:prstGeom prst="line">
-            <a:avLst/>
-          </a:prstGeom>
-          <a:noFill/>
-          <a:ln w="6350">
+          <a:prstGeom xmlns:a="http://schemas.openxmlformats.org/drawingml/2006/main" prst="line">
+            <a:avLst/>
+          </a:prstGeom>
+          <a:noFill xmlns:a="http://schemas.openxmlformats.org/drawingml/2006/main"/>
+          <a:ln xmlns:a="http://schemas.openxmlformats.org/drawingml/2006/main" w="6350">
             <a:solidFill>
               <a:srgbClr val="D3DAE1"/>
             </a:solidFill>
@@ -23534,97 +23979,113 @@
       </p:sp>
       <p:sp>
         <p:nvSpPr>
-          <p:cNvPr id="22" name="Text 20"/>
-          <p:cNvSpPr/>
-          <p:nvPr/>
-        </p:nvSpPr>
-        <p:spPr>
-          <a:xfrm>
+          <p:cNvPr id="22" name="Text 20">
+            <a:extLst xmlns:a="http://schemas.openxmlformats.org/drawingml/2006/main">
+              <a:ext uri="{FF2B5EF4-FFF2-40B4-BE49-F238E27FC236}">
+                <a16:creationId xmlns:a16="http://schemas.microsoft.com/office/drawing/2014/main" id="{7B343B4C-CC45-42A3-854B-560EA09FA41F}"/>
+              </a:ext>
+            </a:extLst>
+          </p:cNvPr>
+          <p:cNvSpPr>
+            <a:spLocks xmlns:a="http://schemas.openxmlformats.org/drawingml/2006/main" noGrp="1"/>
+          </p:cNvSpPr>
+          <p:nvPr/>
+        </p:nvSpPr>
+        <p:spPr>
+          <a:xfrm xmlns:a="http://schemas.openxmlformats.org/drawingml/2006/main">
             <a:off x="812800" y="6314480"/>
             <a:ext cx="2390061" cy="238720"/>
           </a:xfrm>
-          <a:prstGeom prst="rect">
-            <a:avLst/>
-          </a:prstGeom>
-          <a:noFill/>
-          <a:ln/>
-        </p:spPr>
-        <p:txBody>
-          <a:bodyPr wrap="square" lIns="0" tIns="0" rIns="0" bIns="0" rtlCol="0" anchor="t">
-            <a:normAutofit/>
-          </a:bodyPr>
-          <a:lstStyle/>
-          <a:p>
-            <a:pPr algn="l" indent="0" marL="0">
+          <a:prstGeom xmlns:a="http://schemas.openxmlformats.org/drawingml/2006/main" prst="rect">
+            <a:avLst/>
+          </a:prstGeom>
+          <a:noFill xmlns:a="http://schemas.openxmlformats.org/drawingml/2006/main"/>
+        </p:spPr>
+        <p:txBody>
+          <a:bodyPr xmlns:a="http://schemas.openxmlformats.org/drawingml/2006/main" wrap="square" lIns="0" tIns="0" rIns="0" bIns="0" anchor="t">
+            <a:normAutofit/>
+          </a:bodyPr>
+          <a:lstStyle xmlns:a="http://schemas.openxmlformats.org/drawingml/2006/main"/>
+          <a:p xmlns:a="http://schemas.openxmlformats.org/drawingml/2006/main">
+            <a:pPr marL="0" indent="0" algn="l">
               <a:lnSpc>
                 <a:spcPts val="1680"/>
               </a:lnSpc>
               <a:buNone/>
             </a:pPr>
             <a:r>
-              <a:rPr lang="en-US" sz="1200" dirty="0">
+              <a:rPr sz="1200">
                 <a:solidFill>
                   <a:srgbClr val="5E6975"/>
                 </a:solidFill>
-                <a:latin typeface="IBM Plex Sans" pitchFamily="34" charset="0"/>
-                <a:ea typeface="IBM Plex Sans" pitchFamily="34" charset="-122"/>
-                <a:cs typeface="IBM Plex Sans" pitchFamily="34" charset="-120"/>
+                <a:latin typeface="IBM Plex Sans"/>
+                <a:ea typeface="IBM Plex Sans"/>
+                <a:cs typeface="IBM Plex Sans"/>
               </a:rPr>
               <a:t>Елементи развоја софтвера</a:t>
             </a:r>
-            <a:endParaRPr lang="en-US" sz="1200" dirty="0"/>
-          </a:p>
-        </p:txBody>
-      </p:sp>
-      <p:sp>
-        <p:nvSpPr>
-          <p:cNvPr id="23" name="Text 21"/>
-          <p:cNvSpPr/>
-          <p:nvPr/>
-        </p:nvSpPr>
-        <p:spPr>
-          <a:xfrm>
+            <a:endParaRPr sz="1200"/>
+          </a:p>
+        </p:txBody>
+      </p:sp>
+      <p:sp>
+        <p:nvSpPr>
+          <p:cNvPr id="23" name="Text 21">
+            <a:extLst xmlns:a="http://schemas.openxmlformats.org/drawingml/2006/main">
+              <a:ext uri="{FF2B5EF4-FFF2-40B4-BE49-F238E27FC236}">
+                <a16:creationId xmlns:a16="http://schemas.microsoft.com/office/drawing/2014/main" id="{5BBD86DD-10AF-4DE5-958E-F1C43DB3B68B}"/>
+              </a:ext>
+            </a:extLst>
+          </p:cNvPr>
+          <p:cNvSpPr>
+            <a:spLocks xmlns:a="http://schemas.openxmlformats.org/drawingml/2006/main" noGrp="1"/>
+          </p:cNvSpPr>
+          <p:nvPr/>
+        </p:nvSpPr>
+        <p:spPr>
+          <a:xfrm xmlns:a="http://schemas.openxmlformats.org/drawingml/2006/main">
             <a:off x="11145441" y="6314480"/>
             <a:ext cx="233759" cy="238720"/>
           </a:xfrm>
-          <a:prstGeom prst="rect">
-            <a:avLst/>
-          </a:prstGeom>
-          <a:noFill/>
-          <a:ln/>
-        </p:spPr>
-        <p:txBody>
-          <a:bodyPr wrap="square" lIns="0" tIns="0" rIns="0" bIns="0" rtlCol="0" anchor="t">
-            <a:normAutofit/>
-          </a:bodyPr>
-          <a:lstStyle/>
-          <a:p>
-            <a:pPr algn="r" indent="0" marL="0">
+          <a:prstGeom xmlns:a="http://schemas.openxmlformats.org/drawingml/2006/main" prst="rect">
+            <a:avLst/>
+          </a:prstGeom>
+          <a:noFill xmlns:a="http://schemas.openxmlformats.org/drawingml/2006/main"/>
+        </p:spPr>
+        <p:txBody>
+          <a:bodyPr xmlns:a="http://schemas.openxmlformats.org/drawingml/2006/main" wrap="square" lIns="0" tIns="0" rIns="0" bIns="0" anchor="t">
+            <a:normAutofit/>
+          </a:bodyPr>
+          <a:lstStyle xmlns:a="http://schemas.openxmlformats.org/drawingml/2006/main"/>
+          <a:p xmlns:a="http://schemas.openxmlformats.org/drawingml/2006/main">
+            <a:pPr marL="0" indent="0" algn="r">
               <a:lnSpc>
                 <a:spcPts val="1680"/>
               </a:lnSpc>
               <a:buNone/>
             </a:pPr>
             <a:r>
-              <a:rPr lang="en-US" sz="1200" dirty="0">
+              <a:rPr sz="1200">
                 <a:solidFill>
                   <a:srgbClr val="5E6975"/>
                 </a:solidFill>
-                <a:latin typeface="IBM Plex Mono" pitchFamily="49" charset="0"/>
-                <a:ea typeface="IBM Plex Mono" pitchFamily="49" charset="-122"/>
-                <a:cs typeface="IBM Plex Mono" pitchFamily="49" charset="-120"/>
+                <a:latin typeface="IBM Plex Mono"/>
+                <a:ea typeface="IBM Plex Mono"/>
+                <a:cs typeface="IBM Plex Mono"/>
               </a:rPr>
               <a:t>24</a:t>
             </a:r>
-            <a:endParaRPr lang="en-US" sz="1200" dirty="0"/>
+            <a:endParaRPr sz="1200"/>
           </a:p>
         </p:txBody>
       </p:sp>
     </p:spTree>
+    <p:extLst>
+      <p:ext uri="{BB962C8B-B14F-4D97-AF65-F5344CB8AC3E}">
+        <p14:creationId xmlns:p14="http://schemas.microsoft.com/office/powerpoint/2010/main" val="999007610"/>
+      </p:ext>
+    </p:extLst>
   </p:cSld>
-  <p:clrMapOvr>
-    <a:masterClrMapping/>
-  </p:clrMapOvr>
 </p:sld>
 </file>
 
@@ -24400,11 +24861,11 @@
 </file>
 
 <file path=ppt/slides/slide26.xml><?xml version="1.0" encoding="utf-8"?>
-<p:sld xmlns:a="http://schemas.openxmlformats.org/drawingml/2006/main" xmlns:r="http://schemas.openxmlformats.org/officeDocument/2006/relationships" xmlns:p="http://schemas.openxmlformats.org/presentationml/2006/main">
-  <p:cSld name="Slide 26">
+<p:sld xmlns:p="http://schemas.openxmlformats.org/presentationml/2006/main">
+  <p:cSld>
     <p:bg>
       <p:bgPr>
-        <a:solidFill>
+        <a:solidFill xmlns:a="http://schemas.openxmlformats.org/drawingml/2006/main">
           <a:srgbClr val="F6F7F5"/>
         </a:solidFill>
       </p:bgPr>
@@ -24416,189 +24877,231 @@
         <p:nvPr/>
       </p:nvGrpSpPr>
       <p:grpSpPr>
-        <a:xfrm>
-          <a:off x="0" y="0"/>
-          <a:ext cx="0" cy="0"/>
-          <a:chOff x="0" y="0"/>
-          <a:chExt cx="0" cy="0"/>
-        </a:xfrm>
+        <a:xfrm xmlns:a="http://schemas.openxmlformats.org/drawingml/2006/main"/>
       </p:grpSpPr>
       <p:sp>
         <p:nvSpPr>
-          <p:cNvPr id="2" name="Shape 0"/>
-          <p:cNvSpPr/>
-          <p:nvPr/>
-        </p:nvSpPr>
-        <p:spPr>
-          <a:xfrm>
+          <p:cNvPr id="2" name="Shape 0">
+            <a:extLst xmlns:a="http://schemas.openxmlformats.org/drawingml/2006/main">
+              <a:ext uri="{FF2B5EF4-FFF2-40B4-BE49-F238E27FC236}">
+                <a16:creationId xmlns:a16="http://schemas.microsoft.com/office/drawing/2014/main" id="{E5B448F1-6075-4DD8-A2B2-0B521865D1D9}"/>
+              </a:ext>
+            </a:extLst>
+          </p:cNvPr>
+          <p:cNvSpPr>
+            <a:spLocks xmlns:a="http://schemas.openxmlformats.org/drawingml/2006/main" noGrp="1"/>
+          </p:cNvSpPr>
+          <p:nvPr/>
+        </p:nvSpPr>
+        <p:spPr>
+          <a:xfrm xmlns:a="http://schemas.openxmlformats.org/drawingml/2006/main">
             <a:off x="812800" y="457200"/>
             <a:ext cx="457200" cy="38100"/>
           </a:xfrm>
-          <a:prstGeom prst="roundRect">
+          <a:prstGeom xmlns:a="http://schemas.openxmlformats.org/drawingml/2006/main" prst="roundRect">
             <a:avLst>
               <a:gd name="adj" fmla="val 50000"/>
             </a:avLst>
           </a:prstGeom>
-          <a:solidFill>
+          <a:solidFill xmlns:a="http://schemas.openxmlformats.org/drawingml/2006/main">
             <a:srgbClr val="7D5E00"/>
           </a:solidFill>
-          <a:ln/>
-        </p:spPr>
-      </p:sp>
-      <p:sp>
-        <p:nvSpPr>
-          <p:cNvPr id="3" name="Text 1"/>
-          <p:cNvSpPr/>
-          <p:nvPr/>
-        </p:nvSpPr>
-        <p:spPr>
-          <a:xfrm>
+        </p:spPr>
+      </p:sp>
+      <p:sp>
+        <p:nvSpPr>
+          <p:cNvPr id="3" name="Text 1">
+            <a:extLst xmlns:a="http://schemas.openxmlformats.org/drawingml/2006/main">
+              <a:ext uri="{FF2B5EF4-FFF2-40B4-BE49-F238E27FC236}">
+                <a16:creationId xmlns:a16="http://schemas.microsoft.com/office/drawing/2014/main" id="{24B3C022-5114-4CCF-8E8F-21FAC2227F6D}"/>
+              </a:ext>
+            </a:extLst>
+          </p:cNvPr>
+          <p:cNvSpPr>
+            <a:spLocks xmlns:a="http://schemas.openxmlformats.org/drawingml/2006/main" noGrp="1"/>
+          </p:cNvSpPr>
+          <p:nvPr/>
+        </p:nvSpPr>
+        <p:spPr>
+          <a:xfrm xmlns:a="http://schemas.openxmlformats.org/drawingml/2006/main">
             <a:off x="812800" y="711200"/>
             <a:ext cx="10883392" cy="238720"/>
           </a:xfrm>
-          <a:prstGeom prst="rect">
-            <a:avLst/>
-          </a:prstGeom>
-          <a:noFill/>
-          <a:ln/>
-        </p:spPr>
-        <p:txBody>
-          <a:bodyPr wrap="square" lIns="0" tIns="0" rIns="0" bIns="0" rtlCol="0" anchor="t">
-            <a:normAutofit/>
-          </a:bodyPr>
-          <a:lstStyle/>
-          <a:p>
-            <a:pPr algn="l" indent="0" marL="0">
+          <a:prstGeom xmlns:a="http://schemas.openxmlformats.org/drawingml/2006/main" prst="rect">
+            <a:avLst/>
+          </a:prstGeom>
+          <a:noFill xmlns:a="http://schemas.openxmlformats.org/drawingml/2006/main"/>
+        </p:spPr>
+        <p:txBody>
+          <a:bodyPr xmlns:a="http://schemas.openxmlformats.org/drawingml/2006/main" wrap="square" lIns="0" tIns="0" rIns="0" bIns="0" anchor="t">
+            <a:normAutofit fontScale="100000"/>
+          </a:bodyPr>
+          <a:lstStyle xmlns:a="http://schemas.openxmlformats.org/drawingml/2006/main"/>
+          <a:p xmlns:a="http://schemas.openxmlformats.org/drawingml/2006/main">
+            <a:pPr marL="0" indent="0" algn="l">
               <a:lnSpc>
                 <a:spcPts val="1680"/>
               </a:lnSpc>
               <a:buNone/>
             </a:pPr>
             <a:r>
-              <a:rPr lang="en-US" sz="1200" spc="100" kern="0" dirty="0">
+              <a:rPr sz="1200" spc="100">
                 <a:solidFill>
                   <a:srgbClr val="7D5E00"/>
                 </a:solidFill>
-                <a:latin typeface="IBM Plex Mono" pitchFamily="49" charset="0"/>
-                <a:ea typeface="IBM Plex Mono" pitchFamily="49" charset="-122"/>
-                <a:cs typeface="IBM Plex Mono" pitchFamily="49" charset="-120"/>
-              </a:rPr>
-              <a:t>04 · ЗАДАТАК И P4</a:t>
-            </a:r>
-            <a:endParaRPr lang="en-US" sz="1200" dirty="0"/>
-          </a:p>
-        </p:txBody>
-      </p:sp>
-      <p:sp>
-        <p:nvSpPr>
-          <p:cNvPr id="4" name="Text 2"/>
-          <p:cNvSpPr/>
+                <a:latin typeface="IBM Plex Mono"/>
+                <a:ea typeface="IBM Plex Mono"/>
+                <a:cs typeface="IBM Plex Mono"/>
+              </a:rPr>
+              <a:t>04 · ЗАДАТАК И </a:t>
+            </a:r>
+            <a:r>
+              <a:rPr sz="1200" spc="100">
+                <a:solidFill>
+                  <a:srgbClr val="7D5E00"/>
+                </a:solidFill>
+                <a:latin typeface="IBM Plex Mono"/>
+                <a:ea typeface="IBM Plex Mono"/>
+                <a:cs typeface="IBM Plex Mono"/>
+              </a:rPr>
+              <a:t>КТ2</a:t>
+            </a:r>
+            <a:endParaRPr sz="1200"/>
+          </a:p>
+        </p:txBody>
+      </p:sp>
+      <p:sp>
+        <p:nvSpPr>
+          <p:cNvPr id="4" name="Text 2">
+            <a:extLst xmlns:a="http://schemas.openxmlformats.org/drawingml/2006/main">
+              <a:ext uri="{FF2B5EF4-FFF2-40B4-BE49-F238E27FC236}">
+                <a16:creationId xmlns:a16="http://schemas.microsoft.com/office/drawing/2014/main" id="{DF0262F5-C1D0-46C9-BBA2-874AE037813C}"/>
+              </a:ext>
+            </a:extLst>
+          </p:cNvPr>
+          <p:cNvSpPr>
+            <a:spLocks xmlns:a="http://schemas.openxmlformats.org/drawingml/2006/main" noGrp="1"/>
+          </p:cNvSpPr>
           <p:nvPr>
-            <p:ph type="title"/>
+            <p:ph type="title" idx="0"/>
           </p:nvPr>
         </p:nvSpPr>
         <p:spPr>
-          <a:xfrm>
+          <a:xfrm xmlns:a="http://schemas.openxmlformats.org/drawingml/2006/main">
             <a:off x="812800" y="1000720"/>
             <a:ext cx="10883392" cy="444500"/>
           </a:xfrm>
-          <a:prstGeom prst="rect">
-            <a:avLst/>
-          </a:prstGeom>
-          <a:noFill/>
-          <a:ln/>
-        </p:spPr>
-        <p:txBody>
-          <a:bodyPr wrap="square" lIns="0" tIns="0" rIns="0" bIns="0" rtlCol="0" anchor="t">
-            <a:normAutofit/>
-          </a:bodyPr>
-          <a:lstStyle/>
-          <a:p>
-            <a:pPr algn="l" indent="0" marL="0">
+          <a:prstGeom xmlns:a="http://schemas.openxmlformats.org/drawingml/2006/main" prst="rect">
+            <a:avLst/>
+          </a:prstGeom>
+          <a:noFill xmlns:a="http://schemas.openxmlformats.org/drawingml/2006/main"/>
+        </p:spPr>
+        <p:txBody>
+          <a:bodyPr xmlns:a="http://schemas.openxmlformats.org/drawingml/2006/main" wrap="square" lIns="0" tIns="0" rIns="0" bIns="0" anchor="t">
+            <a:normAutofit fontScale="100000"/>
+          </a:bodyPr>
+          <a:lstStyle xmlns:a="http://schemas.openxmlformats.org/drawingml/2006/main"/>
+          <a:p xmlns:a="http://schemas.openxmlformats.org/drawingml/2006/main">
+            <a:pPr marL="0" indent="0" algn="l">
               <a:lnSpc>
                 <a:spcPts val="3300"/>
               </a:lnSpc>
               <a:buNone/>
             </a:pPr>
             <a:r>
-              <a:rPr lang="en-US" sz="3000" b="1" i="0" spc="-50" kern="0" dirty="0">
+              <a:rPr sz="3000" b="1" i="0" spc="-50">
                 <a:solidFill>
                   <a:srgbClr val="13202D"/>
                 </a:solidFill>
-                <a:latin typeface="IBM Plex Sans" pitchFamily="34" charset="0"/>
-                <a:ea typeface="IBM Plex Sans" pitchFamily="34" charset="-122"/>
-                <a:cs typeface="IBM Plex Sans" pitchFamily="34" charset="-120"/>
-              </a:rPr>
-              <a:t>Контролна тачка P4 и завршна одбрана</a:t>
-            </a:r>
-            <a:endParaRPr lang="en-US" sz="3000" dirty="0"/>
-          </a:p>
-        </p:txBody>
-      </p:sp>
-      <p:sp>
-        <p:nvSpPr>
-          <p:cNvPr id="5" name="Text 3"/>
-          <p:cNvSpPr/>
-          <p:nvPr/>
-        </p:nvSpPr>
-        <p:spPr>
-          <a:xfrm>
+                <a:latin typeface="IBM Plex Sans"/>
+                <a:ea typeface="IBM Plex Sans"/>
+                <a:cs typeface="IBM Plex Sans"/>
+              </a:rPr>
+              <a:t>Контролна тачка КТ2</a:t>
+            </a:r>
+            <a:endParaRPr sz="3000"/>
+          </a:p>
+        </p:txBody>
+      </p:sp>
+      <p:sp>
+        <p:nvSpPr>
+          <p:cNvPr id="5" name="Text 3">
+            <a:extLst xmlns:a="http://schemas.openxmlformats.org/drawingml/2006/main">
+              <a:ext uri="{FF2B5EF4-FFF2-40B4-BE49-F238E27FC236}">
+                <a16:creationId xmlns:a16="http://schemas.microsoft.com/office/drawing/2014/main" id="{283B8E7B-C010-4340-A2FA-D6DD96E95F9D}"/>
+              </a:ext>
+            </a:extLst>
+          </p:cNvPr>
+          <p:cNvSpPr>
+            <a:spLocks xmlns:a="http://schemas.openxmlformats.org/drawingml/2006/main" noGrp="1"/>
+          </p:cNvSpPr>
+          <p:nvPr/>
+        </p:nvSpPr>
+        <p:spPr>
+          <a:xfrm xmlns:a="http://schemas.openxmlformats.org/drawingml/2006/main">
             <a:off x="812800" y="1648420"/>
             <a:ext cx="10883392" cy="274241"/>
           </a:xfrm>
-          <a:prstGeom prst="rect">
-            <a:avLst/>
-          </a:prstGeom>
-          <a:noFill/>
-          <a:ln/>
-        </p:spPr>
-        <p:txBody>
-          <a:bodyPr wrap="square" lIns="0" tIns="0" rIns="0" bIns="0" rtlCol="0" anchor="t">
-            <a:normAutofit/>
-          </a:bodyPr>
-          <a:lstStyle/>
-          <a:p>
-            <a:pPr algn="l" indent="0" marL="0">
+          <a:prstGeom xmlns:a="http://schemas.openxmlformats.org/drawingml/2006/main" prst="rect">
+            <a:avLst/>
+          </a:prstGeom>
+          <a:noFill xmlns:a="http://schemas.openxmlformats.org/drawingml/2006/main"/>
+        </p:spPr>
+        <p:txBody>
+          <a:bodyPr xmlns:a="http://schemas.openxmlformats.org/drawingml/2006/main" wrap="square" lIns="0" tIns="0" rIns="0" bIns="0" anchor="t">
+            <a:normAutofit/>
+          </a:bodyPr>
+          <a:lstStyle xmlns:a="http://schemas.openxmlformats.org/drawingml/2006/main"/>
+          <a:p xmlns:a="http://schemas.openxmlformats.org/drawingml/2006/main">
+            <a:pPr marL="0" indent="0" algn="l">
               <a:lnSpc>
                 <a:spcPts val="1960"/>
               </a:lnSpc>
               <a:buNone/>
             </a:pPr>
             <a:r>
-              <a:rPr lang="en-US" sz="1400" dirty="0">
+              <a:rPr sz="1400">
                 <a:solidFill>
                   <a:srgbClr val="44505D"/>
                 </a:solidFill>
-                <a:latin typeface="IBM Plex Sans" pitchFamily="34" charset="0"/>
-                <a:ea typeface="IBM Plex Sans" pitchFamily="34" charset="-122"/>
-                <a:cs typeface="IBM Plex Sans" pitchFamily="34" charset="-120"/>
+                <a:latin typeface="IBM Plex Sans"/>
+                <a:ea typeface="IBM Plex Sans"/>
+                <a:cs typeface="IBM Plex Sans"/>
               </a:rPr>
               <a:t>Студент повезује захтеве, архитектуру, тестове, AI радни ток, MCP и guardrails.</a:t>
             </a:r>
-            <a:endParaRPr lang="en-US" sz="1400" dirty="0"/>
-          </a:p>
-        </p:txBody>
-      </p:sp>
-      <p:sp>
-        <p:nvSpPr>
-          <p:cNvPr id="6" name="Shape 4"/>
-          <p:cNvSpPr/>
-          <p:nvPr/>
-        </p:nvSpPr>
-        <p:spPr>
-          <a:xfrm>
+            <a:endParaRPr sz="1400"/>
+          </a:p>
+        </p:txBody>
+      </p:sp>
+      <p:sp>
+        <p:nvSpPr>
+          <p:cNvPr id="6" name="Shape 4">
+            <a:extLst xmlns:a="http://schemas.openxmlformats.org/drawingml/2006/main">
+              <a:ext uri="{FF2B5EF4-FFF2-40B4-BE49-F238E27FC236}">
+                <a16:creationId xmlns:a16="http://schemas.microsoft.com/office/drawing/2014/main" id="{60F1866C-3804-452E-A951-2EF5F09A0E46}"/>
+              </a:ext>
+            </a:extLst>
+          </p:cNvPr>
+          <p:cNvSpPr>
+            <a:spLocks xmlns:a="http://schemas.openxmlformats.org/drawingml/2006/main" noGrp="1"/>
+          </p:cNvSpPr>
+          <p:nvPr/>
+        </p:nvSpPr>
+        <p:spPr>
+          <a:xfrm xmlns:a="http://schemas.openxmlformats.org/drawingml/2006/main">
             <a:off x="815975" y="2129036"/>
             <a:ext cx="10560050" cy="2927350"/>
           </a:xfrm>
-          <a:prstGeom prst="roundRect">
+          <a:prstGeom xmlns:a="http://schemas.openxmlformats.org/drawingml/2006/main" prst="roundRect">
             <a:avLst>
               <a:gd name="adj" fmla="val 3362"/>
             </a:avLst>
           </a:prstGeom>
-          <a:solidFill>
+          <a:solidFill xmlns:a="http://schemas.openxmlformats.org/drawingml/2006/main">
             <a:srgbClr val="FCFCFB"/>
           </a:solidFill>
-          <a:ln w="6350">
+          <a:ln xmlns:a="http://schemas.openxmlformats.org/drawingml/2006/main" w="6350">
             <a:solidFill>
               <a:srgbClr val="D3DAE1"/>
             </a:solidFill>
@@ -24608,141 +25111,163 @@
       </p:sp>
       <p:sp>
         <p:nvSpPr>
-          <p:cNvPr id="7" name="Text 5"/>
-          <p:cNvSpPr/>
-          <p:nvPr/>
-        </p:nvSpPr>
-        <p:spPr>
-          <a:xfrm>
+          <p:cNvPr id="7" name="Text 5">
+            <a:extLst xmlns:a="http://schemas.openxmlformats.org/drawingml/2006/main">
+              <a:ext uri="{FF2B5EF4-FFF2-40B4-BE49-F238E27FC236}">
+                <a16:creationId xmlns:a16="http://schemas.microsoft.com/office/drawing/2014/main" id="{4D03CCA9-D705-41FF-8108-2BF9BC455E07}"/>
+              </a:ext>
+            </a:extLst>
+          </p:cNvPr>
+          <p:cNvSpPr>
+            <a:spLocks xmlns:a="http://schemas.openxmlformats.org/drawingml/2006/main" noGrp="1"/>
+          </p:cNvSpPr>
+          <p:nvPr/>
+        </p:nvSpPr>
+        <p:spPr>
+          <a:xfrm xmlns:a="http://schemas.openxmlformats.org/drawingml/2006/main">
             <a:off x="1047750" y="2284611"/>
             <a:ext cx="508000" cy="381000"/>
           </a:xfrm>
-          <a:prstGeom prst="rect">
-            <a:avLst/>
-          </a:prstGeom>
-          <a:noFill/>
-          <a:ln/>
-        </p:spPr>
-        <p:txBody>
-          <a:bodyPr wrap="square" lIns="0" tIns="0" rIns="0" bIns="0" rtlCol="0" anchor="t">
-            <a:normAutofit/>
-          </a:bodyPr>
-          <a:lstStyle/>
-          <a:p>
-            <a:pPr algn="l" indent="0" marL="0">
+          <a:prstGeom xmlns:a="http://schemas.openxmlformats.org/drawingml/2006/main" prst="rect">
+            <a:avLst/>
+          </a:prstGeom>
+          <a:noFill xmlns:a="http://schemas.openxmlformats.org/drawingml/2006/main"/>
+        </p:spPr>
+        <p:txBody>
+          <a:bodyPr xmlns:a="http://schemas.openxmlformats.org/drawingml/2006/main" wrap="square" lIns="0" tIns="0" rIns="0" bIns="0" anchor="t">
+            <a:normAutofit/>
+          </a:bodyPr>
+          <a:lstStyle xmlns:a="http://schemas.openxmlformats.org/drawingml/2006/main"/>
+          <a:p xmlns:a="http://schemas.openxmlformats.org/drawingml/2006/main">
+            <a:pPr marL="0" indent="0" algn="l">
               <a:lnSpc>
                 <a:spcPts val="2800"/>
               </a:lnSpc>
               <a:buNone/>
             </a:pPr>
             <a:r>
-              <a:rPr lang="en-US" sz="2000" dirty="0">
+              <a:rPr sz="2000">
                 <a:solidFill>
                   <a:srgbClr val="7D5E00"/>
                 </a:solidFill>
-                <a:latin typeface="IBM Plex Mono" pitchFamily="49" charset="0"/>
-                <a:ea typeface="IBM Plex Mono" pitchFamily="49" charset="-122"/>
-                <a:cs typeface="IBM Plex Mono" pitchFamily="49" charset="-120"/>
+                <a:latin typeface="IBM Plex Mono"/>
+                <a:ea typeface="IBM Plex Mono"/>
+                <a:cs typeface="IBM Plex Mono"/>
               </a:rPr>
               <a:t>01</a:t>
             </a:r>
-            <a:endParaRPr lang="en-US" sz="2000" dirty="0"/>
-          </a:p>
-        </p:txBody>
-      </p:sp>
-      <p:sp>
-        <p:nvSpPr>
-          <p:cNvPr id="8" name="Text 6"/>
-          <p:cNvSpPr/>
-          <p:nvPr/>
-        </p:nvSpPr>
-        <p:spPr>
-          <a:xfrm>
+            <a:endParaRPr sz="2000"/>
+          </a:p>
+        </p:txBody>
+      </p:sp>
+      <p:sp>
+        <p:nvSpPr>
+          <p:cNvPr id="8" name="Text 6">
+            <a:extLst xmlns:a="http://schemas.openxmlformats.org/drawingml/2006/main">
+              <a:ext uri="{FF2B5EF4-FFF2-40B4-BE49-F238E27FC236}">
+                <a16:creationId xmlns:a16="http://schemas.microsoft.com/office/drawing/2014/main" id="{2DE56489-5B7C-4A26-BEBD-2985B6896609}"/>
+              </a:ext>
+            </a:extLst>
+          </p:cNvPr>
+          <p:cNvSpPr>
+            <a:spLocks xmlns:a="http://schemas.openxmlformats.org/drawingml/2006/main" noGrp="1"/>
+          </p:cNvSpPr>
+          <p:nvPr/>
+        </p:nvSpPr>
+        <p:spPr>
+          <a:xfrm xmlns:a="http://schemas.openxmlformats.org/drawingml/2006/main">
             <a:off x="1708150" y="2337991"/>
             <a:ext cx="9719183" cy="274241"/>
           </a:xfrm>
-          <a:prstGeom prst="rect">
-            <a:avLst/>
-          </a:prstGeom>
-          <a:noFill/>
-          <a:ln/>
-        </p:spPr>
-        <p:txBody>
-          <a:bodyPr wrap="square" lIns="0" tIns="0" rIns="0" bIns="0" rtlCol="0" anchor="t">
-            <a:normAutofit/>
-          </a:bodyPr>
-          <a:lstStyle/>
-          <a:p>
-            <a:pPr algn="l" indent="0" marL="0">
+          <a:prstGeom xmlns:a="http://schemas.openxmlformats.org/drawingml/2006/main" prst="rect">
+            <a:avLst/>
+          </a:prstGeom>
+          <a:noFill xmlns:a="http://schemas.openxmlformats.org/drawingml/2006/main"/>
+        </p:spPr>
+        <p:txBody>
+          <a:bodyPr xmlns:a="http://schemas.openxmlformats.org/drawingml/2006/main" wrap="square" lIns="0" tIns="0" rIns="0" bIns="0" anchor="t">
+            <a:normAutofit/>
+          </a:bodyPr>
+          <a:lstStyle xmlns:a="http://schemas.openxmlformats.org/drawingml/2006/main"/>
+          <a:p xmlns:a="http://schemas.openxmlformats.org/drawingml/2006/main">
+            <a:pPr marL="0" indent="0" algn="l">
               <a:lnSpc>
                 <a:spcPts val="1960"/>
               </a:lnSpc>
               <a:buNone/>
             </a:pPr>
             <a:r>
-              <a:rPr lang="en-US" sz="1400" b="1" dirty="0">
+              <a:rPr sz="1400" b="1">
                 <a:solidFill>
                   <a:srgbClr val="13202D"/>
                 </a:solidFill>
-                <a:latin typeface="IBM Plex Sans" pitchFamily="34" charset="0"/>
-                <a:ea typeface="IBM Plex Sans" pitchFamily="34" charset="-122"/>
-                <a:cs typeface="IBM Plex Sans" pitchFamily="34" charset="-120"/>
+                <a:latin typeface="IBM Plex Sans"/>
+                <a:ea typeface="IBM Plex Sans"/>
+                <a:cs typeface="IBM Plex Sans"/>
               </a:rPr>
               <a:t>AGENTS.md</a:t>
             </a:r>
             <a:r>
-              <a:rPr lang="en-US" sz="1400" dirty="0">
+              <a:rPr sz="1400">
                 <a:solidFill>
                   <a:srgbClr val="13202D"/>
                 </a:solidFill>
-                <a:latin typeface="IBM Plex Sans" pitchFamily="34" charset="0"/>
-                <a:ea typeface="IBM Plex Sans" pitchFamily="34" charset="-122"/>
-                <a:cs typeface="IBM Plex Sans" pitchFamily="34" charset="-120"/>
+                <a:latin typeface="IBM Plex Sans"/>
+                <a:ea typeface="IBM Plex Sans"/>
+                <a:cs typeface="IBM Plex Sans"/>
               </a:rPr>
               <a:t> и </a:t>
             </a:r>
             <a:r>
-              <a:rPr lang="en-US" sz="1400" b="1" dirty="0">
+              <a:rPr sz="1400" b="1">
                 <a:solidFill>
                   <a:srgbClr val="13202D"/>
                 </a:solidFill>
-                <a:latin typeface="IBM Plex Sans" pitchFamily="34" charset="0"/>
-                <a:ea typeface="IBM Plex Sans" pitchFamily="34" charset="-122"/>
-                <a:cs typeface="IBM Plex Sans" pitchFamily="34" charset="-120"/>
+                <a:latin typeface="IBM Plex Sans"/>
+                <a:ea typeface="IBM Plex Sans"/>
+                <a:cs typeface="IBM Plex Sans"/>
               </a:rPr>
               <a:t>AI_USAGE.md</a:t>
             </a:r>
             <a:r>
-              <a:rPr lang="en-US" sz="1400" dirty="0">
+              <a:rPr sz="1400">
                 <a:solidFill>
                   <a:srgbClr val="13202D"/>
                 </a:solidFill>
-                <a:latin typeface="IBM Plex Sans" pitchFamily="34" charset="0"/>
-                <a:ea typeface="IBM Plex Sans" pitchFamily="34" charset="-122"/>
-                <a:cs typeface="IBM Plex Sans" pitchFamily="34" charset="-120"/>
+                <a:latin typeface="IBM Plex Sans"/>
+                <a:ea typeface="IBM Plex Sans"/>
+                <a:cs typeface="IBM Plex Sans"/>
               </a:rPr>
               <a:t>: пројектна правила и записи одлука.</a:t>
             </a:r>
-            <a:endParaRPr lang="en-US" sz="1400" dirty="0"/>
-          </a:p>
-        </p:txBody>
-      </p:sp>
-      <p:sp>
-        <p:nvSpPr>
-          <p:cNvPr id="9" name="Shape 7"/>
-          <p:cNvSpPr/>
-          <p:nvPr/>
-        </p:nvSpPr>
-        <p:spPr>
-          <a:xfrm>
+            <a:endParaRPr sz="1400"/>
+          </a:p>
+        </p:txBody>
+      </p:sp>
+      <p:sp>
+        <p:nvSpPr>
+          <p:cNvPr id="9" name="Shape 7">
+            <a:extLst xmlns:a="http://schemas.openxmlformats.org/drawingml/2006/main">
+              <a:ext uri="{FF2B5EF4-FFF2-40B4-BE49-F238E27FC236}">
+                <a16:creationId xmlns:a16="http://schemas.microsoft.com/office/drawing/2014/main" id="{2DD6533B-92BC-4B78-A59F-821405789EB3}"/>
+              </a:ext>
+            </a:extLst>
+          </p:cNvPr>
+          <p:cNvSpPr>
+            <a:spLocks xmlns:a="http://schemas.openxmlformats.org/drawingml/2006/main" noGrp="1"/>
+          </p:cNvSpPr>
+          <p:nvPr/>
+        </p:nvSpPr>
+        <p:spPr>
+          <a:xfrm xmlns:a="http://schemas.openxmlformats.org/drawingml/2006/main">
             <a:off x="1047750" y="2744986"/>
             <a:ext cx="10096500" cy="0"/>
           </a:xfrm>
-          <a:prstGeom prst="line">
-            <a:avLst/>
-          </a:prstGeom>
-          <a:noFill/>
-          <a:ln w="6350">
+          <a:prstGeom xmlns:a="http://schemas.openxmlformats.org/drawingml/2006/main" prst="line">
+            <a:avLst/>
+          </a:prstGeom>
+          <a:noFill xmlns:a="http://schemas.openxmlformats.org/drawingml/2006/main"/>
+          <a:ln xmlns:a="http://schemas.openxmlformats.org/drawingml/2006/main" w="6350">
             <a:solidFill>
               <a:srgbClr val="E3E8EE"/>
             </a:solidFill>
@@ -24752,108 +25277,130 @@
       </p:sp>
       <p:sp>
         <p:nvSpPr>
-          <p:cNvPr id="10" name="Text 8"/>
-          <p:cNvSpPr/>
-          <p:nvPr/>
-        </p:nvSpPr>
-        <p:spPr>
-          <a:xfrm>
+          <p:cNvPr id="10" name="Text 8">
+            <a:extLst xmlns:a="http://schemas.openxmlformats.org/drawingml/2006/main">
+              <a:ext uri="{FF2B5EF4-FFF2-40B4-BE49-F238E27FC236}">
+                <a16:creationId xmlns:a16="http://schemas.microsoft.com/office/drawing/2014/main" id="{FD56F378-4525-40B2-8A79-B92A126CD258}"/>
+              </a:ext>
+            </a:extLst>
+          </p:cNvPr>
+          <p:cNvSpPr>
+            <a:spLocks xmlns:a="http://schemas.openxmlformats.org/drawingml/2006/main" noGrp="1"/>
+          </p:cNvSpPr>
+          <p:nvPr/>
+        </p:nvSpPr>
+        <p:spPr>
+          <a:xfrm xmlns:a="http://schemas.openxmlformats.org/drawingml/2006/main">
             <a:off x="1047750" y="2849761"/>
             <a:ext cx="508000" cy="381000"/>
           </a:xfrm>
-          <a:prstGeom prst="rect">
-            <a:avLst/>
-          </a:prstGeom>
-          <a:noFill/>
-          <a:ln/>
-        </p:spPr>
-        <p:txBody>
-          <a:bodyPr wrap="square" lIns="0" tIns="0" rIns="0" bIns="0" rtlCol="0" anchor="t">
-            <a:normAutofit/>
-          </a:bodyPr>
-          <a:lstStyle/>
-          <a:p>
-            <a:pPr algn="l" indent="0" marL="0">
+          <a:prstGeom xmlns:a="http://schemas.openxmlformats.org/drawingml/2006/main" prst="rect">
+            <a:avLst/>
+          </a:prstGeom>
+          <a:noFill xmlns:a="http://schemas.openxmlformats.org/drawingml/2006/main"/>
+        </p:spPr>
+        <p:txBody>
+          <a:bodyPr xmlns:a="http://schemas.openxmlformats.org/drawingml/2006/main" wrap="square" lIns="0" tIns="0" rIns="0" bIns="0" anchor="t">
+            <a:normAutofit/>
+          </a:bodyPr>
+          <a:lstStyle xmlns:a="http://schemas.openxmlformats.org/drawingml/2006/main"/>
+          <a:p xmlns:a="http://schemas.openxmlformats.org/drawingml/2006/main">
+            <a:pPr marL="0" indent="0" algn="l">
               <a:lnSpc>
                 <a:spcPts val="2800"/>
               </a:lnSpc>
               <a:buNone/>
             </a:pPr>
             <a:r>
-              <a:rPr lang="en-US" sz="2000" dirty="0">
+              <a:rPr sz="2000">
                 <a:solidFill>
                   <a:srgbClr val="7D5E00"/>
                 </a:solidFill>
-                <a:latin typeface="IBM Plex Mono" pitchFamily="49" charset="0"/>
-                <a:ea typeface="IBM Plex Mono" pitchFamily="49" charset="-122"/>
-                <a:cs typeface="IBM Plex Mono" pitchFamily="49" charset="-120"/>
+                <a:latin typeface="IBM Plex Mono"/>
+                <a:ea typeface="IBM Plex Mono"/>
+                <a:cs typeface="IBM Plex Mono"/>
               </a:rPr>
               <a:t>02</a:t>
             </a:r>
-            <a:endParaRPr lang="en-US" sz="2000" dirty="0"/>
-          </a:p>
-        </p:txBody>
-      </p:sp>
-      <p:sp>
-        <p:nvSpPr>
-          <p:cNvPr id="11" name="Text 9"/>
-          <p:cNvSpPr/>
-          <p:nvPr/>
-        </p:nvSpPr>
-        <p:spPr>
-          <a:xfrm>
+            <a:endParaRPr sz="2000"/>
+          </a:p>
+        </p:txBody>
+      </p:sp>
+      <p:sp>
+        <p:nvSpPr>
+          <p:cNvPr id="11" name="Text 9">
+            <a:extLst xmlns:a="http://schemas.openxmlformats.org/drawingml/2006/main">
+              <a:ext uri="{FF2B5EF4-FFF2-40B4-BE49-F238E27FC236}">
+                <a16:creationId xmlns:a16="http://schemas.microsoft.com/office/drawing/2014/main" id="{779FE7CF-44EB-4915-A178-F1F86403ED7E}"/>
+              </a:ext>
+            </a:extLst>
+          </p:cNvPr>
+          <p:cNvSpPr>
+            <a:spLocks xmlns:a="http://schemas.openxmlformats.org/drawingml/2006/main" noGrp="1"/>
+          </p:cNvSpPr>
+          <p:nvPr/>
+        </p:nvSpPr>
+        <p:spPr>
+          <a:xfrm xmlns:a="http://schemas.openxmlformats.org/drawingml/2006/main">
             <a:off x="1708150" y="2903141"/>
             <a:ext cx="9719183" cy="274241"/>
           </a:xfrm>
-          <a:prstGeom prst="rect">
-            <a:avLst/>
-          </a:prstGeom>
-          <a:noFill/>
-          <a:ln/>
-        </p:spPr>
-        <p:txBody>
-          <a:bodyPr wrap="square" lIns="0" tIns="0" rIns="0" bIns="0" rtlCol="0" anchor="t">
-            <a:normAutofit/>
-          </a:bodyPr>
-          <a:lstStyle/>
-          <a:p>
-            <a:pPr algn="l" indent="0" marL="0">
+          <a:prstGeom xmlns:a="http://schemas.openxmlformats.org/drawingml/2006/main" prst="rect">
+            <a:avLst/>
+          </a:prstGeom>
+          <a:noFill xmlns:a="http://schemas.openxmlformats.org/drawingml/2006/main"/>
+        </p:spPr>
+        <p:txBody>
+          <a:bodyPr xmlns:a="http://schemas.openxmlformats.org/drawingml/2006/main" wrap="square" lIns="0" tIns="0" rIns="0" bIns="0" anchor="t">
+            <a:normAutofit/>
+          </a:bodyPr>
+          <a:lstStyle xmlns:a="http://schemas.openxmlformats.org/drawingml/2006/main"/>
+          <a:p xmlns:a="http://schemas.openxmlformats.org/drawingml/2006/main">
+            <a:pPr marL="0" indent="0" algn="l">
               <a:lnSpc>
                 <a:spcPts val="1960"/>
               </a:lnSpc>
               <a:buNone/>
             </a:pPr>
             <a:r>
-              <a:rPr lang="en-US" sz="1400" dirty="0">
+              <a:rPr sz="1400">
                 <a:solidFill>
                   <a:srgbClr val="13202D"/>
                 </a:solidFill>
-                <a:latin typeface="IBM Plex Sans" pitchFamily="34" charset="0"/>
-                <a:ea typeface="IBM Plex Sans" pitchFamily="34" charset="-122"/>
-                <a:cs typeface="IBM Plex Sans" pitchFamily="34" charset="-120"/>
+                <a:latin typeface="IBM Plex Sans"/>
+                <a:ea typeface="IBM Plex Sans"/>
+                <a:cs typeface="IBM Plex Sans"/>
               </a:rPr>
               <a:t>Најмање две поновљиве процедуре: улази, излази и ограничења.</a:t>
             </a:r>
-            <a:endParaRPr lang="en-US" sz="1400" dirty="0"/>
-          </a:p>
-        </p:txBody>
-      </p:sp>
-      <p:sp>
-        <p:nvSpPr>
-          <p:cNvPr id="12" name="Shape 10"/>
-          <p:cNvSpPr/>
-          <p:nvPr/>
-        </p:nvSpPr>
-        <p:spPr>
-          <a:xfrm>
+            <a:endParaRPr sz="1400"/>
+          </a:p>
+        </p:txBody>
+      </p:sp>
+      <p:sp>
+        <p:nvSpPr>
+          <p:cNvPr id="12" name="Shape 10">
+            <a:extLst xmlns:a="http://schemas.openxmlformats.org/drawingml/2006/main">
+              <a:ext uri="{FF2B5EF4-FFF2-40B4-BE49-F238E27FC236}">
+                <a16:creationId xmlns:a16="http://schemas.microsoft.com/office/drawing/2014/main" id="{6532F226-4D89-40FE-9EDA-54793E282698}"/>
+              </a:ext>
+            </a:extLst>
+          </p:cNvPr>
+          <p:cNvSpPr>
+            <a:spLocks xmlns:a="http://schemas.openxmlformats.org/drawingml/2006/main" noGrp="1"/>
+          </p:cNvSpPr>
+          <p:nvPr/>
+        </p:nvSpPr>
+        <p:spPr>
+          <a:xfrm xmlns:a="http://schemas.openxmlformats.org/drawingml/2006/main">
             <a:off x="1047750" y="3310136"/>
             <a:ext cx="10096500" cy="0"/>
           </a:xfrm>
-          <a:prstGeom prst="line">
-            <a:avLst/>
-          </a:prstGeom>
-          <a:noFill/>
-          <a:ln w="6350">
+          <a:prstGeom xmlns:a="http://schemas.openxmlformats.org/drawingml/2006/main" prst="line">
+            <a:avLst/>
+          </a:prstGeom>
+          <a:noFill xmlns:a="http://schemas.openxmlformats.org/drawingml/2006/main"/>
+          <a:ln xmlns:a="http://schemas.openxmlformats.org/drawingml/2006/main" w="6350">
             <a:solidFill>
               <a:srgbClr val="E3E8EE"/>
             </a:solidFill>
@@ -24863,108 +25410,130 @@
       </p:sp>
       <p:sp>
         <p:nvSpPr>
-          <p:cNvPr id="13" name="Text 11"/>
-          <p:cNvSpPr/>
-          <p:nvPr/>
-        </p:nvSpPr>
-        <p:spPr>
-          <a:xfrm>
+          <p:cNvPr id="13" name="Text 11">
+            <a:extLst xmlns:a="http://schemas.openxmlformats.org/drawingml/2006/main">
+              <a:ext uri="{FF2B5EF4-FFF2-40B4-BE49-F238E27FC236}">
+                <a16:creationId xmlns:a16="http://schemas.microsoft.com/office/drawing/2014/main" id="{256704FF-9980-489D-A2FB-BB7770457E45}"/>
+              </a:ext>
+            </a:extLst>
+          </p:cNvPr>
+          <p:cNvSpPr>
+            <a:spLocks xmlns:a="http://schemas.openxmlformats.org/drawingml/2006/main" noGrp="1"/>
+          </p:cNvSpPr>
+          <p:nvPr/>
+        </p:nvSpPr>
+        <p:spPr>
+          <a:xfrm xmlns:a="http://schemas.openxmlformats.org/drawingml/2006/main">
             <a:off x="1047750" y="3414911"/>
             <a:ext cx="508000" cy="381000"/>
           </a:xfrm>
-          <a:prstGeom prst="rect">
-            <a:avLst/>
-          </a:prstGeom>
-          <a:noFill/>
-          <a:ln/>
-        </p:spPr>
-        <p:txBody>
-          <a:bodyPr wrap="square" lIns="0" tIns="0" rIns="0" bIns="0" rtlCol="0" anchor="t">
-            <a:normAutofit/>
-          </a:bodyPr>
-          <a:lstStyle/>
-          <a:p>
-            <a:pPr algn="l" indent="0" marL="0">
+          <a:prstGeom xmlns:a="http://schemas.openxmlformats.org/drawingml/2006/main" prst="rect">
+            <a:avLst/>
+          </a:prstGeom>
+          <a:noFill xmlns:a="http://schemas.openxmlformats.org/drawingml/2006/main"/>
+        </p:spPr>
+        <p:txBody>
+          <a:bodyPr xmlns:a="http://schemas.openxmlformats.org/drawingml/2006/main" wrap="square" lIns="0" tIns="0" rIns="0" bIns="0" anchor="t">
+            <a:normAutofit/>
+          </a:bodyPr>
+          <a:lstStyle xmlns:a="http://schemas.openxmlformats.org/drawingml/2006/main"/>
+          <a:p xmlns:a="http://schemas.openxmlformats.org/drawingml/2006/main">
+            <a:pPr marL="0" indent="0" algn="l">
               <a:lnSpc>
                 <a:spcPts val="2800"/>
               </a:lnSpc>
               <a:buNone/>
             </a:pPr>
             <a:r>
-              <a:rPr lang="en-US" sz="2000" dirty="0">
+              <a:rPr sz="2000">
                 <a:solidFill>
                   <a:srgbClr val="7D5E00"/>
                 </a:solidFill>
-                <a:latin typeface="IBM Plex Mono" pitchFamily="49" charset="0"/>
-                <a:ea typeface="IBM Plex Mono" pitchFamily="49" charset="-122"/>
-                <a:cs typeface="IBM Plex Mono" pitchFamily="49" charset="-120"/>
+                <a:latin typeface="IBM Plex Mono"/>
+                <a:ea typeface="IBM Plex Mono"/>
+                <a:cs typeface="IBM Plex Mono"/>
               </a:rPr>
               <a:t>03</a:t>
             </a:r>
-            <a:endParaRPr lang="en-US" sz="2000" dirty="0"/>
-          </a:p>
-        </p:txBody>
-      </p:sp>
-      <p:sp>
-        <p:nvSpPr>
-          <p:cNvPr id="14" name="Text 12"/>
-          <p:cNvSpPr/>
-          <p:nvPr/>
-        </p:nvSpPr>
-        <p:spPr>
-          <a:xfrm>
+            <a:endParaRPr sz="2000"/>
+          </a:p>
+        </p:txBody>
+      </p:sp>
+      <p:sp>
+        <p:nvSpPr>
+          <p:cNvPr id="14" name="Text 12">
+            <a:extLst xmlns:a="http://schemas.openxmlformats.org/drawingml/2006/main">
+              <a:ext uri="{FF2B5EF4-FFF2-40B4-BE49-F238E27FC236}">
+                <a16:creationId xmlns:a16="http://schemas.microsoft.com/office/drawing/2014/main" id="{347090A9-5DBE-44C2-9EBE-CBFB6B64C5CC}"/>
+              </a:ext>
+            </a:extLst>
+          </p:cNvPr>
+          <p:cNvSpPr>
+            <a:spLocks xmlns:a="http://schemas.openxmlformats.org/drawingml/2006/main" noGrp="1"/>
+          </p:cNvSpPr>
+          <p:nvPr/>
+        </p:nvSpPr>
+        <p:spPr>
+          <a:xfrm xmlns:a="http://schemas.openxmlformats.org/drawingml/2006/main">
             <a:off x="1708150" y="3468291"/>
             <a:ext cx="9719183" cy="274241"/>
           </a:xfrm>
-          <a:prstGeom prst="rect">
-            <a:avLst/>
-          </a:prstGeom>
-          <a:noFill/>
-          <a:ln/>
-        </p:spPr>
-        <p:txBody>
-          <a:bodyPr wrap="square" lIns="0" tIns="0" rIns="0" bIns="0" rtlCol="0" anchor="t">
-            <a:normAutofit/>
-          </a:bodyPr>
-          <a:lstStyle/>
-          <a:p>
-            <a:pPr algn="l" indent="0" marL="0">
+          <a:prstGeom xmlns:a="http://schemas.openxmlformats.org/drawingml/2006/main" prst="rect">
+            <a:avLst/>
+          </a:prstGeom>
+          <a:noFill xmlns:a="http://schemas.openxmlformats.org/drawingml/2006/main"/>
+        </p:spPr>
+        <p:txBody>
+          <a:bodyPr xmlns:a="http://schemas.openxmlformats.org/drawingml/2006/main" wrap="square" lIns="0" tIns="0" rIns="0" bIns="0" anchor="t">
+            <a:normAutofit/>
+          </a:bodyPr>
+          <a:lstStyle xmlns:a="http://schemas.openxmlformats.org/drawingml/2006/main"/>
+          <a:p xmlns:a="http://schemas.openxmlformats.org/drawingml/2006/main">
+            <a:pPr marL="0" indent="0" algn="l">
               <a:lnSpc>
                 <a:spcPts val="1960"/>
               </a:lnSpc>
               <a:buNone/>
             </a:pPr>
             <a:r>
-              <a:rPr lang="en-US" sz="1400" dirty="0">
+              <a:rPr sz="1400">
                 <a:solidFill>
                   <a:srgbClr val="13202D"/>
                 </a:solidFill>
-                <a:latin typeface="IBM Plex Sans" pitchFamily="34" charset="0"/>
-                <a:ea typeface="IBM Plex Sans" pitchFamily="34" charset="-122"/>
-                <a:cs typeface="IBM Plex Sans" pitchFamily="34" charset="-120"/>
+                <a:latin typeface="IBM Plex Sans"/>
+                <a:ea typeface="IBM Plex Sans"/>
+                <a:cs typeface="IBM Plex Sans"/>
               </a:rPr>
               <a:t>Најмање три евалуациона сценарија, укључујући негативан случај.</a:t>
             </a:r>
-            <a:endParaRPr lang="en-US" sz="1400" dirty="0"/>
-          </a:p>
-        </p:txBody>
-      </p:sp>
-      <p:sp>
-        <p:nvSpPr>
-          <p:cNvPr id="15" name="Shape 13"/>
-          <p:cNvSpPr/>
-          <p:nvPr/>
-        </p:nvSpPr>
-        <p:spPr>
-          <a:xfrm>
+            <a:endParaRPr sz="1400"/>
+          </a:p>
+        </p:txBody>
+      </p:sp>
+      <p:sp>
+        <p:nvSpPr>
+          <p:cNvPr id="15" name="Shape 13">
+            <a:extLst xmlns:a="http://schemas.openxmlformats.org/drawingml/2006/main">
+              <a:ext uri="{FF2B5EF4-FFF2-40B4-BE49-F238E27FC236}">
+                <a16:creationId xmlns:a16="http://schemas.microsoft.com/office/drawing/2014/main" id="{E09362C0-7562-4FE6-9C70-4E886EA43BDE}"/>
+              </a:ext>
+            </a:extLst>
+          </p:cNvPr>
+          <p:cNvSpPr>
+            <a:spLocks xmlns:a="http://schemas.openxmlformats.org/drawingml/2006/main" noGrp="1"/>
+          </p:cNvSpPr>
+          <p:nvPr/>
+        </p:nvSpPr>
+        <p:spPr>
+          <a:xfrm xmlns:a="http://schemas.openxmlformats.org/drawingml/2006/main">
             <a:off x="1047750" y="3875286"/>
             <a:ext cx="10096500" cy="0"/>
           </a:xfrm>
-          <a:prstGeom prst="line">
-            <a:avLst/>
-          </a:prstGeom>
-          <a:noFill/>
-          <a:ln w="6350">
+          <a:prstGeom xmlns:a="http://schemas.openxmlformats.org/drawingml/2006/main" prst="line">
+            <a:avLst/>
+          </a:prstGeom>
+          <a:noFill xmlns:a="http://schemas.openxmlformats.org/drawingml/2006/main"/>
+          <a:ln xmlns:a="http://schemas.openxmlformats.org/drawingml/2006/main" w="6350">
             <a:solidFill>
               <a:srgbClr val="E3E8EE"/>
             </a:solidFill>
@@ -24974,108 +25543,130 @@
       </p:sp>
       <p:sp>
         <p:nvSpPr>
-          <p:cNvPr id="16" name="Text 14"/>
-          <p:cNvSpPr/>
-          <p:nvPr/>
-        </p:nvSpPr>
-        <p:spPr>
-          <a:xfrm>
+          <p:cNvPr id="16" name="Text 14">
+            <a:extLst xmlns:a="http://schemas.openxmlformats.org/drawingml/2006/main">
+              <a:ext uri="{FF2B5EF4-FFF2-40B4-BE49-F238E27FC236}">
+                <a16:creationId xmlns:a16="http://schemas.microsoft.com/office/drawing/2014/main" id="{6554C38F-FBAD-4032-B26E-8CDA48D8A293}"/>
+              </a:ext>
+            </a:extLst>
+          </p:cNvPr>
+          <p:cNvSpPr>
+            <a:spLocks xmlns:a="http://schemas.openxmlformats.org/drawingml/2006/main" noGrp="1"/>
+          </p:cNvSpPr>
+          <p:nvPr/>
+        </p:nvSpPr>
+        <p:spPr>
+          <a:xfrm xmlns:a="http://schemas.openxmlformats.org/drawingml/2006/main">
             <a:off x="1047750" y="3980061"/>
             <a:ext cx="508000" cy="381000"/>
           </a:xfrm>
-          <a:prstGeom prst="rect">
-            <a:avLst/>
-          </a:prstGeom>
-          <a:noFill/>
-          <a:ln/>
-        </p:spPr>
-        <p:txBody>
-          <a:bodyPr wrap="square" lIns="0" tIns="0" rIns="0" bIns="0" rtlCol="0" anchor="t">
-            <a:normAutofit/>
-          </a:bodyPr>
-          <a:lstStyle/>
-          <a:p>
-            <a:pPr algn="l" indent="0" marL="0">
+          <a:prstGeom xmlns:a="http://schemas.openxmlformats.org/drawingml/2006/main" prst="rect">
+            <a:avLst/>
+          </a:prstGeom>
+          <a:noFill xmlns:a="http://schemas.openxmlformats.org/drawingml/2006/main"/>
+        </p:spPr>
+        <p:txBody>
+          <a:bodyPr xmlns:a="http://schemas.openxmlformats.org/drawingml/2006/main" wrap="square" lIns="0" tIns="0" rIns="0" bIns="0" anchor="t">
+            <a:normAutofit/>
+          </a:bodyPr>
+          <a:lstStyle xmlns:a="http://schemas.openxmlformats.org/drawingml/2006/main"/>
+          <a:p xmlns:a="http://schemas.openxmlformats.org/drawingml/2006/main">
+            <a:pPr marL="0" indent="0" algn="l">
               <a:lnSpc>
                 <a:spcPts val="2800"/>
               </a:lnSpc>
               <a:buNone/>
             </a:pPr>
             <a:r>
-              <a:rPr lang="en-US" sz="2000" dirty="0">
+              <a:rPr sz="2000">
                 <a:solidFill>
                   <a:srgbClr val="7D5E00"/>
                 </a:solidFill>
-                <a:latin typeface="IBM Plex Mono" pitchFamily="49" charset="0"/>
-                <a:ea typeface="IBM Plex Mono" pitchFamily="49" charset="-122"/>
-                <a:cs typeface="IBM Plex Mono" pitchFamily="49" charset="-120"/>
+                <a:latin typeface="IBM Plex Mono"/>
+                <a:ea typeface="IBM Plex Mono"/>
+                <a:cs typeface="IBM Plex Mono"/>
               </a:rPr>
               <a:t>04</a:t>
             </a:r>
-            <a:endParaRPr lang="en-US" sz="2000" dirty="0"/>
-          </a:p>
-        </p:txBody>
-      </p:sp>
-      <p:sp>
-        <p:nvSpPr>
-          <p:cNvPr id="17" name="Text 15"/>
-          <p:cNvSpPr/>
-          <p:nvPr/>
-        </p:nvSpPr>
-        <p:spPr>
-          <a:xfrm>
+            <a:endParaRPr sz="2000"/>
+          </a:p>
+        </p:txBody>
+      </p:sp>
+      <p:sp>
+        <p:nvSpPr>
+          <p:cNvPr id="17" name="Text 15">
+            <a:extLst xmlns:a="http://schemas.openxmlformats.org/drawingml/2006/main">
+              <a:ext uri="{FF2B5EF4-FFF2-40B4-BE49-F238E27FC236}">
+                <a16:creationId xmlns:a16="http://schemas.microsoft.com/office/drawing/2014/main" id="{7DA0A162-E856-4857-A58C-7E5E58082BCF}"/>
+              </a:ext>
+            </a:extLst>
+          </p:cNvPr>
+          <p:cNvSpPr>
+            <a:spLocks xmlns:a="http://schemas.openxmlformats.org/drawingml/2006/main" noGrp="1"/>
+          </p:cNvSpPr>
+          <p:nvPr/>
+        </p:nvSpPr>
+        <p:spPr>
+          <a:xfrm xmlns:a="http://schemas.openxmlformats.org/drawingml/2006/main">
             <a:off x="1708150" y="4033441"/>
             <a:ext cx="9719183" cy="274241"/>
           </a:xfrm>
-          <a:prstGeom prst="rect">
-            <a:avLst/>
-          </a:prstGeom>
-          <a:noFill/>
-          <a:ln/>
-        </p:spPr>
-        <p:txBody>
-          <a:bodyPr wrap="square" lIns="0" tIns="0" rIns="0" bIns="0" rtlCol="0" anchor="t">
-            <a:normAutofit/>
-          </a:bodyPr>
-          <a:lstStyle/>
-          <a:p>
-            <a:pPr algn="l" indent="0" marL="0">
+          <a:prstGeom xmlns:a="http://schemas.openxmlformats.org/drawingml/2006/main" prst="rect">
+            <a:avLst/>
+          </a:prstGeom>
+          <a:noFill xmlns:a="http://schemas.openxmlformats.org/drawingml/2006/main"/>
+        </p:spPr>
+        <p:txBody>
+          <a:bodyPr xmlns:a="http://schemas.openxmlformats.org/drawingml/2006/main" wrap="square" lIns="0" tIns="0" rIns="0" bIns="0" anchor="t">
+            <a:normAutofit/>
+          </a:bodyPr>
+          <a:lstStyle xmlns:a="http://schemas.openxmlformats.org/drawingml/2006/main"/>
+          <a:p xmlns:a="http://schemas.openxmlformats.org/drawingml/2006/main">
+            <a:pPr marL="0" indent="0" algn="l">
               <a:lnSpc>
                 <a:spcPts val="1960"/>
               </a:lnSpc>
               <a:buNone/>
             </a:pPr>
             <a:r>
-              <a:rPr lang="en-US" sz="1400" dirty="0">
+              <a:rPr sz="1400">
                 <a:solidFill>
                   <a:srgbClr val="13202D"/>
                 </a:solidFill>
-                <a:latin typeface="IBM Plex Sans" pitchFamily="34" charset="0"/>
-                <a:ea typeface="IBM Plex Sans" pitchFamily="34" charset="-122"/>
-                <a:cs typeface="IBM Plex Sans" pitchFamily="34" charset="-120"/>
+                <a:latin typeface="IBM Plex Sans"/>
+                <a:ea typeface="IBM Plex Sans"/>
+                <a:cs typeface="IBM Plex Sans"/>
               </a:rPr>
               <a:t>Сваки члан тима објашњава свој део без генерисаног одговора.</a:t>
             </a:r>
-            <a:endParaRPr lang="en-US" sz="1400" dirty="0"/>
-          </a:p>
-        </p:txBody>
-      </p:sp>
-      <p:sp>
-        <p:nvSpPr>
-          <p:cNvPr id="18" name="Shape 16"/>
-          <p:cNvSpPr/>
-          <p:nvPr/>
-        </p:nvSpPr>
-        <p:spPr>
-          <a:xfrm>
+            <a:endParaRPr sz="1400"/>
+          </a:p>
+        </p:txBody>
+      </p:sp>
+      <p:sp>
+        <p:nvSpPr>
+          <p:cNvPr id="18" name="Shape 16">
+            <a:extLst xmlns:a="http://schemas.openxmlformats.org/drawingml/2006/main">
+              <a:ext uri="{FF2B5EF4-FFF2-40B4-BE49-F238E27FC236}">
+                <a16:creationId xmlns:a16="http://schemas.microsoft.com/office/drawing/2014/main" id="{E8E5656D-00C1-4B3B-AF37-5D7F5D67F66F}"/>
+              </a:ext>
+            </a:extLst>
+          </p:cNvPr>
+          <p:cNvSpPr>
+            <a:spLocks xmlns:a="http://schemas.openxmlformats.org/drawingml/2006/main" noGrp="1"/>
+          </p:cNvSpPr>
+          <p:nvPr/>
+        </p:nvSpPr>
+        <p:spPr>
+          <a:xfrm xmlns:a="http://schemas.openxmlformats.org/drawingml/2006/main">
             <a:off x="1047750" y="4440436"/>
             <a:ext cx="10096500" cy="0"/>
           </a:xfrm>
-          <a:prstGeom prst="line">
-            <a:avLst/>
-          </a:prstGeom>
-          <a:noFill/>
-          <a:ln w="6350">
+          <a:prstGeom xmlns:a="http://schemas.openxmlformats.org/drawingml/2006/main" prst="line">
+            <a:avLst/>
+          </a:prstGeom>
+          <a:noFill xmlns:a="http://schemas.openxmlformats.org/drawingml/2006/main"/>
+          <a:ln xmlns:a="http://schemas.openxmlformats.org/drawingml/2006/main" w="6350">
             <a:solidFill>
               <a:srgbClr val="E3E8EE"/>
             </a:solidFill>
@@ -25085,108 +25676,130 @@
       </p:sp>
       <p:sp>
         <p:nvSpPr>
-          <p:cNvPr id="19" name="Text 17"/>
-          <p:cNvSpPr/>
-          <p:nvPr/>
-        </p:nvSpPr>
-        <p:spPr>
-          <a:xfrm>
+          <p:cNvPr id="19" name="Text 17">
+            <a:extLst xmlns:a="http://schemas.openxmlformats.org/drawingml/2006/main">
+              <a:ext uri="{FF2B5EF4-FFF2-40B4-BE49-F238E27FC236}">
+                <a16:creationId xmlns:a16="http://schemas.microsoft.com/office/drawing/2014/main" id="{1CDBD537-759B-401A-A473-35B8464E2BC3}"/>
+              </a:ext>
+            </a:extLst>
+          </p:cNvPr>
+          <p:cNvSpPr>
+            <a:spLocks xmlns:a="http://schemas.openxmlformats.org/drawingml/2006/main" noGrp="1"/>
+          </p:cNvSpPr>
+          <p:nvPr/>
+        </p:nvSpPr>
+        <p:spPr>
+          <a:xfrm xmlns:a="http://schemas.openxmlformats.org/drawingml/2006/main">
             <a:off x="1047750" y="4545211"/>
             <a:ext cx="508000" cy="381000"/>
           </a:xfrm>
-          <a:prstGeom prst="rect">
-            <a:avLst/>
-          </a:prstGeom>
-          <a:noFill/>
-          <a:ln/>
-        </p:spPr>
-        <p:txBody>
-          <a:bodyPr wrap="square" lIns="0" tIns="0" rIns="0" bIns="0" rtlCol="0" anchor="t">
-            <a:normAutofit/>
-          </a:bodyPr>
-          <a:lstStyle/>
-          <a:p>
-            <a:pPr algn="l" indent="0" marL="0">
+          <a:prstGeom xmlns:a="http://schemas.openxmlformats.org/drawingml/2006/main" prst="rect">
+            <a:avLst/>
+          </a:prstGeom>
+          <a:noFill xmlns:a="http://schemas.openxmlformats.org/drawingml/2006/main"/>
+        </p:spPr>
+        <p:txBody>
+          <a:bodyPr xmlns:a="http://schemas.openxmlformats.org/drawingml/2006/main" wrap="square" lIns="0" tIns="0" rIns="0" bIns="0" anchor="t">
+            <a:normAutofit/>
+          </a:bodyPr>
+          <a:lstStyle xmlns:a="http://schemas.openxmlformats.org/drawingml/2006/main"/>
+          <a:p xmlns:a="http://schemas.openxmlformats.org/drawingml/2006/main">
+            <a:pPr marL="0" indent="0" algn="l">
               <a:lnSpc>
                 <a:spcPts val="2800"/>
               </a:lnSpc>
               <a:buNone/>
             </a:pPr>
             <a:r>
-              <a:rPr lang="en-US" sz="2000" dirty="0">
+              <a:rPr sz="2000">
                 <a:solidFill>
                   <a:srgbClr val="A8520A"/>
                 </a:solidFill>
-                <a:latin typeface="IBM Plex Mono" pitchFamily="49" charset="0"/>
-                <a:ea typeface="IBM Plex Mono" pitchFamily="49" charset="-122"/>
-                <a:cs typeface="IBM Plex Mono" pitchFamily="49" charset="-120"/>
+                <a:latin typeface="IBM Plex Mono"/>
+                <a:ea typeface="IBM Plex Mono"/>
+                <a:cs typeface="IBM Plex Mono"/>
               </a:rPr>
               <a:t>05</a:t>
             </a:r>
-            <a:endParaRPr lang="en-US" sz="2000" dirty="0"/>
-          </a:p>
-        </p:txBody>
-      </p:sp>
-      <p:sp>
-        <p:nvSpPr>
-          <p:cNvPr id="20" name="Text 18"/>
-          <p:cNvSpPr/>
-          <p:nvPr/>
-        </p:nvSpPr>
-        <p:spPr>
-          <a:xfrm>
+            <a:endParaRPr sz="2000"/>
+          </a:p>
+        </p:txBody>
+      </p:sp>
+      <p:sp>
+        <p:nvSpPr>
+          <p:cNvPr id="20" name="Text 18">
+            <a:extLst xmlns:a="http://schemas.openxmlformats.org/drawingml/2006/main">
+              <a:ext uri="{FF2B5EF4-FFF2-40B4-BE49-F238E27FC236}">
+                <a16:creationId xmlns:a16="http://schemas.microsoft.com/office/drawing/2014/main" id="{E1CEC571-0338-4600-9C2D-26C1735A8D4F}"/>
+              </a:ext>
+            </a:extLst>
+          </p:cNvPr>
+          <p:cNvSpPr>
+            <a:spLocks xmlns:a="http://schemas.openxmlformats.org/drawingml/2006/main" noGrp="1"/>
+          </p:cNvSpPr>
+          <p:nvPr/>
+        </p:nvSpPr>
+        <p:spPr>
+          <a:xfrm xmlns:a="http://schemas.openxmlformats.org/drawingml/2006/main">
             <a:off x="1708150" y="4598591"/>
             <a:ext cx="9719183" cy="274241"/>
           </a:xfrm>
-          <a:prstGeom prst="rect">
-            <a:avLst/>
-          </a:prstGeom>
-          <a:noFill/>
-          <a:ln/>
-        </p:spPr>
-        <p:txBody>
-          <a:bodyPr wrap="square" lIns="0" tIns="0" rIns="0" bIns="0" rtlCol="0" anchor="t">
-            <a:normAutofit/>
-          </a:bodyPr>
-          <a:lstStyle/>
-          <a:p>
-            <a:pPr algn="l" indent="0" marL="0">
+          <a:prstGeom xmlns:a="http://schemas.openxmlformats.org/drawingml/2006/main" prst="rect">
+            <a:avLst/>
+          </a:prstGeom>
+          <a:noFill xmlns:a="http://schemas.openxmlformats.org/drawingml/2006/main"/>
+        </p:spPr>
+        <p:txBody>
+          <a:bodyPr xmlns:a="http://schemas.openxmlformats.org/drawingml/2006/main" wrap="square" lIns="0" tIns="0" rIns="0" bIns="0" anchor="t">
+            <a:normAutofit fontScale="100000"/>
+          </a:bodyPr>
+          <a:lstStyle xmlns:a="http://schemas.openxmlformats.org/drawingml/2006/main"/>
+          <a:p xmlns:a="http://schemas.openxmlformats.org/drawingml/2006/main">
+            <a:pPr marL="0" indent="0" algn="l">
               <a:lnSpc>
                 <a:spcPts val="1960"/>
               </a:lnSpc>
               <a:buNone/>
             </a:pPr>
             <a:r>
-              <a:rPr lang="en-US" sz="1400" b="1" dirty="0">
+              <a:rPr sz="1400" b="1">
                 <a:solidFill>
                   <a:srgbClr val="13202D"/>
                 </a:solidFill>
-                <a:latin typeface="IBM Plex Sans" pitchFamily="34" charset="0"/>
-                <a:ea typeface="IBM Plex Sans" pitchFamily="34" charset="-122"/>
-                <a:cs typeface="IBM Plex Sans" pitchFamily="34" charset="-120"/>
-              </a:rPr>
-              <a:t>Термин: недеља од 14.12., после Вежбе 8.</a:t>
-            </a:r>
-            <a:endParaRPr lang="en-US" sz="1400" dirty="0"/>
-          </a:p>
-        </p:txBody>
-      </p:sp>
-      <p:sp>
-        <p:nvSpPr>
-          <p:cNvPr id="21" name="Shape 19"/>
-          <p:cNvSpPr/>
-          <p:nvPr/>
-        </p:nvSpPr>
-        <p:spPr>
-          <a:xfrm>
+                <a:latin typeface="IBM Plex Sans"/>
+                <a:ea typeface="IBM Plex Sans"/>
+                <a:cs typeface="IBM Plex Sans"/>
+              </a:rPr>
+              <a:t>Термин КТ2: Вежба 8 · највише 10 поена.</a:t>
+            </a:r>
+            <a:endParaRPr sz="1400"/>
+          </a:p>
+        </p:txBody>
+      </p:sp>
+      <p:sp>
+        <p:nvSpPr>
+          <p:cNvPr id="21" name="Shape 19">
+            <a:extLst xmlns:a="http://schemas.openxmlformats.org/drawingml/2006/main">
+              <a:ext uri="{FF2B5EF4-FFF2-40B4-BE49-F238E27FC236}">
+                <a16:creationId xmlns:a16="http://schemas.microsoft.com/office/drawing/2014/main" id="{743BC6F7-22AF-4AE4-8160-9EB73355AEA0}"/>
+              </a:ext>
+            </a:extLst>
+          </p:cNvPr>
+          <p:cNvSpPr>
+            <a:spLocks xmlns:a="http://schemas.openxmlformats.org/drawingml/2006/main" noGrp="1"/>
+          </p:cNvSpPr>
+          <p:nvPr/>
+        </p:nvSpPr>
+        <p:spPr>
+          <a:xfrm xmlns:a="http://schemas.openxmlformats.org/drawingml/2006/main">
             <a:off x="812800" y="6209705"/>
             <a:ext cx="10566400" cy="0"/>
           </a:xfrm>
-          <a:prstGeom prst="line">
-            <a:avLst/>
-          </a:prstGeom>
-          <a:noFill/>
-          <a:ln w="6350">
+          <a:prstGeom xmlns:a="http://schemas.openxmlformats.org/drawingml/2006/main" prst="line">
+            <a:avLst/>
+          </a:prstGeom>
+          <a:noFill xmlns:a="http://schemas.openxmlformats.org/drawingml/2006/main"/>
+          <a:ln xmlns:a="http://schemas.openxmlformats.org/drawingml/2006/main" w="6350">
             <a:solidFill>
               <a:srgbClr val="D3DAE1"/>
             </a:solidFill>
@@ -25196,97 +25809,113 @@
       </p:sp>
       <p:sp>
         <p:nvSpPr>
-          <p:cNvPr id="22" name="Text 20"/>
-          <p:cNvSpPr/>
-          <p:nvPr/>
-        </p:nvSpPr>
-        <p:spPr>
-          <a:xfrm>
+          <p:cNvPr id="22" name="Text 20">
+            <a:extLst xmlns:a="http://schemas.openxmlformats.org/drawingml/2006/main">
+              <a:ext uri="{FF2B5EF4-FFF2-40B4-BE49-F238E27FC236}">
+                <a16:creationId xmlns:a16="http://schemas.microsoft.com/office/drawing/2014/main" id="{C056C554-BE52-4660-934D-270985D818D2}"/>
+              </a:ext>
+            </a:extLst>
+          </p:cNvPr>
+          <p:cNvSpPr>
+            <a:spLocks xmlns:a="http://schemas.openxmlformats.org/drawingml/2006/main" noGrp="1"/>
+          </p:cNvSpPr>
+          <p:nvPr/>
+        </p:nvSpPr>
+        <p:spPr>
+          <a:xfrm xmlns:a="http://schemas.openxmlformats.org/drawingml/2006/main">
             <a:off x="812800" y="6314480"/>
             <a:ext cx="2390061" cy="238720"/>
           </a:xfrm>
-          <a:prstGeom prst="rect">
-            <a:avLst/>
-          </a:prstGeom>
-          <a:noFill/>
-          <a:ln/>
-        </p:spPr>
-        <p:txBody>
-          <a:bodyPr wrap="square" lIns="0" tIns="0" rIns="0" bIns="0" rtlCol="0" anchor="t">
-            <a:normAutofit/>
-          </a:bodyPr>
-          <a:lstStyle/>
-          <a:p>
-            <a:pPr algn="l" indent="0" marL="0">
+          <a:prstGeom xmlns:a="http://schemas.openxmlformats.org/drawingml/2006/main" prst="rect">
+            <a:avLst/>
+          </a:prstGeom>
+          <a:noFill xmlns:a="http://schemas.openxmlformats.org/drawingml/2006/main"/>
+        </p:spPr>
+        <p:txBody>
+          <a:bodyPr xmlns:a="http://schemas.openxmlformats.org/drawingml/2006/main" wrap="square" lIns="0" tIns="0" rIns="0" bIns="0" anchor="t">
+            <a:normAutofit/>
+          </a:bodyPr>
+          <a:lstStyle xmlns:a="http://schemas.openxmlformats.org/drawingml/2006/main"/>
+          <a:p xmlns:a="http://schemas.openxmlformats.org/drawingml/2006/main">
+            <a:pPr marL="0" indent="0" algn="l">
               <a:lnSpc>
                 <a:spcPts val="1680"/>
               </a:lnSpc>
               <a:buNone/>
             </a:pPr>
             <a:r>
-              <a:rPr lang="en-US" sz="1200" dirty="0">
+              <a:rPr sz="1200">
                 <a:solidFill>
                   <a:srgbClr val="5E6975"/>
                 </a:solidFill>
-                <a:latin typeface="IBM Plex Sans" pitchFamily="34" charset="0"/>
-                <a:ea typeface="IBM Plex Sans" pitchFamily="34" charset="-122"/>
-                <a:cs typeface="IBM Plex Sans" pitchFamily="34" charset="-120"/>
+                <a:latin typeface="IBM Plex Sans"/>
+                <a:ea typeface="IBM Plex Sans"/>
+                <a:cs typeface="IBM Plex Sans"/>
               </a:rPr>
               <a:t>Елементи развоја софтвера</a:t>
             </a:r>
-            <a:endParaRPr lang="en-US" sz="1200" dirty="0"/>
-          </a:p>
-        </p:txBody>
-      </p:sp>
-      <p:sp>
-        <p:nvSpPr>
-          <p:cNvPr id="23" name="Text 21"/>
-          <p:cNvSpPr/>
-          <p:nvPr/>
-        </p:nvSpPr>
-        <p:spPr>
-          <a:xfrm>
+            <a:endParaRPr sz="1200"/>
+          </a:p>
+        </p:txBody>
+      </p:sp>
+      <p:sp>
+        <p:nvSpPr>
+          <p:cNvPr id="23" name="Text 21">
+            <a:extLst xmlns:a="http://schemas.openxmlformats.org/drawingml/2006/main">
+              <a:ext uri="{FF2B5EF4-FFF2-40B4-BE49-F238E27FC236}">
+                <a16:creationId xmlns:a16="http://schemas.microsoft.com/office/drawing/2014/main" id="{ACE83661-E6A7-48AA-A082-8C5837C7F0EB}"/>
+              </a:ext>
+            </a:extLst>
+          </p:cNvPr>
+          <p:cNvSpPr>
+            <a:spLocks xmlns:a="http://schemas.openxmlformats.org/drawingml/2006/main" noGrp="1"/>
+          </p:cNvSpPr>
+          <p:nvPr/>
+        </p:nvSpPr>
+        <p:spPr>
+          <a:xfrm xmlns:a="http://schemas.openxmlformats.org/drawingml/2006/main">
             <a:off x="11145441" y="6314480"/>
             <a:ext cx="233759" cy="238720"/>
           </a:xfrm>
-          <a:prstGeom prst="rect">
-            <a:avLst/>
-          </a:prstGeom>
-          <a:noFill/>
-          <a:ln/>
-        </p:spPr>
-        <p:txBody>
-          <a:bodyPr wrap="square" lIns="0" tIns="0" rIns="0" bIns="0" rtlCol="0" anchor="t">
-            <a:normAutofit/>
-          </a:bodyPr>
-          <a:lstStyle/>
-          <a:p>
-            <a:pPr algn="r" indent="0" marL="0">
+          <a:prstGeom xmlns:a="http://schemas.openxmlformats.org/drawingml/2006/main" prst="rect">
+            <a:avLst/>
+          </a:prstGeom>
+          <a:noFill xmlns:a="http://schemas.openxmlformats.org/drawingml/2006/main"/>
+        </p:spPr>
+        <p:txBody>
+          <a:bodyPr xmlns:a="http://schemas.openxmlformats.org/drawingml/2006/main" wrap="square" lIns="0" tIns="0" rIns="0" bIns="0" anchor="t">
+            <a:normAutofit/>
+          </a:bodyPr>
+          <a:lstStyle xmlns:a="http://schemas.openxmlformats.org/drawingml/2006/main"/>
+          <a:p xmlns:a="http://schemas.openxmlformats.org/drawingml/2006/main">
+            <a:pPr marL="0" indent="0" algn="r">
               <a:lnSpc>
                 <a:spcPts val="1680"/>
               </a:lnSpc>
               <a:buNone/>
             </a:pPr>
             <a:r>
-              <a:rPr lang="en-US" sz="1200" dirty="0">
+              <a:rPr sz="1200">
                 <a:solidFill>
                   <a:srgbClr val="5E6975"/>
                 </a:solidFill>
-                <a:latin typeface="IBM Plex Mono" pitchFamily="49" charset="0"/>
-                <a:ea typeface="IBM Plex Mono" pitchFamily="49" charset="-122"/>
-                <a:cs typeface="IBM Plex Mono" pitchFamily="49" charset="-120"/>
+                <a:latin typeface="IBM Plex Mono"/>
+                <a:ea typeface="IBM Plex Mono"/>
+                <a:cs typeface="IBM Plex Mono"/>
               </a:rPr>
               <a:t>26</a:t>
             </a:r>
-            <a:endParaRPr lang="en-US" sz="1200" dirty="0"/>
+            <a:endParaRPr sz="1200"/>
           </a:p>
         </p:txBody>
       </p:sp>
     </p:spTree>
+    <p:extLst>
+      <p:ext uri="{BB962C8B-B14F-4D97-AF65-F5344CB8AC3E}">
+        <p14:creationId xmlns:p14="http://schemas.microsoft.com/office/powerpoint/2010/main" val="1122072388"/>
+      </p:ext>
+    </p:extLst>
   </p:cSld>
-  <p:clrMapOvr>
-    <a:masterClrMapping/>
-  </p:clrMapOvr>
 </p:sld>
 </file>
 
